--- a/tests/corpus/pptx/generated/animations-gallery.pptx
+++ b/tests/corpus/pptx/generated/animations-gallery.pptx
@@ -13,6 +13,10 @@
     <p:sldId id="261" r:id="rId7"/>
     <p:sldId id="262" r:id="rId8"/>
     <p:sldId id="263" r:id="rId9"/>
+    <p:sldId id="264" r:id="rId10"/>
+    <p:sldId id="265" r:id="rId11"/>
+    <p:sldId id="266" r:id="rId12"/>
+    <p:sldId id="267" r:id="rId13"/>
   </p:sldIdLst>
   <p:sldSz cx="12192000" cy="6858000"/>
   <p:notesSz cx="6858000" cy="9144000"/>
@@ -136,7 +140,7 @@
           <p:cNvPr id="2" name="Titel 1">
             <a:extLst>
               <a:ext uri="{FF2B5EF4-FFF2-40B4-BE49-F238E27FC236}">
-                <a16:creationId xmlns:a16="http://schemas.microsoft.com/office/drawing/2014/main" id="{D8F40E31-3318-FF0C-E44C-8DBF49997219}"/>
+                <a16:creationId xmlns:a16="http://schemas.microsoft.com/office/drawing/2014/main" id="{19074AC3-CA9D-0F3F-4FB7-39B853136154}"/>
               </a:ext>
             </a:extLst>
           </p:cNvPr>
@@ -173,7 +177,7 @@
           <p:cNvPr id="3" name="Untertitel 2">
             <a:extLst>
               <a:ext uri="{FF2B5EF4-FFF2-40B4-BE49-F238E27FC236}">
-                <a16:creationId xmlns:a16="http://schemas.microsoft.com/office/drawing/2014/main" id="{A3951DC5-76F5-623A-0C11-52610BF73F5D}"/>
+                <a16:creationId xmlns:a16="http://schemas.microsoft.com/office/drawing/2014/main" id="{377C6020-3154-1CA1-A9B0-91C6E80920FC}"/>
               </a:ext>
             </a:extLst>
           </p:cNvPr>
@@ -243,7 +247,7 @@
           <p:cNvPr id="4" name="Datumsplatzhalter 3">
             <a:extLst>
               <a:ext uri="{FF2B5EF4-FFF2-40B4-BE49-F238E27FC236}">
-                <a16:creationId xmlns:a16="http://schemas.microsoft.com/office/drawing/2014/main" id="{9F1A51DB-82C5-EDD4-6004-C7CE34333F7F}"/>
+                <a16:creationId xmlns:a16="http://schemas.microsoft.com/office/drawing/2014/main" id="{095F2EC2-458B-9C8B-B283-3103ACB758C6}"/>
               </a:ext>
             </a:extLst>
           </p:cNvPr>
@@ -259,7 +263,7 @@
           <a:bodyPr/>
           <a:lstStyle/>
           <a:p>
-            <a:fld id="{2B6CCDAF-C0FD-41A7-AC91-00988375B8BA}" type="datetimeFigureOut">
+            <a:fld id="{EC2EA7CE-D4DC-42CF-A783-AE5535E9FEDD}" type="datetimeFigureOut">
               <a:rPr lang="de-DE" smtClean="0"/>
               <a:t>09.10.2026</a:t>
             </a:fld>
@@ -272,7 +276,7 @@
           <p:cNvPr id="5" name="Fußzeilenplatzhalter 4">
             <a:extLst>
               <a:ext uri="{FF2B5EF4-FFF2-40B4-BE49-F238E27FC236}">
-                <a16:creationId xmlns:a16="http://schemas.microsoft.com/office/drawing/2014/main" id="{B9072FD0-0720-733C-4B93-D9E0A34208B0}"/>
+                <a16:creationId xmlns:a16="http://schemas.microsoft.com/office/drawing/2014/main" id="{FCFA833A-DEE4-F42D-8D5D-58F627B3400B}"/>
               </a:ext>
             </a:extLst>
           </p:cNvPr>
@@ -297,7 +301,7 @@
           <p:cNvPr id="6" name="Foliennummernplatzhalter 5">
             <a:extLst>
               <a:ext uri="{FF2B5EF4-FFF2-40B4-BE49-F238E27FC236}">
-                <a16:creationId xmlns:a16="http://schemas.microsoft.com/office/drawing/2014/main" id="{30ED92E5-C49E-E770-C5F8-5D29980D82F2}"/>
+                <a16:creationId xmlns:a16="http://schemas.microsoft.com/office/drawing/2014/main" id="{078BE964-3294-77D2-A10A-267795F54547}"/>
               </a:ext>
             </a:extLst>
           </p:cNvPr>
@@ -313,7 +317,7 @@
           <a:bodyPr/>
           <a:lstStyle/>
           <a:p>
-            <a:fld id="{B6E45C21-F40F-4997-A5DE-911FC237E363}" type="slidenum">
+            <a:fld id="{317E6C74-243B-4B0A-838A-14C92BD4A501}" type="slidenum">
               <a:rPr lang="de-DE" smtClean="0"/>
               <a:t>‹Nr.›</a:t>
             </a:fld>
@@ -324,7 +328,7 @@
     </p:spTree>
     <p:extLst>
       <p:ext uri="{BB962C8B-B14F-4D97-AF65-F5344CB8AC3E}">
-        <p14:creationId xmlns:p14="http://schemas.microsoft.com/office/powerpoint/2010/main" val="2710569539"/>
+        <p14:creationId xmlns:p14="http://schemas.microsoft.com/office/powerpoint/2010/main" val="4212839224"/>
       </p:ext>
     </p:extLst>
   </p:cSld>
@@ -356,7 +360,7 @@
           <p:cNvPr id="2" name="Titel 1">
             <a:extLst>
               <a:ext uri="{FF2B5EF4-FFF2-40B4-BE49-F238E27FC236}">
-                <a16:creationId xmlns:a16="http://schemas.microsoft.com/office/drawing/2014/main" id="{583F3381-FAFE-9C0B-C450-4BC176C7E721}"/>
+                <a16:creationId xmlns:a16="http://schemas.microsoft.com/office/drawing/2014/main" id="{63FD9B73-D949-7467-1ED9-8C779A445756}"/>
               </a:ext>
             </a:extLst>
           </p:cNvPr>
@@ -384,7 +388,7 @@
           <p:cNvPr id="3" name="Vertikaler Textplatzhalter 2">
             <a:extLst>
               <a:ext uri="{FF2B5EF4-FFF2-40B4-BE49-F238E27FC236}">
-                <a16:creationId xmlns:a16="http://schemas.microsoft.com/office/drawing/2014/main" id="{35B38093-C50D-A2EF-F48B-369D38089323}"/>
+                <a16:creationId xmlns:a16="http://schemas.microsoft.com/office/drawing/2014/main" id="{EF9D54C4-9F78-9D9E-7351-80004FEC6ECF}"/>
               </a:ext>
             </a:extLst>
           </p:cNvPr>
@@ -441,7 +445,7 @@
           <p:cNvPr id="4" name="Datumsplatzhalter 3">
             <a:extLst>
               <a:ext uri="{FF2B5EF4-FFF2-40B4-BE49-F238E27FC236}">
-                <a16:creationId xmlns:a16="http://schemas.microsoft.com/office/drawing/2014/main" id="{609B3060-2B29-D419-14DF-B92F013FC182}"/>
+                <a16:creationId xmlns:a16="http://schemas.microsoft.com/office/drawing/2014/main" id="{84FC0DDF-52C3-3281-9544-553F85A1262E}"/>
               </a:ext>
             </a:extLst>
           </p:cNvPr>
@@ -457,7 +461,7 @@
           <a:bodyPr/>
           <a:lstStyle/>
           <a:p>
-            <a:fld id="{2B6CCDAF-C0FD-41A7-AC91-00988375B8BA}" type="datetimeFigureOut">
+            <a:fld id="{EC2EA7CE-D4DC-42CF-A783-AE5535E9FEDD}" type="datetimeFigureOut">
               <a:rPr lang="de-DE" smtClean="0"/>
               <a:t>09.10.2026</a:t>
             </a:fld>
@@ -470,7 +474,7 @@
           <p:cNvPr id="5" name="Fußzeilenplatzhalter 4">
             <a:extLst>
               <a:ext uri="{FF2B5EF4-FFF2-40B4-BE49-F238E27FC236}">
-                <a16:creationId xmlns:a16="http://schemas.microsoft.com/office/drawing/2014/main" id="{D15EE9C0-5AAD-18DC-ED80-EAB9A86E9DFB}"/>
+                <a16:creationId xmlns:a16="http://schemas.microsoft.com/office/drawing/2014/main" id="{61EC8400-8B80-EDED-AB8A-A49F6D854414}"/>
               </a:ext>
             </a:extLst>
           </p:cNvPr>
@@ -495,7 +499,7 @@
           <p:cNvPr id="6" name="Foliennummernplatzhalter 5">
             <a:extLst>
               <a:ext uri="{FF2B5EF4-FFF2-40B4-BE49-F238E27FC236}">
-                <a16:creationId xmlns:a16="http://schemas.microsoft.com/office/drawing/2014/main" id="{EDEE7CBF-7904-7C99-8F0C-B948D4BC30F1}"/>
+                <a16:creationId xmlns:a16="http://schemas.microsoft.com/office/drawing/2014/main" id="{CC57B4BC-3ACC-56BD-83DC-B42DD99513C6}"/>
               </a:ext>
             </a:extLst>
           </p:cNvPr>
@@ -511,7 +515,7 @@
           <a:bodyPr/>
           <a:lstStyle/>
           <a:p>
-            <a:fld id="{B6E45C21-F40F-4997-A5DE-911FC237E363}" type="slidenum">
+            <a:fld id="{317E6C74-243B-4B0A-838A-14C92BD4A501}" type="slidenum">
               <a:rPr lang="de-DE" smtClean="0"/>
               <a:t>‹Nr.›</a:t>
             </a:fld>
@@ -522,7 +526,7 @@
     </p:spTree>
     <p:extLst>
       <p:ext uri="{BB962C8B-B14F-4D97-AF65-F5344CB8AC3E}">
-        <p14:creationId xmlns:p14="http://schemas.microsoft.com/office/powerpoint/2010/main" val="2271886290"/>
+        <p14:creationId xmlns:p14="http://schemas.microsoft.com/office/powerpoint/2010/main" val="1346968259"/>
       </p:ext>
     </p:extLst>
   </p:cSld>
@@ -554,7 +558,7 @@
           <p:cNvPr id="2" name="Vertikaler Titel 1">
             <a:extLst>
               <a:ext uri="{FF2B5EF4-FFF2-40B4-BE49-F238E27FC236}">
-                <a16:creationId xmlns:a16="http://schemas.microsoft.com/office/drawing/2014/main" id="{2BF0C74F-035F-8290-5F5A-5223521A7843}"/>
+                <a16:creationId xmlns:a16="http://schemas.microsoft.com/office/drawing/2014/main" id="{AE5B2229-9234-1F48-6AD4-EF2F359CC0CB}"/>
               </a:ext>
             </a:extLst>
           </p:cNvPr>
@@ -587,7 +591,7 @@
           <p:cNvPr id="3" name="Vertikaler Textplatzhalter 2">
             <a:extLst>
               <a:ext uri="{FF2B5EF4-FFF2-40B4-BE49-F238E27FC236}">
-                <a16:creationId xmlns:a16="http://schemas.microsoft.com/office/drawing/2014/main" id="{8C583F0D-C98D-8A21-A24A-0F6D70DAB059}"/>
+                <a16:creationId xmlns:a16="http://schemas.microsoft.com/office/drawing/2014/main" id="{700EAFC6-0767-0AD4-A3F2-FE76D68CFF68}"/>
               </a:ext>
             </a:extLst>
           </p:cNvPr>
@@ -649,7 +653,7 @@
           <p:cNvPr id="4" name="Datumsplatzhalter 3">
             <a:extLst>
               <a:ext uri="{FF2B5EF4-FFF2-40B4-BE49-F238E27FC236}">
-                <a16:creationId xmlns:a16="http://schemas.microsoft.com/office/drawing/2014/main" id="{646FF8B6-EF8E-10A7-CD84-47F54049E329}"/>
+                <a16:creationId xmlns:a16="http://schemas.microsoft.com/office/drawing/2014/main" id="{1F5759D9-2CEA-7D82-9A22-3051EF85BB9A}"/>
               </a:ext>
             </a:extLst>
           </p:cNvPr>
@@ -665,7 +669,7 @@
           <a:bodyPr/>
           <a:lstStyle/>
           <a:p>
-            <a:fld id="{2B6CCDAF-C0FD-41A7-AC91-00988375B8BA}" type="datetimeFigureOut">
+            <a:fld id="{EC2EA7CE-D4DC-42CF-A783-AE5535E9FEDD}" type="datetimeFigureOut">
               <a:rPr lang="de-DE" smtClean="0"/>
               <a:t>09.10.2026</a:t>
             </a:fld>
@@ -678,7 +682,7 @@
           <p:cNvPr id="5" name="Fußzeilenplatzhalter 4">
             <a:extLst>
               <a:ext uri="{FF2B5EF4-FFF2-40B4-BE49-F238E27FC236}">
-                <a16:creationId xmlns:a16="http://schemas.microsoft.com/office/drawing/2014/main" id="{D9962B93-8CBE-ECCB-B4D0-232DB691325D}"/>
+                <a16:creationId xmlns:a16="http://schemas.microsoft.com/office/drawing/2014/main" id="{B8CC5977-489A-9208-3075-D16D64E990A7}"/>
               </a:ext>
             </a:extLst>
           </p:cNvPr>
@@ -703,7 +707,7 @@
           <p:cNvPr id="6" name="Foliennummernplatzhalter 5">
             <a:extLst>
               <a:ext uri="{FF2B5EF4-FFF2-40B4-BE49-F238E27FC236}">
-                <a16:creationId xmlns:a16="http://schemas.microsoft.com/office/drawing/2014/main" id="{A6BDAF6D-5C36-8436-72FF-1FA2182A79D4}"/>
+                <a16:creationId xmlns:a16="http://schemas.microsoft.com/office/drawing/2014/main" id="{CB46579A-4EA2-F758-39C6-5B53CD406457}"/>
               </a:ext>
             </a:extLst>
           </p:cNvPr>
@@ -719,7 +723,7 @@
           <a:bodyPr/>
           <a:lstStyle/>
           <a:p>
-            <a:fld id="{B6E45C21-F40F-4997-A5DE-911FC237E363}" type="slidenum">
+            <a:fld id="{317E6C74-243B-4B0A-838A-14C92BD4A501}" type="slidenum">
               <a:rPr lang="de-DE" smtClean="0"/>
               <a:t>‹Nr.›</a:t>
             </a:fld>
@@ -730,7 +734,7 @@
     </p:spTree>
     <p:extLst>
       <p:ext uri="{BB962C8B-B14F-4D97-AF65-F5344CB8AC3E}">
-        <p14:creationId xmlns:p14="http://schemas.microsoft.com/office/powerpoint/2010/main" val="1504944579"/>
+        <p14:creationId xmlns:p14="http://schemas.microsoft.com/office/powerpoint/2010/main" val="2960713092"/>
       </p:ext>
     </p:extLst>
   </p:cSld>
@@ -762,7 +766,7 @@
           <p:cNvPr id="2" name="Titel 1">
             <a:extLst>
               <a:ext uri="{FF2B5EF4-FFF2-40B4-BE49-F238E27FC236}">
-                <a16:creationId xmlns:a16="http://schemas.microsoft.com/office/drawing/2014/main" id="{79930822-1F11-AEFF-11D6-37623205A103}"/>
+                <a16:creationId xmlns:a16="http://schemas.microsoft.com/office/drawing/2014/main" id="{925EC0B4-54B8-37D8-A42B-D8433E14BA20}"/>
               </a:ext>
             </a:extLst>
           </p:cNvPr>
@@ -790,7 +794,7 @@
           <p:cNvPr id="3" name="Inhaltsplatzhalter 2">
             <a:extLst>
               <a:ext uri="{FF2B5EF4-FFF2-40B4-BE49-F238E27FC236}">
-                <a16:creationId xmlns:a16="http://schemas.microsoft.com/office/drawing/2014/main" id="{30571D5F-D956-43E7-1CFE-432ACF90BEE8}"/>
+                <a16:creationId xmlns:a16="http://schemas.microsoft.com/office/drawing/2014/main" id="{A9568E9D-1FFD-C0E1-723F-13FD22732320}"/>
               </a:ext>
             </a:extLst>
           </p:cNvPr>
@@ -847,7 +851,7 @@
           <p:cNvPr id="4" name="Datumsplatzhalter 3">
             <a:extLst>
               <a:ext uri="{FF2B5EF4-FFF2-40B4-BE49-F238E27FC236}">
-                <a16:creationId xmlns:a16="http://schemas.microsoft.com/office/drawing/2014/main" id="{F9487E17-AF84-D85A-3221-9DF7F77D0BCA}"/>
+                <a16:creationId xmlns:a16="http://schemas.microsoft.com/office/drawing/2014/main" id="{ACC4EE0B-E3DD-1405-E8E2-949BB6005BF9}"/>
               </a:ext>
             </a:extLst>
           </p:cNvPr>
@@ -863,7 +867,7 @@
           <a:bodyPr/>
           <a:lstStyle/>
           <a:p>
-            <a:fld id="{2B6CCDAF-C0FD-41A7-AC91-00988375B8BA}" type="datetimeFigureOut">
+            <a:fld id="{EC2EA7CE-D4DC-42CF-A783-AE5535E9FEDD}" type="datetimeFigureOut">
               <a:rPr lang="de-DE" smtClean="0"/>
               <a:t>09.10.2026</a:t>
             </a:fld>
@@ -876,7 +880,7 @@
           <p:cNvPr id="5" name="Fußzeilenplatzhalter 4">
             <a:extLst>
               <a:ext uri="{FF2B5EF4-FFF2-40B4-BE49-F238E27FC236}">
-                <a16:creationId xmlns:a16="http://schemas.microsoft.com/office/drawing/2014/main" id="{E1A459E6-241B-D96A-9B4B-127F670CA182}"/>
+                <a16:creationId xmlns:a16="http://schemas.microsoft.com/office/drawing/2014/main" id="{30EFA19D-62BD-3005-C63D-9D43EDDE4AF1}"/>
               </a:ext>
             </a:extLst>
           </p:cNvPr>
@@ -901,7 +905,7 @@
           <p:cNvPr id="6" name="Foliennummernplatzhalter 5">
             <a:extLst>
               <a:ext uri="{FF2B5EF4-FFF2-40B4-BE49-F238E27FC236}">
-                <a16:creationId xmlns:a16="http://schemas.microsoft.com/office/drawing/2014/main" id="{A3156F57-FD2C-0677-BD44-A6489F1CB3F1}"/>
+                <a16:creationId xmlns:a16="http://schemas.microsoft.com/office/drawing/2014/main" id="{634BABD8-A95A-8998-5A82-AF4582ACED43}"/>
               </a:ext>
             </a:extLst>
           </p:cNvPr>
@@ -917,7 +921,7 @@
           <a:bodyPr/>
           <a:lstStyle/>
           <a:p>
-            <a:fld id="{B6E45C21-F40F-4997-A5DE-911FC237E363}" type="slidenum">
+            <a:fld id="{317E6C74-243B-4B0A-838A-14C92BD4A501}" type="slidenum">
               <a:rPr lang="de-DE" smtClean="0"/>
               <a:t>‹Nr.›</a:t>
             </a:fld>
@@ -928,7 +932,7 @@
     </p:spTree>
     <p:extLst>
       <p:ext uri="{BB962C8B-B14F-4D97-AF65-F5344CB8AC3E}">
-        <p14:creationId xmlns:p14="http://schemas.microsoft.com/office/powerpoint/2010/main" val="2699892759"/>
+        <p14:creationId xmlns:p14="http://schemas.microsoft.com/office/powerpoint/2010/main" val="955865162"/>
       </p:ext>
     </p:extLst>
   </p:cSld>
@@ -960,7 +964,7 @@
           <p:cNvPr id="2" name="Titel 1">
             <a:extLst>
               <a:ext uri="{FF2B5EF4-FFF2-40B4-BE49-F238E27FC236}">
-                <a16:creationId xmlns:a16="http://schemas.microsoft.com/office/drawing/2014/main" id="{8843D4F8-F35D-79BC-55BB-48A6F46BCE47}"/>
+                <a16:creationId xmlns:a16="http://schemas.microsoft.com/office/drawing/2014/main" id="{0594ABC0-AFD3-EBD1-4707-BCEF9D0486F3}"/>
               </a:ext>
             </a:extLst>
           </p:cNvPr>
@@ -997,7 +1001,7 @@
           <p:cNvPr id="3" name="Textplatzhalter 2">
             <a:extLst>
               <a:ext uri="{FF2B5EF4-FFF2-40B4-BE49-F238E27FC236}">
-                <a16:creationId xmlns:a16="http://schemas.microsoft.com/office/drawing/2014/main" id="{EA09FD2A-B934-2264-FDE3-F8AB4AB7A288}"/>
+                <a16:creationId xmlns:a16="http://schemas.microsoft.com/office/drawing/2014/main" id="{A0760CBC-1999-A67A-6935-63996DF6663B}"/>
               </a:ext>
             </a:extLst>
           </p:cNvPr>
@@ -1122,7 +1126,7 @@
           <p:cNvPr id="4" name="Datumsplatzhalter 3">
             <a:extLst>
               <a:ext uri="{FF2B5EF4-FFF2-40B4-BE49-F238E27FC236}">
-                <a16:creationId xmlns:a16="http://schemas.microsoft.com/office/drawing/2014/main" id="{F8D2D48B-4BBD-F643-DC52-467EBA80775D}"/>
+                <a16:creationId xmlns:a16="http://schemas.microsoft.com/office/drawing/2014/main" id="{975B0A2B-096E-745C-06AD-375B1CEF63DD}"/>
               </a:ext>
             </a:extLst>
           </p:cNvPr>
@@ -1138,7 +1142,7 @@
           <a:bodyPr/>
           <a:lstStyle/>
           <a:p>
-            <a:fld id="{2B6CCDAF-C0FD-41A7-AC91-00988375B8BA}" type="datetimeFigureOut">
+            <a:fld id="{EC2EA7CE-D4DC-42CF-A783-AE5535E9FEDD}" type="datetimeFigureOut">
               <a:rPr lang="de-DE" smtClean="0"/>
               <a:t>09.10.2026</a:t>
             </a:fld>
@@ -1151,7 +1155,7 @@
           <p:cNvPr id="5" name="Fußzeilenplatzhalter 4">
             <a:extLst>
               <a:ext uri="{FF2B5EF4-FFF2-40B4-BE49-F238E27FC236}">
-                <a16:creationId xmlns:a16="http://schemas.microsoft.com/office/drawing/2014/main" id="{36256A28-68D3-B304-81B9-C307237A9FCA}"/>
+                <a16:creationId xmlns:a16="http://schemas.microsoft.com/office/drawing/2014/main" id="{70504A0A-0A0E-C0F7-AC03-3140F94A158D}"/>
               </a:ext>
             </a:extLst>
           </p:cNvPr>
@@ -1176,7 +1180,7 @@
           <p:cNvPr id="6" name="Foliennummernplatzhalter 5">
             <a:extLst>
               <a:ext uri="{FF2B5EF4-FFF2-40B4-BE49-F238E27FC236}">
-                <a16:creationId xmlns:a16="http://schemas.microsoft.com/office/drawing/2014/main" id="{182D470C-EEDA-76FB-AFBD-73FF5C52B0F1}"/>
+                <a16:creationId xmlns:a16="http://schemas.microsoft.com/office/drawing/2014/main" id="{4BB4AB80-0C73-46FA-331C-A3F37EC2B992}"/>
               </a:ext>
             </a:extLst>
           </p:cNvPr>
@@ -1192,7 +1196,7 @@
           <a:bodyPr/>
           <a:lstStyle/>
           <a:p>
-            <a:fld id="{B6E45C21-F40F-4997-A5DE-911FC237E363}" type="slidenum">
+            <a:fld id="{317E6C74-243B-4B0A-838A-14C92BD4A501}" type="slidenum">
               <a:rPr lang="de-DE" smtClean="0"/>
               <a:t>‹Nr.›</a:t>
             </a:fld>
@@ -1203,7 +1207,7 @@
     </p:spTree>
     <p:extLst>
       <p:ext uri="{BB962C8B-B14F-4D97-AF65-F5344CB8AC3E}">
-        <p14:creationId xmlns:p14="http://schemas.microsoft.com/office/powerpoint/2010/main" val="1638842352"/>
+        <p14:creationId xmlns:p14="http://schemas.microsoft.com/office/powerpoint/2010/main" val="144441331"/>
       </p:ext>
     </p:extLst>
   </p:cSld>
@@ -1235,7 +1239,7 @@
           <p:cNvPr id="2" name="Titel 1">
             <a:extLst>
               <a:ext uri="{FF2B5EF4-FFF2-40B4-BE49-F238E27FC236}">
-                <a16:creationId xmlns:a16="http://schemas.microsoft.com/office/drawing/2014/main" id="{7C4333BE-83A9-1DFB-2753-567DAD1E9D2B}"/>
+                <a16:creationId xmlns:a16="http://schemas.microsoft.com/office/drawing/2014/main" id="{52B5976D-DDF7-0636-438E-9F33BC1F3E3E}"/>
               </a:ext>
             </a:extLst>
           </p:cNvPr>
@@ -1263,7 +1267,7 @@
           <p:cNvPr id="3" name="Inhaltsplatzhalter 2">
             <a:extLst>
               <a:ext uri="{FF2B5EF4-FFF2-40B4-BE49-F238E27FC236}">
-                <a16:creationId xmlns:a16="http://schemas.microsoft.com/office/drawing/2014/main" id="{6CF7992E-13DF-3895-C043-81D4F4D2119E}"/>
+                <a16:creationId xmlns:a16="http://schemas.microsoft.com/office/drawing/2014/main" id="{2C445CEA-CA05-AA11-11B0-C98B1CCE3883}"/>
               </a:ext>
             </a:extLst>
           </p:cNvPr>
@@ -1325,7 +1329,7 @@
           <p:cNvPr id="4" name="Inhaltsplatzhalter 3">
             <a:extLst>
               <a:ext uri="{FF2B5EF4-FFF2-40B4-BE49-F238E27FC236}">
-                <a16:creationId xmlns:a16="http://schemas.microsoft.com/office/drawing/2014/main" id="{2BC0D325-D8BD-CE7C-B86E-09855A8B40DB}"/>
+                <a16:creationId xmlns:a16="http://schemas.microsoft.com/office/drawing/2014/main" id="{914D5C67-65ED-B519-9269-5E8D772B8718}"/>
               </a:ext>
             </a:extLst>
           </p:cNvPr>
@@ -1387,7 +1391,7 @@
           <p:cNvPr id="5" name="Datumsplatzhalter 4">
             <a:extLst>
               <a:ext uri="{FF2B5EF4-FFF2-40B4-BE49-F238E27FC236}">
-                <a16:creationId xmlns:a16="http://schemas.microsoft.com/office/drawing/2014/main" id="{46F0E417-2ADD-B3EC-49A6-24F0DFFA4205}"/>
+                <a16:creationId xmlns:a16="http://schemas.microsoft.com/office/drawing/2014/main" id="{983454A6-01E3-F1C5-1FD2-3CE27848FD41}"/>
               </a:ext>
             </a:extLst>
           </p:cNvPr>
@@ -1403,7 +1407,7 @@
           <a:bodyPr/>
           <a:lstStyle/>
           <a:p>
-            <a:fld id="{2B6CCDAF-C0FD-41A7-AC91-00988375B8BA}" type="datetimeFigureOut">
+            <a:fld id="{EC2EA7CE-D4DC-42CF-A783-AE5535E9FEDD}" type="datetimeFigureOut">
               <a:rPr lang="de-DE" smtClean="0"/>
               <a:t>09.10.2026</a:t>
             </a:fld>
@@ -1416,7 +1420,7 @@
           <p:cNvPr id="6" name="Fußzeilenplatzhalter 5">
             <a:extLst>
               <a:ext uri="{FF2B5EF4-FFF2-40B4-BE49-F238E27FC236}">
-                <a16:creationId xmlns:a16="http://schemas.microsoft.com/office/drawing/2014/main" id="{47B74DA3-2673-D368-B3C8-E70BAA6DD9B3}"/>
+                <a16:creationId xmlns:a16="http://schemas.microsoft.com/office/drawing/2014/main" id="{118C8AA7-4A77-C130-B0E9-72160D4029A8}"/>
               </a:ext>
             </a:extLst>
           </p:cNvPr>
@@ -1441,7 +1445,7 @@
           <p:cNvPr id="7" name="Foliennummernplatzhalter 6">
             <a:extLst>
               <a:ext uri="{FF2B5EF4-FFF2-40B4-BE49-F238E27FC236}">
-                <a16:creationId xmlns:a16="http://schemas.microsoft.com/office/drawing/2014/main" id="{8E3871D0-AEE8-56FB-BFF3-15B72A5911C6}"/>
+                <a16:creationId xmlns:a16="http://schemas.microsoft.com/office/drawing/2014/main" id="{0AB18926-C889-CF08-6FA3-D0BFA4F47AD2}"/>
               </a:ext>
             </a:extLst>
           </p:cNvPr>
@@ -1457,7 +1461,7 @@
           <a:bodyPr/>
           <a:lstStyle/>
           <a:p>
-            <a:fld id="{B6E45C21-F40F-4997-A5DE-911FC237E363}" type="slidenum">
+            <a:fld id="{317E6C74-243B-4B0A-838A-14C92BD4A501}" type="slidenum">
               <a:rPr lang="de-DE" smtClean="0"/>
               <a:t>‹Nr.›</a:t>
             </a:fld>
@@ -1468,7 +1472,7 @@
     </p:spTree>
     <p:extLst>
       <p:ext uri="{BB962C8B-B14F-4D97-AF65-F5344CB8AC3E}">
-        <p14:creationId xmlns:p14="http://schemas.microsoft.com/office/powerpoint/2010/main" val="3188380072"/>
+        <p14:creationId xmlns:p14="http://schemas.microsoft.com/office/powerpoint/2010/main" val="3581823870"/>
       </p:ext>
     </p:extLst>
   </p:cSld>
@@ -1500,7 +1504,7 @@
           <p:cNvPr id="2" name="Titel 1">
             <a:extLst>
               <a:ext uri="{FF2B5EF4-FFF2-40B4-BE49-F238E27FC236}">
-                <a16:creationId xmlns:a16="http://schemas.microsoft.com/office/drawing/2014/main" id="{5080B1B1-69B1-95BA-46E6-EB64BC6417F2}"/>
+                <a16:creationId xmlns:a16="http://schemas.microsoft.com/office/drawing/2014/main" id="{399DADC0-D17E-FA70-7C16-0A685BA17E49}"/>
               </a:ext>
             </a:extLst>
           </p:cNvPr>
@@ -1533,7 +1537,7 @@
           <p:cNvPr id="3" name="Textplatzhalter 2">
             <a:extLst>
               <a:ext uri="{FF2B5EF4-FFF2-40B4-BE49-F238E27FC236}">
-                <a16:creationId xmlns:a16="http://schemas.microsoft.com/office/drawing/2014/main" id="{83EB960B-C0B7-0DF7-F051-92CAB51A7DBF}"/>
+                <a16:creationId xmlns:a16="http://schemas.microsoft.com/office/drawing/2014/main" id="{0E3A340B-C32F-284E-5AD9-D0BBB9AA0FC2}"/>
               </a:ext>
             </a:extLst>
           </p:cNvPr>
@@ -1604,7 +1608,7 @@
           <p:cNvPr id="4" name="Inhaltsplatzhalter 3">
             <a:extLst>
               <a:ext uri="{FF2B5EF4-FFF2-40B4-BE49-F238E27FC236}">
-                <a16:creationId xmlns:a16="http://schemas.microsoft.com/office/drawing/2014/main" id="{0B3E3CB9-2F4D-1276-A3D4-648FE6EE6BD9}"/>
+                <a16:creationId xmlns:a16="http://schemas.microsoft.com/office/drawing/2014/main" id="{322FE8B2-D01A-7014-0002-98C798C97C69}"/>
               </a:ext>
             </a:extLst>
           </p:cNvPr>
@@ -1666,7 +1670,7 @@
           <p:cNvPr id="5" name="Textplatzhalter 4">
             <a:extLst>
               <a:ext uri="{FF2B5EF4-FFF2-40B4-BE49-F238E27FC236}">
-                <a16:creationId xmlns:a16="http://schemas.microsoft.com/office/drawing/2014/main" id="{7F1EEEFE-FFBA-9A71-D4A7-78A6F88B36B2}"/>
+                <a16:creationId xmlns:a16="http://schemas.microsoft.com/office/drawing/2014/main" id="{C8C31211-BAB6-092F-E950-10B0F5203215}"/>
               </a:ext>
             </a:extLst>
           </p:cNvPr>
@@ -1737,7 +1741,7 @@
           <p:cNvPr id="6" name="Inhaltsplatzhalter 5">
             <a:extLst>
               <a:ext uri="{FF2B5EF4-FFF2-40B4-BE49-F238E27FC236}">
-                <a16:creationId xmlns:a16="http://schemas.microsoft.com/office/drawing/2014/main" id="{82B88FD3-FB4B-6684-801E-B68510B41092}"/>
+                <a16:creationId xmlns:a16="http://schemas.microsoft.com/office/drawing/2014/main" id="{71FB3560-657E-959A-8462-48BA885A4963}"/>
               </a:ext>
             </a:extLst>
           </p:cNvPr>
@@ -1799,7 +1803,7 @@
           <p:cNvPr id="7" name="Datumsplatzhalter 6">
             <a:extLst>
               <a:ext uri="{FF2B5EF4-FFF2-40B4-BE49-F238E27FC236}">
-                <a16:creationId xmlns:a16="http://schemas.microsoft.com/office/drawing/2014/main" id="{624CDD85-AFB4-3EC2-6B42-68DA5763A13D}"/>
+                <a16:creationId xmlns:a16="http://schemas.microsoft.com/office/drawing/2014/main" id="{759D00E9-E308-E26E-F1B4-53CDE2ADCCBF}"/>
               </a:ext>
             </a:extLst>
           </p:cNvPr>
@@ -1815,7 +1819,7 @@
           <a:bodyPr/>
           <a:lstStyle/>
           <a:p>
-            <a:fld id="{2B6CCDAF-C0FD-41A7-AC91-00988375B8BA}" type="datetimeFigureOut">
+            <a:fld id="{EC2EA7CE-D4DC-42CF-A783-AE5535E9FEDD}" type="datetimeFigureOut">
               <a:rPr lang="de-DE" smtClean="0"/>
               <a:t>09.10.2026</a:t>
             </a:fld>
@@ -1828,7 +1832,7 @@
           <p:cNvPr id="8" name="Fußzeilenplatzhalter 7">
             <a:extLst>
               <a:ext uri="{FF2B5EF4-FFF2-40B4-BE49-F238E27FC236}">
-                <a16:creationId xmlns:a16="http://schemas.microsoft.com/office/drawing/2014/main" id="{0E9FBCC8-285A-5602-0D1D-13B2E782D550}"/>
+                <a16:creationId xmlns:a16="http://schemas.microsoft.com/office/drawing/2014/main" id="{82A8DF21-33F5-52BC-3850-C58F8299B430}"/>
               </a:ext>
             </a:extLst>
           </p:cNvPr>
@@ -1853,7 +1857,7 @@
           <p:cNvPr id="9" name="Foliennummernplatzhalter 8">
             <a:extLst>
               <a:ext uri="{FF2B5EF4-FFF2-40B4-BE49-F238E27FC236}">
-                <a16:creationId xmlns:a16="http://schemas.microsoft.com/office/drawing/2014/main" id="{D1EA9B38-3C50-C61F-0D55-6E8FAD8D5E6E}"/>
+                <a16:creationId xmlns:a16="http://schemas.microsoft.com/office/drawing/2014/main" id="{B4E18820-B604-6B64-AE47-32985B33BF6A}"/>
               </a:ext>
             </a:extLst>
           </p:cNvPr>
@@ -1869,7 +1873,7 @@
           <a:bodyPr/>
           <a:lstStyle/>
           <a:p>
-            <a:fld id="{B6E45C21-F40F-4997-A5DE-911FC237E363}" type="slidenum">
+            <a:fld id="{317E6C74-243B-4B0A-838A-14C92BD4A501}" type="slidenum">
               <a:rPr lang="de-DE" smtClean="0"/>
               <a:t>‹Nr.›</a:t>
             </a:fld>
@@ -1880,7 +1884,7 @@
     </p:spTree>
     <p:extLst>
       <p:ext uri="{BB962C8B-B14F-4D97-AF65-F5344CB8AC3E}">
-        <p14:creationId xmlns:p14="http://schemas.microsoft.com/office/powerpoint/2010/main" val="189875572"/>
+        <p14:creationId xmlns:p14="http://schemas.microsoft.com/office/powerpoint/2010/main" val="1926212644"/>
       </p:ext>
     </p:extLst>
   </p:cSld>
@@ -1912,7 +1916,7 @@
           <p:cNvPr id="2" name="Titel 1">
             <a:extLst>
               <a:ext uri="{FF2B5EF4-FFF2-40B4-BE49-F238E27FC236}">
-                <a16:creationId xmlns:a16="http://schemas.microsoft.com/office/drawing/2014/main" id="{E3703B3C-FF0B-7E6C-8794-BCB77EF7EF67}"/>
+                <a16:creationId xmlns:a16="http://schemas.microsoft.com/office/drawing/2014/main" id="{1E83E786-0EDC-FC5F-4455-ABCEF345FD85}"/>
               </a:ext>
             </a:extLst>
           </p:cNvPr>
@@ -1940,7 +1944,7 @@
           <p:cNvPr id="3" name="Datumsplatzhalter 2">
             <a:extLst>
               <a:ext uri="{FF2B5EF4-FFF2-40B4-BE49-F238E27FC236}">
-                <a16:creationId xmlns:a16="http://schemas.microsoft.com/office/drawing/2014/main" id="{99D9001F-778B-4E77-6FAC-FF309FDABD45}"/>
+                <a16:creationId xmlns:a16="http://schemas.microsoft.com/office/drawing/2014/main" id="{91A074FA-DBED-DD2B-61F7-9DE09A17EE79}"/>
               </a:ext>
             </a:extLst>
           </p:cNvPr>
@@ -1956,7 +1960,7 @@
           <a:bodyPr/>
           <a:lstStyle/>
           <a:p>
-            <a:fld id="{2B6CCDAF-C0FD-41A7-AC91-00988375B8BA}" type="datetimeFigureOut">
+            <a:fld id="{EC2EA7CE-D4DC-42CF-A783-AE5535E9FEDD}" type="datetimeFigureOut">
               <a:rPr lang="de-DE" smtClean="0"/>
               <a:t>09.10.2026</a:t>
             </a:fld>
@@ -1969,7 +1973,7 @@
           <p:cNvPr id="4" name="Fußzeilenplatzhalter 3">
             <a:extLst>
               <a:ext uri="{FF2B5EF4-FFF2-40B4-BE49-F238E27FC236}">
-                <a16:creationId xmlns:a16="http://schemas.microsoft.com/office/drawing/2014/main" id="{480FC615-0046-A0F8-8C00-3AC246A93C28}"/>
+                <a16:creationId xmlns:a16="http://schemas.microsoft.com/office/drawing/2014/main" id="{B79E956B-13CA-0185-23DD-77109B8DB939}"/>
               </a:ext>
             </a:extLst>
           </p:cNvPr>
@@ -1994,7 +1998,7 @@
           <p:cNvPr id="5" name="Foliennummernplatzhalter 4">
             <a:extLst>
               <a:ext uri="{FF2B5EF4-FFF2-40B4-BE49-F238E27FC236}">
-                <a16:creationId xmlns:a16="http://schemas.microsoft.com/office/drawing/2014/main" id="{D11439F8-E2E5-1144-6DFD-DD4D9E75E944}"/>
+                <a16:creationId xmlns:a16="http://schemas.microsoft.com/office/drawing/2014/main" id="{328B33BC-906C-83E4-30ED-262BB733960F}"/>
               </a:ext>
             </a:extLst>
           </p:cNvPr>
@@ -2010,7 +2014,7 @@
           <a:bodyPr/>
           <a:lstStyle/>
           <a:p>
-            <a:fld id="{B6E45C21-F40F-4997-A5DE-911FC237E363}" type="slidenum">
+            <a:fld id="{317E6C74-243B-4B0A-838A-14C92BD4A501}" type="slidenum">
               <a:rPr lang="de-DE" smtClean="0"/>
               <a:t>‹Nr.›</a:t>
             </a:fld>
@@ -2021,7 +2025,7 @@
     </p:spTree>
     <p:extLst>
       <p:ext uri="{BB962C8B-B14F-4D97-AF65-F5344CB8AC3E}">
-        <p14:creationId xmlns:p14="http://schemas.microsoft.com/office/powerpoint/2010/main" val="206509444"/>
+        <p14:creationId xmlns:p14="http://schemas.microsoft.com/office/powerpoint/2010/main" val="2012480870"/>
       </p:ext>
     </p:extLst>
   </p:cSld>
@@ -2053,7 +2057,7 @@
           <p:cNvPr id="2" name="Datumsplatzhalter 1">
             <a:extLst>
               <a:ext uri="{FF2B5EF4-FFF2-40B4-BE49-F238E27FC236}">
-                <a16:creationId xmlns:a16="http://schemas.microsoft.com/office/drawing/2014/main" id="{EF735AAF-7663-E4F8-13E6-5E4CC159C2B1}"/>
+                <a16:creationId xmlns:a16="http://schemas.microsoft.com/office/drawing/2014/main" id="{8C1921ED-A94E-1326-A15C-41B6B06DB709}"/>
               </a:ext>
             </a:extLst>
           </p:cNvPr>
@@ -2069,7 +2073,7 @@
           <a:bodyPr/>
           <a:lstStyle/>
           <a:p>
-            <a:fld id="{2B6CCDAF-C0FD-41A7-AC91-00988375B8BA}" type="datetimeFigureOut">
+            <a:fld id="{EC2EA7CE-D4DC-42CF-A783-AE5535E9FEDD}" type="datetimeFigureOut">
               <a:rPr lang="de-DE" smtClean="0"/>
               <a:t>09.10.2026</a:t>
             </a:fld>
@@ -2082,7 +2086,7 @@
           <p:cNvPr id="3" name="Fußzeilenplatzhalter 2">
             <a:extLst>
               <a:ext uri="{FF2B5EF4-FFF2-40B4-BE49-F238E27FC236}">
-                <a16:creationId xmlns:a16="http://schemas.microsoft.com/office/drawing/2014/main" id="{849FBDA8-C67C-1E74-1868-B2B576057EAA}"/>
+                <a16:creationId xmlns:a16="http://schemas.microsoft.com/office/drawing/2014/main" id="{0D2901E8-C2B3-98AF-9494-AA147606E16E}"/>
               </a:ext>
             </a:extLst>
           </p:cNvPr>
@@ -2107,7 +2111,7 @@
           <p:cNvPr id="4" name="Foliennummernplatzhalter 3">
             <a:extLst>
               <a:ext uri="{FF2B5EF4-FFF2-40B4-BE49-F238E27FC236}">
-                <a16:creationId xmlns:a16="http://schemas.microsoft.com/office/drawing/2014/main" id="{086FB557-488F-B81B-3BEF-ED9DCA5C804C}"/>
+                <a16:creationId xmlns:a16="http://schemas.microsoft.com/office/drawing/2014/main" id="{FA579487-2B29-5F10-0C83-0CC61071E34F}"/>
               </a:ext>
             </a:extLst>
           </p:cNvPr>
@@ -2123,7 +2127,7 @@
           <a:bodyPr/>
           <a:lstStyle/>
           <a:p>
-            <a:fld id="{B6E45C21-F40F-4997-A5DE-911FC237E363}" type="slidenum">
+            <a:fld id="{317E6C74-243B-4B0A-838A-14C92BD4A501}" type="slidenum">
               <a:rPr lang="de-DE" smtClean="0"/>
               <a:t>‹Nr.›</a:t>
             </a:fld>
@@ -2134,7 +2138,7 @@
     </p:spTree>
     <p:extLst>
       <p:ext uri="{BB962C8B-B14F-4D97-AF65-F5344CB8AC3E}">
-        <p14:creationId xmlns:p14="http://schemas.microsoft.com/office/powerpoint/2010/main" val="1247258748"/>
+        <p14:creationId xmlns:p14="http://schemas.microsoft.com/office/powerpoint/2010/main" val="406380548"/>
       </p:ext>
     </p:extLst>
   </p:cSld>
@@ -2166,7 +2170,7 @@
           <p:cNvPr id="2" name="Titel 1">
             <a:extLst>
               <a:ext uri="{FF2B5EF4-FFF2-40B4-BE49-F238E27FC236}">
-                <a16:creationId xmlns:a16="http://schemas.microsoft.com/office/drawing/2014/main" id="{AEA4BC74-81F2-D850-FB68-39EBE0E77782}"/>
+                <a16:creationId xmlns:a16="http://schemas.microsoft.com/office/drawing/2014/main" id="{49B99390-9AB3-49AE-0E9D-550384324CDE}"/>
               </a:ext>
             </a:extLst>
           </p:cNvPr>
@@ -2203,7 +2207,7 @@
           <p:cNvPr id="3" name="Inhaltsplatzhalter 2">
             <a:extLst>
               <a:ext uri="{FF2B5EF4-FFF2-40B4-BE49-F238E27FC236}">
-                <a16:creationId xmlns:a16="http://schemas.microsoft.com/office/drawing/2014/main" id="{69E2ABC7-7D6F-1558-E22E-BBCEA4AEF585}"/>
+                <a16:creationId xmlns:a16="http://schemas.microsoft.com/office/drawing/2014/main" id="{3876E96C-7C37-187F-2CD3-B71E6F674C82}"/>
               </a:ext>
             </a:extLst>
           </p:cNvPr>
@@ -2293,7 +2297,7 @@
           <p:cNvPr id="4" name="Textplatzhalter 3">
             <a:extLst>
               <a:ext uri="{FF2B5EF4-FFF2-40B4-BE49-F238E27FC236}">
-                <a16:creationId xmlns:a16="http://schemas.microsoft.com/office/drawing/2014/main" id="{DC197E6A-DAA1-5D83-417E-4FFD3C9C4F41}"/>
+                <a16:creationId xmlns:a16="http://schemas.microsoft.com/office/drawing/2014/main" id="{4C973236-AED6-A25C-4B86-EBD63F31CA71}"/>
               </a:ext>
             </a:extLst>
           </p:cNvPr>
@@ -2364,7 +2368,7 @@
           <p:cNvPr id="5" name="Datumsplatzhalter 4">
             <a:extLst>
               <a:ext uri="{FF2B5EF4-FFF2-40B4-BE49-F238E27FC236}">
-                <a16:creationId xmlns:a16="http://schemas.microsoft.com/office/drawing/2014/main" id="{57E52F14-A376-24CE-832C-350CA3F68FFC}"/>
+                <a16:creationId xmlns:a16="http://schemas.microsoft.com/office/drawing/2014/main" id="{683A66B7-9252-2271-D9BE-DF71947F3F30}"/>
               </a:ext>
             </a:extLst>
           </p:cNvPr>
@@ -2380,7 +2384,7 @@
           <a:bodyPr/>
           <a:lstStyle/>
           <a:p>
-            <a:fld id="{2B6CCDAF-C0FD-41A7-AC91-00988375B8BA}" type="datetimeFigureOut">
+            <a:fld id="{EC2EA7CE-D4DC-42CF-A783-AE5535E9FEDD}" type="datetimeFigureOut">
               <a:rPr lang="de-DE" smtClean="0"/>
               <a:t>09.10.2026</a:t>
             </a:fld>
@@ -2393,7 +2397,7 @@
           <p:cNvPr id="6" name="Fußzeilenplatzhalter 5">
             <a:extLst>
               <a:ext uri="{FF2B5EF4-FFF2-40B4-BE49-F238E27FC236}">
-                <a16:creationId xmlns:a16="http://schemas.microsoft.com/office/drawing/2014/main" id="{1B212E12-76EA-FE90-1AAF-B3B51AE636E8}"/>
+                <a16:creationId xmlns:a16="http://schemas.microsoft.com/office/drawing/2014/main" id="{43767C04-47F2-BC4E-8792-A66D164E6582}"/>
               </a:ext>
             </a:extLst>
           </p:cNvPr>
@@ -2418,7 +2422,7 @@
           <p:cNvPr id="7" name="Foliennummernplatzhalter 6">
             <a:extLst>
               <a:ext uri="{FF2B5EF4-FFF2-40B4-BE49-F238E27FC236}">
-                <a16:creationId xmlns:a16="http://schemas.microsoft.com/office/drawing/2014/main" id="{6A7C31E5-F9CC-55D2-A0C7-35E085FBA537}"/>
+                <a16:creationId xmlns:a16="http://schemas.microsoft.com/office/drawing/2014/main" id="{640C7F82-28E1-B780-81F9-0079C3099B8D}"/>
               </a:ext>
             </a:extLst>
           </p:cNvPr>
@@ -2434,7 +2438,7 @@
           <a:bodyPr/>
           <a:lstStyle/>
           <a:p>
-            <a:fld id="{B6E45C21-F40F-4997-A5DE-911FC237E363}" type="slidenum">
+            <a:fld id="{317E6C74-243B-4B0A-838A-14C92BD4A501}" type="slidenum">
               <a:rPr lang="de-DE" smtClean="0"/>
               <a:t>‹Nr.›</a:t>
             </a:fld>
@@ -2445,7 +2449,7 @@
     </p:spTree>
     <p:extLst>
       <p:ext uri="{BB962C8B-B14F-4D97-AF65-F5344CB8AC3E}">
-        <p14:creationId xmlns:p14="http://schemas.microsoft.com/office/powerpoint/2010/main" val="1285742293"/>
+        <p14:creationId xmlns:p14="http://schemas.microsoft.com/office/powerpoint/2010/main" val="289583354"/>
       </p:ext>
     </p:extLst>
   </p:cSld>
@@ -2477,7 +2481,7 @@
           <p:cNvPr id="2" name="Titel 1">
             <a:extLst>
               <a:ext uri="{FF2B5EF4-FFF2-40B4-BE49-F238E27FC236}">
-                <a16:creationId xmlns:a16="http://schemas.microsoft.com/office/drawing/2014/main" id="{5A37AE54-9AE2-5D85-5839-79391D10DD4B}"/>
+                <a16:creationId xmlns:a16="http://schemas.microsoft.com/office/drawing/2014/main" id="{42938A59-C170-393D-E34A-C8168FD4EAEF}"/>
               </a:ext>
             </a:extLst>
           </p:cNvPr>
@@ -2514,7 +2518,7 @@
           <p:cNvPr id="3" name="Bildplatzhalter 2">
             <a:extLst>
               <a:ext uri="{FF2B5EF4-FFF2-40B4-BE49-F238E27FC236}">
-                <a16:creationId xmlns:a16="http://schemas.microsoft.com/office/drawing/2014/main" id="{A2513E4F-FD72-ED1D-A145-265D01443157}"/>
+                <a16:creationId xmlns:a16="http://schemas.microsoft.com/office/drawing/2014/main" id="{8A232A38-D3E8-795A-B17A-5A69713AA92E}"/>
               </a:ext>
             </a:extLst>
           </p:cNvPr>
@@ -2581,7 +2585,7 @@
           <p:cNvPr id="4" name="Textplatzhalter 3">
             <a:extLst>
               <a:ext uri="{FF2B5EF4-FFF2-40B4-BE49-F238E27FC236}">
-                <a16:creationId xmlns:a16="http://schemas.microsoft.com/office/drawing/2014/main" id="{E3CC6398-8E60-E149-CFA7-8D1C988ECC7F}"/>
+                <a16:creationId xmlns:a16="http://schemas.microsoft.com/office/drawing/2014/main" id="{16227A52-DA9A-05DD-9C88-D5A668C40DD9}"/>
               </a:ext>
             </a:extLst>
           </p:cNvPr>
@@ -2652,7 +2656,7 @@
           <p:cNvPr id="5" name="Datumsplatzhalter 4">
             <a:extLst>
               <a:ext uri="{FF2B5EF4-FFF2-40B4-BE49-F238E27FC236}">
-                <a16:creationId xmlns:a16="http://schemas.microsoft.com/office/drawing/2014/main" id="{B4301B1D-51DC-1E80-6D73-B8815F6E4D05}"/>
+                <a16:creationId xmlns:a16="http://schemas.microsoft.com/office/drawing/2014/main" id="{6176FACE-1E41-BE73-044C-11D2C76CD7D5}"/>
               </a:ext>
             </a:extLst>
           </p:cNvPr>
@@ -2668,7 +2672,7 @@
           <a:bodyPr/>
           <a:lstStyle/>
           <a:p>
-            <a:fld id="{2B6CCDAF-C0FD-41A7-AC91-00988375B8BA}" type="datetimeFigureOut">
+            <a:fld id="{EC2EA7CE-D4DC-42CF-A783-AE5535E9FEDD}" type="datetimeFigureOut">
               <a:rPr lang="de-DE" smtClean="0"/>
               <a:t>09.10.2026</a:t>
             </a:fld>
@@ -2681,7 +2685,7 @@
           <p:cNvPr id="6" name="Fußzeilenplatzhalter 5">
             <a:extLst>
               <a:ext uri="{FF2B5EF4-FFF2-40B4-BE49-F238E27FC236}">
-                <a16:creationId xmlns:a16="http://schemas.microsoft.com/office/drawing/2014/main" id="{6CC79998-9EB3-EB10-747A-048769A21D09}"/>
+                <a16:creationId xmlns:a16="http://schemas.microsoft.com/office/drawing/2014/main" id="{3FF142C3-9E06-CC8B-FDA4-D478761C69A1}"/>
               </a:ext>
             </a:extLst>
           </p:cNvPr>
@@ -2706,7 +2710,7 @@
           <p:cNvPr id="7" name="Foliennummernplatzhalter 6">
             <a:extLst>
               <a:ext uri="{FF2B5EF4-FFF2-40B4-BE49-F238E27FC236}">
-                <a16:creationId xmlns:a16="http://schemas.microsoft.com/office/drawing/2014/main" id="{0CD9640D-66E1-FB5B-689C-2AA32565F575}"/>
+                <a16:creationId xmlns:a16="http://schemas.microsoft.com/office/drawing/2014/main" id="{CAD2C548-1530-8E4C-9207-E3F93979E36A}"/>
               </a:ext>
             </a:extLst>
           </p:cNvPr>
@@ -2722,7 +2726,7 @@
           <a:bodyPr/>
           <a:lstStyle/>
           <a:p>
-            <a:fld id="{B6E45C21-F40F-4997-A5DE-911FC237E363}" type="slidenum">
+            <a:fld id="{317E6C74-243B-4B0A-838A-14C92BD4A501}" type="slidenum">
               <a:rPr lang="de-DE" smtClean="0"/>
               <a:t>‹Nr.›</a:t>
             </a:fld>
@@ -2733,7 +2737,7 @@
     </p:spTree>
     <p:extLst>
       <p:ext uri="{BB962C8B-B14F-4D97-AF65-F5344CB8AC3E}">
-        <p14:creationId xmlns:p14="http://schemas.microsoft.com/office/powerpoint/2010/main" val="3270326717"/>
+        <p14:creationId xmlns:p14="http://schemas.microsoft.com/office/powerpoint/2010/main" val="889547885"/>
       </p:ext>
     </p:extLst>
   </p:cSld>
@@ -2770,7 +2774,7 @@
           <p:cNvPr id="2" name="Titelplatzhalter 1">
             <a:extLst>
               <a:ext uri="{FF2B5EF4-FFF2-40B4-BE49-F238E27FC236}">
-                <a16:creationId xmlns:a16="http://schemas.microsoft.com/office/drawing/2014/main" id="{11B99D86-1C00-2F5F-E1D7-F9819D7088FC}"/>
+                <a16:creationId xmlns:a16="http://schemas.microsoft.com/office/drawing/2014/main" id="{8C0D1296-0A24-F7EA-EB4B-87FA75936C9C}"/>
               </a:ext>
             </a:extLst>
           </p:cNvPr>
@@ -2808,7 +2812,7 @@
           <p:cNvPr id="3" name="Textplatzhalter 2">
             <a:extLst>
               <a:ext uri="{FF2B5EF4-FFF2-40B4-BE49-F238E27FC236}">
-                <a16:creationId xmlns:a16="http://schemas.microsoft.com/office/drawing/2014/main" id="{5EDFEA11-3831-8FBD-1B67-C2700816A952}"/>
+                <a16:creationId xmlns:a16="http://schemas.microsoft.com/office/drawing/2014/main" id="{BD394674-D1A3-73A6-7716-52054AEA8468}"/>
               </a:ext>
             </a:extLst>
           </p:cNvPr>
@@ -2875,7 +2879,7 @@
           <p:cNvPr id="4" name="Datumsplatzhalter 3">
             <a:extLst>
               <a:ext uri="{FF2B5EF4-FFF2-40B4-BE49-F238E27FC236}">
-                <a16:creationId xmlns:a16="http://schemas.microsoft.com/office/drawing/2014/main" id="{168535A3-D594-11BE-FBC5-292D6AF6626D}"/>
+                <a16:creationId xmlns:a16="http://schemas.microsoft.com/office/drawing/2014/main" id="{269C7FB3-C69A-9AF0-242E-32A8AA2646C9}"/>
               </a:ext>
             </a:extLst>
           </p:cNvPr>
@@ -2909,7 +2913,7 @@
             </a:lvl1pPr>
           </a:lstStyle>
           <a:p>
-            <a:fld id="{2B6CCDAF-C0FD-41A7-AC91-00988375B8BA}" type="datetimeFigureOut">
+            <a:fld id="{EC2EA7CE-D4DC-42CF-A783-AE5535E9FEDD}" type="datetimeFigureOut">
               <a:rPr lang="de-DE" smtClean="0"/>
               <a:t>09.10.2026</a:t>
             </a:fld>
@@ -2922,7 +2926,7 @@
           <p:cNvPr id="5" name="Fußzeilenplatzhalter 4">
             <a:extLst>
               <a:ext uri="{FF2B5EF4-FFF2-40B4-BE49-F238E27FC236}">
-                <a16:creationId xmlns:a16="http://schemas.microsoft.com/office/drawing/2014/main" id="{890B4583-7054-6A08-F1F8-8C41CC7A040B}"/>
+                <a16:creationId xmlns:a16="http://schemas.microsoft.com/office/drawing/2014/main" id="{8CEE5356-E77C-00CB-A018-F13EB3602A82}"/>
               </a:ext>
             </a:extLst>
           </p:cNvPr>
@@ -2965,7 +2969,7 @@
           <p:cNvPr id="6" name="Foliennummernplatzhalter 5">
             <a:extLst>
               <a:ext uri="{FF2B5EF4-FFF2-40B4-BE49-F238E27FC236}">
-                <a16:creationId xmlns:a16="http://schemas.microsoft.com/office/drawing/2014/main" id="{D059A73F-EB36-212B-96B2-24E8360E37BA}"/>
+                <a16:creationId xmlns:a16="http://schemas.microsoft.com/office/drawing/2014/main" id="{B033B1A0-06F3-5013-E729-526B72E0D9B8}"/>
               </a:ext>
             </a:extLst>
           </p:cNvPr>
@@ -2999,7 +3003,7 @@
             </a:lvl1pPr>
           </a:lstStyle>
           <a:p>
-            <a:fld id="{B6E45C21-F40F-4997-A5DE-911FC237E363}" type="slidenum">
+            <a:fld id="{317E6C74-243B-4B0A-838A-14C92BD4A501}" type="slidenum">
               <a:rPr lang="de-DE" smtClean="0"/>
               <a:t>‹Nr.›</a:t>
             </a:fld>
@@ -3010,7 +3014,7 @@
     </p:spTree>
     <p:extLst>
       <p:ext uri="{BB962C8B-B14F-4D97-AF65-F5344CB8AC3E}">
-        <p14:creationId xmlns:p14="http://schemas.microsoft.com/office/powerpoint/2010/main" val="1687746573"/>
+        <p14:creationId xmlns:p14="http://schemas.microsoft.com/office/powerpoint/2010/main" val="1886841443"/>
       </p:ext>
     </p:extLst>
   </p:cSld>
@@ -3333,7 +3337,7 @@
           <p:cNvPr id="2" name="Titel 1">
             <a:extLst>
               <a:ext uri="{FF2B5EF4-FFF2-40B4-BE49-F238E27FC236}">
-                <a16:creationId xmlns:a16="http://schemas.microsoft.com/office/drawing/2014/main" id="{E161169B-172B-8CAB-BF62-3FE230F3B046}"/>
+                <a16:creationId xmlns:a16="http://schemas.microsoft.com/office/drawing/2014/main" id="{080A4418-C726-504F-0769-F2408A726245}"/>
               </a:ext>
             </a:extLst>
           </p:cNvPr>
@@ -3361,7 +3365,7 @@
           <p:cNvPr id="3" name="Rechteck 2">
             <a:extLst>
               <a:ext uri="{FF2B5EF4-FFF2-40B4-BE49-F238E27FC236}">
-                <a16:creationId xmlns:a16="http://schemas.microsoft.com/office/drawing/2014/main" id="{960D9431-223D-AEF9-CC89-A6F3EB18DC11}"/>
+                <a16:creationId xmlns:a16="http://schemas.microsoft.com/office/drawing/2014/main" id="{E44B4424-46BC-D184-B471-2C1544AF349B}"/>
               </a:ext>
             </a:extLst>
           </p:cNvPr>
@@ -3422,7 +3426,7 @@
           <p:cNvPr id="4" name="Rechteck 3">
             <a:extLst>
               <a:ext uri="{FF2B5EF4-FFF2-40B4-BE49-F238E27FC236}">
-                <a16:creationId xmlns:a16="http://schemas.microsoft.com/office/drawing/2014/main" id="{8B425527-5F2D-A373-ECDA-8259DFF31918}"/>
+                <a16:creationId xmlns:a16="http://schemas.microsoft.com/office/drawing/2014/main" id="{2AA8E3D3-96D1-24C4-1497-B92D7F77D5EB}"/>
               </a:ext>
             </a:extLst>
           </p:cNvPr>
@@ -3483,7 +3487,7 @@
           <p:cNvPr id="5" name="Rechteck 4">
             <a:extLst>
               <a:ext uri="{FF2B5EF4-FFF2-40B4-BE49-F238E27FC236}">
-                <a16:creationId xmlns:a16="http://schemas.microsoft.com/office/drawing/2014/main" id="{8AEF3477-D27E-28A6-838A-211ECE1B64FF}"/>
+                <a16:creationId xmlns:a16="http://schemas.microsoft.com/office/drawing/2014/main" id="{ACA96A9C-1C37-F316-72F5-C4A390645705}"/>
               </a:ext>
             </a:extLst>
           </p:cNvPr>
@@ -3544,7 +3548,7 @@
           <p:cNvPr id="6" name="Rechteck 5">
             <a:extLst>
               <a:ext uri="{FF2B5EF4-FFF2-40B4-BE49-F238E27FC236}">
-                <a16:creationId xmlns:a16="http://schemas.microsoft.com/office/drawing/2014/main" id="{31455257-957E-DB72-831F-E2BCF13BCB7D}"/>
+                <a16:creationId xmlns:a16="http://schemas.microsoft.com/office/drawing/2014/main" id="{CD1A1E79-029B-8040-AE2B-CECB7B99263C}"/>
               </a:ext>
             </a:extLst>
           </p:cNvPr>
@@ -3605,7 +3609,7 @@
           <p:cNvPr id="7" name="Rechteck 6">
             <a:extLst>
               <a:ext uri="{FF2B5EF4-FFF2-40B4-BE49-F238E27FC236}">
-                <a16:creationId xmlns:a16="http://schemas.microsoft.com/office/drawing/2014/main" id="{50718BD7-1B88-BA1D-9EF6-61A76053B642}"/>
+                <a16:creationId xmlns:a16="http://schemas.microsoft.com/office/drawing/2014/main" id="{E897B44A-AB2A-1061-F701-2704EA00D80E}"/>
               </a:ext>
             </a:extLst>
           </p:cNvPr>
@@ -3666,7 +3670,7 @@
           <p:cNvPr id="8" name="Rechteck 7">
             <a:extLst>
               <a:ext uri="{FF2B5EF4-FFF2-40B4-BE49-F238E27FC236}">
-                <a16:creationId xmlns:a16="http://schemas.microsoft.com/office/drawing/2014/main" id="{30F1E6B8-AA83-51A0-C0CF-A1C1EA748DD4}"/>
+                <a16:creationId xmlns:a16="http://schemas.microsoft.com/office/drawing/2014/main" id="{DF5583C4-D979-5D19-D664-B77DC37B3C13}"/>
               </a:ext>
             </a:extLst>
           </p:cNvPr>
@@ -3727,7 +3731,7 @@
           <p:cNvPr id="9" name="Rechteck 8">
             <a:extLst>
               <a:ext uri="{FF2B5EF4-FFF2-40B4-BE49-F238E27FC236}">
-                <a16:creationId xmlns:a16="http://schemas.microsoft.com/office/drawing/2014/main" id="{C9F58EE5-AEBF-6541-FC30-1AD532DF1C7F}"/>
+                <a16:creationId xmlns:a16="http://schemas.microsoft.com/office/drawing/2014/main" id="{DD5AAE0B-88EA-BF3A-94EE-ACB7E4CD32BC}"/>
               </a:ext>
             </a:extLst>
           </p:cNvPr>
@@ -3788,7 +3792,7 @@
           <p:cNvPr id="10" name="Rechteck 9">
             <a:extLst>
               <a:ext uri="{FF2B5EF4-FFF2-40B4-BE49-F238E27FC236}">
-                <a16:creationId xmlns:a16="http://schemas.microsoft.com/office/drawing/2014/main" id="{6723CED6-3AA3-CE7D-226E-0C942FC713B9}"/>
+                <a16:creationId xmlns:a16="http://schemas.microsoft.com/office/drawing/2014/main" id="{267B864B-D8B7-A31A-8930-14A2271A08D5}"/>
               </a:ext>
             </a:extLst>
           </p:cNvPr>
@@ -3847,7 +3851,7 @@
     </p:spTree>
     <p:extLst>
       <p:ext uri="{BB962C8B-B14F-4D97-AF65-F5344CB8AC3E}">
-        <p14:creationId xmlns:p14="http://schemas.microsoft.com/office/powerpoint/2010/main" val="2042290531"/>
+        <p14:creationId xmlns:p14="http://schemas.microsoft.com/office/powerpoint/2010/main" val="3181434758"/>
       </p:ext>
     </p:extLst>
   </p:cSld>
@@ -4258,7 +4262,7 @@
 </p:sld>
 </file>
 
-<file path=ppt/slides/slide2.xml><?xml version="1.0" encoding="utf-8"?>
+<file path=ppt/slides/slide10.xml><?xml version="1.0" encoding="utf-8"?>
 <p:sld xmlns:a="http://schemas.openxmlformats.org/drawingml/2006/main" xmlns:r="http://schemas.openxmlformats.org/officeDocument/2006/relationships" xmlns:p="http://schemas.openxmlformats.org/presentationml/2006/main">
   <p:cSld>
     <p:spTree>
@@ -4280,7 +4284,7 @@
           <p:cNvPr id="2" name="Titel 1">
             <a:extLst>
               <a:ext uri="{FF2B5EF4-FFF2-40B4-BE49-F238E27FC236}">
-                <a16:creationId xmlns:a16="http://schemas.microsoft.com/office/drawing/2014/main" id="{D760AA23-80E3-E99C-615F-12D4362CF525}"/>
+                <a16:creationId xmlns:a16="http://schemas.microsoft.com/office/drawing/2014/main" id="{849010AE-8B03-4193-9F37-01A617ABD4D7}"/>
               </a:ext>
             </a:extLst>
           </p:cNvPr>
@@ -4298,7 +4302,7 @@
           <a:p>
             <a:r>
               <a:rPr lang="de-DE"/>
-              <a:t>Entrance: splits and turns</a:t>
+              <a:t>Emphasis: text</a:t>
             </a:r>
           </a:p>
         </p:txBody>
@@ -4308,7 +4312,7 @@
           <p:cNvPr id="3" name="Rechteck 2">
             <a:extLst>
               <a:ext uri="{FF2B5EF4-FFF2-40B4-BE49-F238E27FC236}">
-                <a16:creationId xmlns:a16="http://schemas.microsoft.com/office/drawing/2014/main" id="{B2E6383E-3DC2-51E1-FF12-09FCDCC03535}"/>
+                <a16:creationId xmlns:a16="http://schemas.microsoft.com/office/drawing/2014/main" id="{8832A2BB-B223-9CEC-D31A-D69297E51479}"/>
               </a:ext>
             </a:extLst>
           </p:cNvPr>
@@ -4359,7 +4363,7 @@
                   <a:srgbClr val="FFFFFF"/>
                 </a:solidFill>
               </a:rPr>
-              <a:t>Peek</a:t>
+              <a:t>Change font</a:t>
             </a:r>
           </a:p>
         </p:txBody>
@@ -4369,7 +4373,7 @@
           <p:cNvPr id="4" name="Rechteck 3">
             <a:extLst>
               <a:ext uri="{FF2B5EF4-FFF2-40B4-BE49-F238E27FC236}">
-                <a16:creationId xmlns:a16="http://schemas.microsoft.com/office/drawing/2014/main" id="{CB307273-FAE1-D417-80A8-336EE5489D70}"/>
+                <a16:creationId xmlns:a16="http://schemas.microsoft.com/office/drawing/2014/main" id="{589E95D3-7EE7-133D-56A9-F2A7DBB6475C}"/>
               </a:ext>
             </a:extLst>
           </p:cNvPr>
@@ -4420,7 +4424,7 @@
                   <a:srgbClr val="FFFFFF"/>
                 </a:solidFill>
               </a:rPr>
-              <a:t>Spiral</a:t>
+              <a:t>Font size</a:t>
             </a:r>
           </a:p>
         </p:txBody>
@@ -4430,7 +4434,7 @@
           <p:cNvPr id="5" name="Rechteck 4">
             <a:extLst>
               <a:ext uri="{FF2B5EF4-FFF2-40B4-BE49-F238E27FC236}">
-                <a16:creationId xmlns:a16="http://schemas.microsoft.com/office/drawing/2014/main" id="{3B89A7BF-AE9B-CCB2-BEDF-8E84780FAE07}"/>
+                <a16:creationId xmlns:a16="http://schemas.microsoft.com/office/drawing/2014/main" id="{F136A502-7720-F080-CA05-3035828B343C}"/>
               </a:ext>
             </a:extLst>
           </p:cNvPr>
@@ -4481,7 +4485,7 @@
                   <a:srgbClr val="FFFFFF"/>
                 </a:solidFill>
               </a:rPr>
-              <a:t>Split</a:t>
+              <a:t>Font style</a:t>
             </a:r>
           </a:p>
         </p:txBody>
@@ -4491,7 +4495,7 @@
           <p:cNvPr id="6" name="Rechteck 5">
             <a:extLst>
               <a:ext uri="{FF2B5EF4-FFF2-40B4-BE49-F238E27FC236}">
-                <a16:creationId xmlns:a16="http://schemas.microsoft.com/office/drawing/2014/main" id="{761B546E-E02C-7865-4594-34A48499A104}"/>
+                <a16:creationId xmlns:a16="http://schemas.microsoft.com/office/drawing/2014/main" id="{E81EAE18-16D9-2E00-7FAE-B10CE159A9BE}"/>
               </a:ext>
             </a:extLst>
           </p:cNvPr>
@@ -4542,7 +4546,7 @@
                   <a:srgbClr val="FFFFFF"/>
                 </a:solidFill>
               </a:rPr>
-              <a:t>Stretch</a:t>
+              <a:t>Bold flash</a:t>
             </a:r>
           </a:p>
         </p:txBody>
@@ -4552,7 +4556,7 @@
           <p:cNvPr id="7" name="Rechteck 6">
             <a:extLst>
               <a:ext uri="{FF2B5EF4-FFF2-40B4-BE49-F238E27FC236}">
-                <a16:creationId xmlns:a16="http://schemas.microsoft.com/office/drawing/2014/main" id="{B1E34F6B-65C4-82FA-1DAB-801A89440861}"/>
+                <a16:creationId xmlns:a16="http://schemas.microsoft.com/office/drawing/2014/main" id="{45140AA8-FD6C-8D5C-C7BE-C382DCAB19DA}"/>
               </a:ext>
             </a:extLst>
           </p:cNvPr>
@@ -4603,7 +4607,7 @@
                   <a:srgbClr val="FFFFFF"/>
                 </a:solidFill>
               </a:rPr>
-              <a:t>Strips</a:t>
+              <a:t>Bold reveal</a:t>
             </a:r>
           </a:p>
         </p:txBody>
@@ -4613,7 +4617,7 @@
           <p:cNvPr id="8" name="Rechteck 7">
             <a:extLst>
               <a:ext uri="{FF2B5EF4-FFF2-40B4-BE49-F238E27FC236}">
-                <a16:creationId xmlns:a16="http://schemas.microsoft.com/office/drawing/2014/main" id="{D03E05FD-59CB-E671-AF74-A81E40592FA2}"/>
+                <a16:creationId xmlns:a16="http://schemas.microsoft.com/office/drawing/2014/main" id="{0D780ABD-55A9-A630-0488-1B06C9D133AE}"/>
               </a:ext>
             </a:extLst>
           </p:cNvPr>
@@ -4664,7 +4668,7 @@
                   <a:srgbClr val="FFFFFF"/>
                 </a:solidFill>
               </a:rPr>
-              <a:t>Swivel</a:t>
+              <a:t>Brush underline</a:t>
             </a:r>
           </a:p>
         </p:txBody>
@@ -4674,7 +4678,7 @@
           <p:cNvPr id="9" name="Rechteck 8">
             <a:extLst>
               <a:ext uri="{FF2B5EF4-FFF2-40B4-BE49-F238E27FC236}">
-                <a16:creationId xmlns:a16="http://schemas.microsoft.com/office/drawing/2014/main" id="{5AFE1610-DF59-F2C0-8876-F2196965F80E}"/>
+                <a16:creationId xmlns:a16="http://schemas.microsoft.com/office/drawing/2014/main" id="{5D8A5E38-EC97-422B-7311-7A2891AFD791}"/>
               </a:ext>
             </a:extLst>
           </p:cNvPr>
@@ -4725,7 +4729,7 @@
                   <a:srgbClr val="FFFFFF"/>
                 </a:solidFill>
               </a:rPr>
-              <a:t>Wedge</a:t>
+              <a:t>Color wave</a:t>
             </a:r>
           </a:p>
         </p:txBody>
@@ -4735,7 +4739,7 @@
           <p:cNvPr id="10" name="Rechteck 9">
             <a:extLst>
               <a:ext uri="{FF2B5EF4-FFF2-40B4-BE49-F238E27FC236}">
-                <a16:creationId xmlns:a16="http://schemas.microsoft.com/office/drawing/2014/main" id="{5F79E755-8A68-C930-0C7B-3DB94D3434A1}"/>
+                <a16:creationId xmlns:a16="http://schemas.microsoft.com/office/drawing/2014/main" id="{87203FB1-7A44-4842-7543-C48BB225272B}"/>
               </a:ext>
             </a:extLst>
           </p:cNvPr>
@@ -4786,7 +4790,7 @@
                   <a:srgbClr val="FFFFFF"/>
                 </a:solidFill>
               </a:rPr>
-              <a:t>Wheel</a:t>
+              <a:t>Style emphasis</a:t>
             </a:r>
           </a:p>
         </p:txBody>
@@ -4794,7 +4798,3352 @@
     </p:spTree>
     <p:extLst>
       <p:ext uri="{BB962C8B-B14F-4D97-AF65-F5344CB8AC3E}">
-        <p14:creationId xmlns:p14="http://schemas.microsoft.com/office/powerpoint/2010/main" val="3181866974"/>
+        <p14:creationId xmlns:p14="http://schemas.microsoft.com/office/powerpoint/2010/main" val="387207315"/>
+      </p:ext>
+    </p:extLst>
+  </p:cSld>
+  <p:clrMapOvr>
+    <a:masterClrMapping/>
+  </p:clrMapOvr>
+  <p:timing>
+    <p:tnLst>
+      <p:par>
+        <p:cTn id="1" dur="indefinite" restart="never" nodeType="tmRoot">
+          <p:childTnLst>
+            <p:seq concurrent="1" nextAc="seek">
+              <p:cTn id="2" dur="indefinite" nodeType="mainSeq">
+                <p:childTnLst>
+                  <p:par>
+                    <p:cTn id="3" fill="hold">
+                      <p:stCondLst>
+                        <p:cond delay="indefinite"/>
+                      </p:stCondLst>
+                      <p:childTnLst>
+                        <p:par>
+                          <p:cTn id="4" fill="hold">
+                            <p:stCondLst>
+                              <p:cond delay="0"/>
+                            </p:stCondLst>
+                            <p:childTnLst>
+                              <p:par>
+                                <p:cTn id="5" presetID="2" presetClass="emph" presetSubtype="0" grpId="0" nodeType="clickEffect">
+                                  <p:stCondLst>
+                                    <p:cond delay="0"/>
+                                  </p:stCondLst>
+                                  <p:childTnLst>
+                                    <p:set>
+                                      <p:cBhvr override="childStyle">
+                                        <p:cTn id="6" dur="800"/>
+                                        <p:tgtEl>
+                                          <p:spTgt spid="3"/>
+                                        </p:tgtEl>
+                                        <p:attrNameLst>
+                                          <p:attrName>style.fontFamily</p:attrName>
+                                        </p:attrNameLst>
+                                      </p:cBhvr>
+                                      <p:to>
+                                        <p:strVal val="Times New Roman"/>
+                                      </p:to>
+                                    </p:set>
+                                  </p:childTnLst>
+                                </p:cTn>
+                              </p:par>
+                            </p:childTnLst>
+                          </p:cTn>
+                        </p:par>
+                        <p:par>
+                          <p:cTn id="7" fill="hold">
+                            <p:stCondLst>
+                              <p:cond delay="800"/>
+                            </p:stCondLst>
+                            <p:childTnLst>
+                              <p:par>
+                                <p:cTn id="8" presetID="4" presetClass="emph" presetSubtype="2" fill="hold" grpId="0" nodeType="afterEffect">
+                                  <p:stCondLst>
+                                    <p:cond delay="0"/>
+                                  </p:stCondLst>
+                                  <p:childTnLst>
+                                    <p:anim to="1.5" calcmode="lin" valueType="num">
+                                      <p:cBhvr override="childStyle">
+                                        <p:cTn id="9" dur="800" fill="hold"/>
+                                        <p:tgtEl>
+                                          <p:spTgt spid="4"/>
+                                        </p:tgtEl>
+                                        <p:attrNameLst>
+                                          <p:attrName>style.fontSize</p:attrName>
+                                        </p:attrNameLst>
+                                      </p:cBhvr>
+                                    </p:anim>
+                                  </p:childTnLst>
+                                </p:cTn>
+                              </p:par>
+                            </p:childTnLst>
+                          </p:cTn>
+                        </p:par>
+                        <p:par>
+                          <p:cTn id="10" fill="hold">
+                            <p:stCondLst>
+                              <p:cond delay="1600"/>
+                            </p:stCondLst>
+                            <p:childTnLst>
+                              <p:par>
+                                <p:cTn id="11" presetID="5" presetClass="emph" presetSubtype="1" grpId="0" nodeType="afterEffect">
+                                  <p:stCondLst>
+                                    <p:cond delay="0"/>
+                                  </p:stCondLst>
+                                  <p:childTnLst>
+                                    <p:set>
+                                      <p:cBhvr override="childStyle">
+                                        <p:cTn id="12" dur="800"/>
+                                        <p:tgtEl>
+                                          <p:spTgt spid="5"/>
+                                        </p:tgtEl>
+                                        <p:attrNameLst>
+                                          <p:attrName>style.fontStyle</p:attrName>
+                                        </p:attrNameLst>
+                                      </p:cBhvr>
+                                      <p:to>
+                                        <p:strVal val="normal"/>
+                                      </p:to>
+                                    </p:set>
+                                    <p:set>
+                                      <p:cBhvr override="childStyle">
+                                        <p:cTn id="13" dur="800"/>
+                                        <p:tgtEl>
+                                          <p:spTgt spid="5"/>
+                                        </p:tgtEl>
+                                        <p:attrNameLst>
+                                          <p:attrName>style.fontWeight</p:attrName>
+                                        </p:attrNameLst>
+                                      </p:cBhvr>
+                                      <p:to>
+                                        <p:strVal val="bold"/>
+                                      </p:to>
+                                    </p:set>
+                                    <p:set>
+                                      <p:cBhvr override="childStyle">
+                                        <p:cTn id="14" dur="800"/>
+                                        <p:tgtEl>
+                                          <p:spTgt spid="5"/>
+                                        </p:tgtEl>
+                                        <p:attrNameLst>
+                                          <p:attrName>style.textDecorationUnderline</p:attrName>
+                                        </p:attrNameLst>
+                                      </p:cBhvr>
+                                      <p:to>
+                                        <p:strVal val="false"/>
+                                      </p:to>
+                                    </p:set>
+                                  </p:childTnLst>
+                                </p:cTn>
+                              </p:par>
+                            </p:childTnLst>
+                          </p:cTn>
+                        </p:par>
+                        <p:par>
+                          <p:cTn id="15" fill="hold">
+                            <p:stCondLst>
+                              <p:cond delay="2400"/>
+                            </p:stCondLst>
+                            <p:childTnLst>
+                              <p:par>
+                                <p:cTn id="16" presetID="10" presetClass="emph" presetSubtype="0" fill="hold" grpId="0" nodeType="afterEffect">
+                                  <p:stCondLst>
+                                    <p:cond delay="0"/>
+                                  </p:stCondLst>
+                                  <p:childTnLst>
+                                    <p:anim calcmode="discrete" valueType="str">
+                                      <p:cBhvr override="childStyle">
+                                        <p:cTn id="17" dur="800" fill="hold"/>
+                                        <p:tgtEl>
+                                          <p:spTgt spid="6"/>
+                                        </p:tgtEl>
+                                        <p:attrNameLst>
+                                          <p:attrName>style.fontWeight</p:attrName>
+                                        </p:attrNameLst>
+                                      </p:cBhvr>
+                                      <p:tavLst>
+                                        <p:tav tm="0">
+                                          <p:val>
+                                            <p:strVal val="normal"/>
+                                          </p:val>
+                                        </p:tav>
+                                        <p:tav tm="50000">
+                                          <p:val>
+                                            <p:strVal val="bold"/>
+                                          </p:val>
+                                        </p:tav>
+                                        <p:tav tm="60000">
+                                          <p:val>
+                                            <p:strVal val="normal"/>
+                                          </p:val>
+                                        </p:tav>
+                                        <p:tav tm="100000">
+                                          <p:val>
+                                            <p:strVal val="normal"/>
+                                          </p:val>
+                                        </p:tav>
+                                      </p:tavLst>
+                                    </p:anim>
+                                  </p:childTnLst>
+                                </p:cTn>
+                              </p:par>
+                            </p:childTnLst>
+                          </p:cTn>
+                        </p:par>
+                        <p:par>
+                          <p:cTn id="18" fill="hold">
+                            <p:stCondLst>
+                              <p:cond delay="3200"/>
+                            </p:stCondLst>
+                            <p:childTnLst>
+                              <p:par>
+                                <p:cTn id="19" presetID="15" presetClass="emph" presetSubtype="0" grpId="0" nodeType="afterEffect">
+                                  <p:stCondLst>
+                                    <p:cond delay="0"/>
+                                  </p:stCondLst>
+                                  <p:iterate type="lt">
+                                    <p:tmAbs val="25"/>
+                                  </p:iterate>
+                                  <p:childTnLst>
+                                    <p:set>
+                                      <p:cBhvr override="childStyle">
+                                        <p:cTn id="20" dur="800"/>
+                                        <p:tgtEl>
+                                          <p:spTgt spid="7"/>
+                                        </p:tgtEl>
+                                        <p:attrNameLst>
+                                          <p:attrName>style.fontWeight</p:attrName>
+                                        </p:attrNameLst>
+                                      </p:cBhvr>
+                                      <p:to>
+                                        <p:strVal val="bold"/>
+                                      </p:to>
+                                    </p:set>
+                                  </p:childTnLst>
+                                </p:cTn>
+                              </p:par>
+                            </p:childTnLst>
+                          </p:cTn>
+                        </p:par>
+                        <p:par>
+                          <p:cTn id="21" fill="hold">
+                            <p:stCondLst>
+                              <p:cond delay="4225"/>
+                            </p:stCondLst>
+                            <p:childTnLst>
+                              <p:par>
+                                <p:cTn id="22" presetID="18" presetClass="emph" presetSubtype="0" fill="hold" grpId="0" nodeType="afterEffect">
+                                  <p:stCondLst>
+                                    <p:cond delay="0"/>
+                                  </p:stCondLst>
+                                  <p:iterate type="lt">
+                                    <p:tmPct val="4000"/>
+                                  </p:iterate>
+                                  <p:childTnLst>
+                                    <p:set>
+                                      <p:cBhvr override="childStyle">
+                                        <p:cTn id="23" dur="800" fill="hold"/>
+                                        <p:tgtEl>
+                                          <p:spTgt spid="8"/>
+                                        </p:tgtEl>
+                                        <p:attrNameLst>
+                                          <p:attrName>style.textDecorationUnderline</p:attrName>
+                                        </p:attrNameLst>
+                                      </p:cBhvr>
+                                      <p:to>
+                                        <p:strVal val="true"/>
+                                      </p:to>
+                                    </p:set>
+                                  </p:childTnLst>
+                                </p:cTn>
+                              </p:par>
+                            </p:childTnLst>
+                          </p:cTn>
+                        </p:par>
+                        <p:par>
+                          <p:cTn id="24" fill="hold">
+                            <p:stCondLst>
+                              <p:cond delay="5441"/>
+                            </p:stCondLst>
+                            <p:childTnLst>
+                              <p:par>
+                                <p:cTn id="25" presetID="20" presetClass="emph" presetSubtype="0" fill="hold" grpId="0" nodeType="afterEffect">
+                                  <p:stCondLst>
+                                    <p:cond delay="0"/>
+                                  </p:stCondLst>
+                                  <p:iterate type="lt">
+                                    <p:tmPct val="10000"/>
+                                  </p:iterate>
+                                  <p:childTnLst>
+                                    <p:set>
+                                      <p:cBhvr override="childStyle">
+                                        <p:cTn id="26" dur="400" autoRev="1" fill="hold"/>
+                                        <p:tgtEl>
+                                          <p:spTgt spid="9"/>
+                                        </p:tgtEl>
+                                        <p:attrNameLst>
+                                          <p:attrName>style.color</p:attrName>
+                                        </p:attrNameLst>
+                                      </p:cBhvr>
+                                      <p:to>
+                                        <p:clrVal>
+                                          <a:schemeClr val="accent2"/>
+                                        </p:clrVal>
+                                      </p:to>
+                                    </p:set>
+                                    <p:set>
+                                      <p:cBhvr>
+                                        <p:cTn id="27" dur="400" autoRev="1" fill="hold"/>
+                                        <p:tgtEl>
+                                          <p:spTgt spid="9"/>
+                                        </p:tgtEl>
+                                        <p:attrNameLst>
+                                          <p:attrName>fillcolor</p:attrName>
+                                        </p:attrNameLst>
+                                      </p:cBhvr>
+                                      <p:to>
+                                        <p:clrVal>
+                                          <a:schemeClr val="accent2"/>
+                                        </p:clrVal>
+                                      </p:to>
+                                    </p:set>
+                                    <p:set>
+                                      <p:cBhvr>
+                                        <p:cTn id="28" dur="400" autoRev="1" fill="hold"/>
+                                        <p:tgtEl>
+                                          <p:spTgt spid="9"/>
+                                        </p:tgtEl>
+                                        <p:attrNameLst>
+                                          <p:attrName>fill.type</p:attrName>
+                                        </p:attrNameLst>
+                                      </p:cBhvr>
+                                      <p:to>
+                                        <p:strVal val="solid"/>
+                                      </p:to>
+                                    </p:set>
+                                  </p:childTnLst>
+                                </p:cTn>
+                              </p:par>
+                            </p:childTnLst>
+                          </p:cTn>
+                        </p:par>
+                        <p:par>
+                          <p:cTn id="29" fill="hold">
+                            <p:stCondLst>
+                              <p:cond delay="6881"/>
+                            </p:stCondLst>
+                            <p:childTnLst>
+                              <p:par>
+                                <p:cTn id="30" presetID="31" presetClass="emph" presetSubtype="0" grpId="0" nodeType="afterEffect">
+                                  <p:stCondLst>
+                                    <p:cond delay="0"/>
+                                  </p:stCondLst>
+                                  <p:childTnLst>
+                                    <p:set>
+                                      <p:cBhvr override="childStyle">
+                                        <p:cTn id="31" dur="800" fill="hold"/>
+                                        <p:tgtEl>
+                                          <p:spTgt spid="10"/>
+                                        </p:tgtEl>
+                                        <p:attrNameLst>
+                                          <p:attrName>style.color</p:attrName>
+                                        </p:attrNameLst>
+                                      </p:cBhvr>
+                                      <p:to>
+                                        <p:clrVal>
+                                          <a:schemeClr val="accent2"/>
+                                        </p:clrVal>
+                                      </p:to>
+                                    </p:set>
+                                    <p:set>
+                                      <p:cBhvr override="childStyle">
+                                        <p:cTn id="32" dur="800" fill="hold"/>
+                                        <p:tgtEl>
+                                          <p:spTgt spid="10"/>
+                                        </p:tgtEl>
+                                        <p:attrNameLst>
+                                          <p:attrName>style.fontStyle</p:attrName>
+                                        </p:attrNameLst>
+                                      </p:cBhvr>
+                                      <p:to>
+                                        <p:strVal val="italic"/>
+                                      </p:to>
+                                    </p:set>
+                                    <p:set>
+                                      <p:cBhvr>
+                                        <p:cTn id="33" dur="800" fill="hold"/>
+                                        <p:tgtEl>
+                                          <p:spTgt spid="10"/>
+                                        </p:tgtEl>
+                                        <p:attrNameLst>
+                                          <p:attrName>style.fontWeight</p:attrName>
+                                        </p:attrNameLst>
+                                      </p:cBhvr>
+                                      <p:to>
+                                        <p:strVal val="bold"/>
+                                      </p:to>
+                                    </p:set>
+                                    <p:set>
+                                      <p:cBhvr>
+                                        <p:cTn id="34" dur="800" fill="hold"/>
+                                        <p:tgtEl>
+                                          <p:spTgt spid="10"/>
+                                        </p:tgtEl>
+                                        <p:attrNameLst>
+                                          <p:attrName>style.textDecorationUnderline</p:attrName>
+                                        </p:attrNameLst>
+                                      </p:cBhvr>
+                                      <p:to>
+                                        <p:strVal val="true"/>
+                                      </p:to>
+                                    </p:set>
+                                  </p:childTnLst>
+                                </p:cTn>
+                              </p:par>
+                            </p:childTnLst>
+                          </p:cTn>
+                        </p:par>
+                      </p:childTnLst>
+                    </p:cTn>
+                  </p:par>
+                </p:childTnLst>
+              </p:cTn>
+              <p:prevCondLst>
+                <p:cond evt="onPrev" delay="0">
+                  <p:tgtEl>
+                    <p:sldTgt/>
+                  </p:tgtEl>
+                </p:cond>
+              </p:prevCondLst>
+              <p:nextCondLst>
+                <p:cond evt="onNext" delay="0">
+                  <p:tgtEl>
+                    <p:sldTgt/>
+                  </p:tgtEl>
+                </p:cond>
+              </p:nextCondLst>
+            </p:seq>
+          </p:childTnLst>
+        </p:cTn>
+      </p:par>
+    </p:tnLst>
+    <p:bldLst>
+      <p:bldP spid="3" grpId="0"/>
+      <p:bldP spid="4" grpId="0"/>
+      <p:bldP spid="5" grpId="0"/>
+      <p:bldP spid="6" grpId="0"/>
+      <p:bldP spid="7" grpId="0"/>
+      <p:bldP spid="8" grpId="0"/>
+      <p:bldP spid="9" grpId="0" animBg="1"/>
+      <p:bldP spid="10" grpId="0"/>
+    </p:bldLst>
+  </p:timing>
+</p:sld>
+</file>
+
+<file path=ppt/slides/slide11.xml><?xml version="1.0" encoding="utf-8"?>
+<p:sld xmlns:a="http://schemas.openxmlformats.org/drawingml/2006/main" xmlns:r="http://schemas.openxmlformats.org/officeDocument/2006/relationships" xmlns:p="http://schemas.openxmlformats.org/presentationml/2006/main">
+  <p:cSld>
+    <p:spTree>
+      <p:nvGrpSpPr>
+        <p:cNvPr id="1" name=""/>
+        <p:cNvGrpSpPr/>
+        <p:nvPr/>
+      </p:nvGrpSpPr>
+      <p:grpSpPr>
+        <a:xfrm>
+          <a:off x="0" y="0"/>
+          <a:ext cx="0" cy="0"/>
+          <a:chOff x="0" y="0"/>
+          <a:chExt cx="0" cy="0"/>
+        </a:xfrm>
+      </p:grpSpPr>
+      <p:sp>
+        <p:nvSpPr>
+          <p:cNvPr id="2" name="Titel 1">
+            <a:extLst>
+              <a:ext uri="{FF2B5EF4-FFF2-40B4-BE49-F238E27FC236}">
+                <a16:creationId xmlns:a16="http://schemas.microsoft.com/office/drawing/2014/main" id="{9AE8ECB9-529E-7D43-C437-2191A799C6A0}"/>
+              </a:ext>
+            </a:extLst>
+          </p:cNvPr>
+          <p:cNvSpPr>
+            <a:spLocks noGrp="1"/>
+          </p:cNvSpPr>
+          <p:nvPr>
+            <p:ph type="title"/>
+          </p:nvPr>
+        </p:nvSpPr>
+        <p:spPr/>
+        <p:txBody>
+          <a:bodyPr/>
+          <a:lstStyle/>
+          <a:p>
+            <a:r>
+              <a:rPr lang="de-DE"/>
+              <a:t>More exits</a:t>
+            </a:r>
+          </a:p>
+        </p:txBody>
+      </p:sp>
+      <p:sp>
+        <p:nvSpPr>
+          <p:cNvPr id="3" name="Rechteck 2">
+            <a:extLst>
+              <a:ext uri="{FF2B5EF4-FFF2-40B4-BE49-F238E27FC236}">
+                <a16:creationId xmlns:a16="http://schemas.microsoft.com/office/drawing/2014/main" id="{13534A52-8A89-6F92-9187-AC574E883012}"/>
+              </a:ext>
+            </a:extLst>
+          </p:cNvPr>
+          <p:cNvSpPr/>
+          <p:nvPr/>
+        </p:nvSpPr>
+        <p:spPr>
+          <a:xfrm>
+            <a:off x="508000" y="1778000"/>
+            <a:ext cx="2540000" cy="1905000"/>
+          </a:xfrm>
+          <a:prstGeom prst="rect">
+            <a:avLst/>
+          </a:prstGeom>
+          <a:solidFill>
+            <a:srgbClr val="4472C4"/>
+          </a:solidFill>
+          <a:ln w="50800">
+            <a:solidFill>
+              <a:srgbClr val="C00000"/>
+            </a:solidFill>
+          </a:ln>
+        </p:spPr>
+        <p:style>
+          <a:lnRef idx="2">
+            <a:schemeClr val="accent1">
+              <a:shade val="15000"/>
+            </a:schemeClr>
+          </a:lnRef>
+          <a:fillRef idx="1">
+            <a:schemeClr val="accent1"/>
+          </a:fillRef>
+          <a:effectRef idx="0">
+            <a:schemeClr val="accent1"/>
+          </a:effectRef>
+          <a:fontRef idx="minor">
+            <a:schemeClr val="lt1"/>
+          </a:fontRef>
+        </p:style>
+        <p:txBody>
+          <a:bodyPr rtlCol="0" anchor="ctr"/>
+          <a:lstStyle/>
+          <a:p>
+            <a:pPr algn="ctr"/>
+            <a:r>
+              <a:rPr lang="de-DE" sz="2400">
+                <a:solidFill>
+                  <a:srgbClr val="FFFFFF"/>
+                </a:solidFill>
+              </a:rPr>
+              <a:t>Crawl out</a:t>
+            </a:r>
+          </a:p>
+        </p:txBody>
+      </p:sp>
+      <p:sp>
+        <p:nvSpPr>
+          <p:cNvPr id="4" name="Rechteck 3">
+            <a:extLst>
+              <a:ext uri="{FF2B5EF4-FFF2-40B4-BE49-F238E27FC236}">
+                <a16:creationId xmlns:a16="http://schemas.microsoft.com/office/drawing/2014/main" id="{36586F35-D14F-D8B1-5CE1-FF778465782B}"/>
+              </a:ext>
+            </a:extLst>
+          </p:cNvPr>
+          <p:cNvSpPr/>
+          <p:nvPr/>
+        </p:nvSpPr>
+        <p:spPr>
+          <a:xfrm>
+            <a:off x="3365500" y="1778000"/>
+            <a:ext cx="2540000" cy="1905000"/>
+          </a:xfrm>
+          <a:prstGeom prst="rect">
+            <a:avLst/>
+          </a:prstGeom>
+          <a:solidFill>
+            <a:srgbClr val="4472C4"/>
+          </a:solidFill>
+          <a:ln w="50800">
+            <a:solidFill>
+              <a:srgbClr val="C00000"/>
+            </a:solidFill>
+          </a:ln>
+        </p:spPr>
+        <p:style>
+          <a:lnRef idx="2">
+            <a:schemeClr val="accent1">
+              <a:shade val="15000"/>
+            </a:schemeClr>
+          </a:lnRef>
+          <a:fillRef idx="1">
+            <a:schemeClr val="accent1"/>
+          </a:fillRef>
+          <a:effectRef idx="0">
+            <a:schemeClr val="accent1"/>
+          </a:effectRef>
+          <a:fontRef idx="minor">
+            <a:schemeClr val="lt1"/>
+          </a:fontRef>
+        </p:style>
+        <p:txBody>
+          <a:bodyPr rtlCol="0" anchor="ctr"/>
+          <a:lstStyle/>
+          <a:p>
+            <a:pPr algn="ctr"/>
+            <a:r>
+              <a:rPr lang="de-DE" sz="2400">
+                <a:solidFill>
+                  <a:srgbClr val="FFFFFF"/>
+                </a:solidFill>
+              </a:rPr>
+              <a:t>Flash out</a:t>
+            </a:r>
+          </a:p>
+        </p:txBody>
+      </p:sp>
+      <p:sp>
+        <p:nvSpPr>
+          <p:cNvPr id="5" name="Rechteck 4">
+            <a:extLst>
+              <a:ext uri="{FF2B5EF4-FFF2-40B4-BE49-F238E27FC236}">
+                <a16:creationId xmlns:a16="http://schemas.microsoft.com/office/drawing/2014/main" id="{20E43F13-7DA7-B0EA-15D1-55C6DC7DD0C8}"/>
+              </a:ext>
+            </a:extLst>
+          </p:cNvPr>
+          <p:cNvSpPr/>
+          <p:nvPr/>
+        </p:nvSpPr>
+        <p:spPr>
+          <a:xfrm>
+            <a:off x="6223000" y="1778000"/>
+            <a:ext cx="2540000" cy="1905000"/>
+          </a:xfrm>
+          <a:prstGeom prst="rect">
+            <a:avLst/>
+          </a:prstGeom>
+          <a:solidFill>
+            <a:srgbClr val="4472C4"/>
+          </a:solidFill>
+          <a:ln w="50800">
+            <a:solidFill>
+              <a:srgbClr val="C00000"/>
+            </a:solidFill>
+          </a:ln>
+        </p:spPr>
+        <p:style>
+          <a:lnRef idx="2">
+            <a:schemeClr val="accent1">
+              <a:shade val="15000"/>
+            </a:schemeClr>
+          </a:lnRef>
+          <a:fillRef idx="1">
+            <a:schemeClr val="accent1"/>
+          </a:fillRef>
+          <a:effectRef idx="0">
+            <a:schemeClr val="accent1"/>
+          </a:effectRef>
+          <a:fontRef idx="minor">
+            <a:schemeClr val="lt1"/>
+          </a:fontRef>
+        </p:style>
+        <p:txBody>
+          <a:bodyPr rtlCol="0" anchor="ctr"/>
+          <a:lstStyle/>
+          <a:p>
+            <a:pPr algn="ctr"/>
+            <a:r>
+              <a:rPr lang="de-DE" sz="2400">
+                <a:solidFill>
+                  <a:srgbClr val="FFFFFF"/>
+                </a:solidFill>
+              </a:rPr>
+              <a:t>Bounce out</a:t>
+            </a:r>
+          </a:p>
+        </p:txBody>
+      </p:sp>
+      <p:sp>
+        <p:nvSpPr>
+          <p:cNvPr id="6" name="Rechteck 5">
+            <a:extLst>
+              <a:ext uri="{FF2B5EF4-FFF2-40B4-BE49-F238E27FC236}">
+                <a16:creationId xmlns:a16="http://schemas.microsoft.com/office/drawing/2014/main" id="{7FB48587-6B1F-D2A3-122C-311922443A6B}"/>
+              </a:ext>
+            </a:extLst>
+          </p:cNvPr>
+          <p:cNvSpPr/>
+          <p:nvPr/>
+        </p:nvSpPr>
+        <p:spPr>
+          <a:xfrm>
+            <a:off x="9080500" y="1778000"/>
+            <a:ext cx="2540000" cy="1905000"/>
+          </a:xfrm>
+          <a:prstGeom prst="rect">
+            <a:avLst/>
+          </a:prstGeom>
+          <a:solidFill>
+            <a:srgbClr val="4472C4"/>
+          </a:solidFill>
+          <a:ln w="50800">
+            <a:solidFill>
+              <a:srgbClr val="C00000"/>
+            </a:solidFill>
+          </a:ln>
+        </p:spPr>
+        <p:style>
+          <a:lnRef idx="2">
+            <a:schemeClr val="accent1">
+              <a:shade val="15000"/>
+            </a:schemeClr>
+          </a:lnRef>
+          <a:fillRef idx="1">
+            <a:schemeClr val="accent1"/>
+          </a:fillRef>
+          <a:effectRef idx="0">
+            <a:schemeClr val="accent1"/>
+          </a:effectRef>
+          <a:fontRef idx="minor">
+            <a:schemeClr val="lt1"/>
+          </a:fontRef>
+        </p:style>
+        <p:txBody>
+          <a:bodyPr rtlCol="0" anchor="ctr"/>
+          <a:lstStyle/>
+          <a:p>
+            <a:pPr algn="ctr"/>
+            <a:r>
+              <a:rPr lang="de-DE" sz="2400">
+                <a:solidFill>
+                  <a:srgbClr val="FFFFFF"/>
+                </a:solidFill>
+              </a:rPr>
+              <a:t>Credits out</a:t>
+            </a:r>
+          </a:p>
+        </p:txBody>
+      </p:sp>
+      <p:sp>
+        <p:nvSpPr>
+          <p:cNvPr id="7" name="Rechteck 6">
+            <a:extLst>
+              <a:ext uri="{FF2B5EF4-FFF2-40B4-BE49-F238E27FC236}">
+                <a16:creationId xmlns:a16="http://schemas.microsoft.com/office/drawing/2014/main" id="{17D83021-636B-A96C-4A33-1D169FA58F5F}"/>
+              </a:ext>
+            </a:extLst>
+          </p:cNvPr>
+          <p:cNvSpPr/>
+          <p:nvPr/>
+        </p:nvSpPr>
+        <p:spPr>
+          <a:xfrm>
+            <a:off x="508000" y="4191000"/>
+            <a:ext cx="2540000" cy="1905000"/>
+          </a:xfrm>
+          <a:prstGeom prst="rect">
+            <a:avLst/>
+          </a:prstGeom>
+          <a:solidFill>
+            <a:srgbClr val="4472C4"/>
+          </a:solidFill>
+          <a:ln w="50800">
+            <a:solidFill>
+              <a:srgbClr val="C00000"/>
+            </a:solidFill>
+          </a:ln>
+        </p:spPr>
+        <p:style>
+          <a:lnRef idx="2">
+            <a:schemeClr val="accent1">
+              <a:shade val="15000"/>
+            </a:schemeClr>
+          </a:lnRef>
+          <a:fillRef idx="1">
+            <a:schemeClr val="accent1"/>
+          </a:fillRef>
+          <a:effectRef idx="0">
+            <a:schemeClr val="accent1"/>
+          </a:effectRef>
+          <a:fontRef idx="minor">
+            <a:schemeClr val="lt1"/>
+          </a:fontRef>
+        </p:style>
+        <p:txBody>
+          <a:bodyPr rtlCol="0" anchor="ctr"/>
+          <a:lstStyle/>
+          <a:p>
+            <a:pPr algn="ctr"/>
+            <a:r>
+              <a:rPr lang="de-DE" sz="2400">
+                <a:solidFill>
+                  <a:srgbClr val="FFFFFF"/>
+                </a:solidFill>
+              </a:rPr>
+              <a:t>Fold out</a:t>
+            </a:r>
+          </a:p>
+        </p:txBody>
+      </p:sp>
+      <p:sp>
+        <p:nvSpPr>
+          <p:cNvPr id="8" name="Rechteck 7">
+            <a:extLst>
+              <a:ext uri="{FF2B5EF4-FFF2-40B4-BE49-F238E27FC236}">
+                <a16:creationId xmlns:a16="http://schemas.microsoft.com/office/drawing/2014/main" id="{8629EF46-F606-FE9D-2939-B7B48DD483E9}"/>
+              </a:ext>
+            </a:extLst>
+          </p:cNvPr>
+          <p:cNvSpPr/>
+          <p:nvPr/>
+        </p:nvSpPr>
+        <p:spPr>
+          <a:xfrm>
+            <a:off x="3365500" y="4191000"/>
+            <a:ext cx="2540000" cy="1905000"/>
+          </a:xfrm>
+          <a:prstGeom prst="rect">
+            <a:avLst/>
+          </a:prstGeom>
+          <a:solidFill>
+            <a:srgbClr val="4472C4"/>
+          </a:solidFill>
+          <a:ln w="50800">
+            <a:solidFill>
+              <a:srgbClr val="C00000"/>
+            </a:solidFill>
+          </a:ln>
+        </p:spPr>
+        <p:style>
+          <a:lnRef idx="2">
+            <a:schemeClr val="accent1">
+              <a:shade val="15000"/>
+            </a:schemeClr>
+          </a:lnRef>
+          <a:fillRef idx="1">
+            <a:schemeClr val="accent1"/>
+          </a:fillRef>
+          <a:effectRef idx="0">
+            <a:schemeClr val="accent1"/>
+          </a:effectRef>
+          <a:fontRef idx="minor">
+            <a:schemeClr val="lt1"/>
+          </a:fontRef>
+        </p:style>
+        <p:txBody>
+          <a:bodyPr rtlCol="0" anchor="ctr"/>
+          <a:lstStyle/>
+          <a:p>
+            <a:pPr algn="ctr"/>
+            <a:r>
+              <a:rPr lang="de-DE" sz="2400">
+                <a:solidFill>
+                  <a:srgbClr val="FFFFFF"/>
+                </a:solidFill>
+              </a:rPr>
+              <a:t>Fly out</a:t>
+            </a:r>
+          </a:p>
+        </p:txBody>
+      </p:sp>
+      <p:sp>
+        <p:nvSpPr>
+          <p:cNvPr id="9" name="Rechteck 8">
+            <a:extLst>
+              <a:ext uri="{FF2B5EF4-FFF2-40B4-BE49-F238E27FC236}">
+                <a16:creationId xmlns:a16="http://schemas.microsoft.com/office/drawing/2014/main" id="{7F8BD9CD-73FC-D3B9-E16A-6F626D5A822F}"/>
+              </a:ext>
+            </a:extLst>
+          </p:cNvPr>
+          <p:cNvSpPr/>
+          <p:nvPr/>
+        </p:nvSpPr>
+        <p:spPr>
+          <a:xfrm>
+            <a:off x="6223000" y="4191000"/>
+            <a:ext cx="2540000" cy="1905000"/>
+          </a:xfrm>
+          <a:prstGeom prst="rect">
+            <a:avLst/>
+          </a:prstGeom>
+          <a:solidFill>
+            <a:srgbClr val="4472C4"/>
+          </a:solidFill>
+          <a:ln w="50800">
+            <a:solidFill>
+              <a:srgbClr val="C00000"/>
+            </a:solidFill>
+          </a:ln>
+        </p:spPr>
+        <p:style>
+          <a:lnRef idx="2">
+            <a:schemeClr val="accent1">
+              <a:shade val="15000"/>
+            </a:schemeClr>
+          </a:lnRef>
+          <a:fillRef idx="1">
+            <a:schemeClr val="accent1"/>
+          </a:fillRef>
+          <a:effectRef idx="0">
+            <a:schemeClr val="accent1"/>
+          </a:effectRef>
+          <a:fontRef idx="minor">
+            <a:schemeClr val="lt1"/>
+          </a:fontRef>
+        </p:style>
+        <p:txBody>
+          <a:bodyPr rtlCol="0" anchor="ctr"/>
+          <a:lstStyle/>
+          <a:p>
+            <a:pPr algn="ctr"/>
+            <a:r>
+              <a:rPr lang="de-DE" sz="2400">
+                <a:solidFill>
+                  <a:srgbClr val="FFFFFF"/>
+                </a:solidFill>
+              </a:rPr>
+              <a:t>Wipe out</a:t>
+            </a:r>
+          </a:p>
+        </p:txBody>
+      </p:sp>
+      <p:sp>
+        <p:nvSpPr>
+          <p:cNvPr id="10" name="Rechteck 9">
+            <a:extLst>
+              <a:ext uri="{FF2B5EF4-FFF2-40B4-BE49-F238E27FC236}">
+                <a16:creationId xmlns:a16="http://schemas.microsoft.com/office/drawing/2014/main" id="{21608D0A-AD1D-BB3F-07FB-8A1BA6102D8A}"/>
+              </a:ext>
+            </a:extLst>
+          </p:cNvPr>
+          <p:cNvSpPr/>
+          <p:nvPr/>
+        </p:nvSpPr>
+        <p:spPr>
+          <a:xfrm>
+            <a:off x="9080500" y="4191000"/>
+            <a:ext cx="2540000" cy="1905000"/>
+          </a:xfrm>
+          <a:prstGeom prst="rect">
+            <a:avLst/>
+          </a:prstGeom>
+          <a:solidFill>
+            <a:srgbClr val="4472C4"/>
+          </a:solidFill>
+          <a:ln w="50800">
+            <a:solidFill>
+              <a:srgbClr val="C00000"/>
+            </a:solidFill>
+          </a:ln>
+        </p:spPr>
+        <p:style>
+          <a:lnRef idx="2">
+            <a:schemeClr val="accent1">
+              <a:shade val="15000"/>
+            </a:schemeClr>
+          </a:lnRef>
+          <a:fillRef idx="1">
+            <a:schemeClr val="accent1"/>
+          </a:fillRef>
+          <a:effectRef idx="0">
+            <a:schemeClr val="accent1"/>
+          </a:effectRef>
+          <a:fontRef idx="minor">
+            <a:schemeClr val="lt1"/>
+          </a:fontRef>
+        </p:style>
+        <p:txBody>
+          <a:bodyPr rtlCol="0" anchor="ctr"/>
+          <a:lstStyle/>
+          <a:p>
+            <a:pPr algn="ctr"/>
+            <a:r>
+              <a:rPr lang="de-DE" sz="2400">
+                <a:solidFill>
+                  <a:srgbClr val="FFFFFF"/>
+                </a:solidFill>
+              </a:rPr>
+              <a:t>Wheel out</a:t>
+            </a:r>
+          </a:p>
+        </p:txBody>
+      </p:sp>
+    </p:spTree>
+    <p:extLst>
+      <p:ext uri="{BB962C8B-B14F-4D97-AF65-F5344CB8AC3E}">
+        <p14:creationId xmlns:p14="http://schemas.microsoft.com/office/powerpoint/2010/main" val="3667211729"/>
+      </p:ext>
+    </p:extLst>
+  </p:cSld>
+  <p:clrMapOvr>
+    <a:masterClrMapping/>
+  </p:clrMapOvr>
+  <p:timing>
+    <p:tnLst>
+      <p:par>
+        <p:cTn id="1" dur="indefinite" restart="never" nodeType="tmRoot">
+          <p:childTnLst>
+            <p:seq concurrent="1" nextAc="seek">
+              <p:cTn id="2" dur="indefinite" nodeType="mainSeq">
+                <p:childTnLst>
+                  <p:par>
+                    <p:cTn id="3" fill="hold">
+                      <p:stCondLst>
+                        <p:cond delay="indefinite"/>
+                      </p:stCondLst>
+                      <p:childTnLst>
+                        <p:par>
+                          <p:cTn id="4" fill="hold">
+                            <p:stCondLst>
+                              <p:cond delay="0"/>
+                            </p:stCondLst>
+                            <p:childTnLst>
+                              <p:par>
+                                <p:cTn id="5" presetID="7" presetClass="exit" presetSubtype="4" fill="hold" grpId="0" nodeType="clickEffect">
+                                  <p:stCondLst>
+                                    <p:cond delay="0"/>
+                                  </p:stCondLst>
+                                  <p:childTnLst>
+                                    <p:anim calcmode="lin" valueType="num">
+                                      <p:cBhvr additive="base">
+                                        <p:cTn id="6" dur="800"/>
+                                        <p:tgtEl>
+                                          <p:spTgt spid="3"/>
+                                        </p:tgtEl>
+                                        <p:attrNameLst>
+                                          <p:attrName>ppt_x</p:attrName>
+                                        </p:attrNameLst>
+                                      </p:cBhvr>
+                                      <p:tavLst>
+                                        <p:tav tm="0">
+                                          <p:val>
+                                            <p:strVal val="ppt_x"/>
+                                          </p:val>
+                                        </p:tav>
+                                        <p:tav tm="100000">
+                                          <p:val>
+                                            <p:strVal val="ppt_x"/>
+                                          </p:val>
+                                        </p:tav>
+                                      </p:tavLst>
+                                    </p:anim>
+                                    <p:anim calcmode="lin" valueType="num">
+                                      <p:cBhvr additive="base">
+                                        <p:cTn id="7" dur="800"/>
+                                        <p:tgtEl>
+                                          <p:spTgt spid="3"/>
+                                        </p:tgtEl>
+                                        <p:attrNameLst>
+                                          <p:attrName>ppt_y</p:attrName>
+                                        </p:attrNameLst>
+                                      </p:cBhvr>
+                                      <p:tavLst>
+                                        <p:tav tm="0">
+                                          <p:val>
+                                            <p:strVal val="ppt_y"/>
+                                          </p:val>
+                                        </p:tav>
+                                        <p:tav tm="100000">
+                                          <p:val>
+                                            <p:strVal val="1+ppt_h/2"/>
+                                          </p:val>
+                                        </p:tav>
+                                      </p:tavLst>
+                                    </p:anim>
+                                    <p:set>
+                                      <p:cBhvr>
+                                        <p:cTn id="8" dur="1" fill="hold">
+                                          <p:stCondLst>
+                                            <p:cond delay="799"/>
+                                          </p:stCondLst>
+                                        </p:cTn>
+                                        <p:tgtEl>
+                                          <p:spTgt spid="3"/>
+                                        </p:tgtEl>
+                                        <p:attrNameLst>
+                                          <p:attrName>style.visibility</p:attrName>
+                                        </p:attrNameLst>
+                                      </p:cBhvr>
+                                      <p:to>
+                                        <p:strVal val="hidden"/>
+                                      </p:to>
+                                    </p:set>
+                                  </p:childTnLst>
+                                </p:cTn>
+                              </p:par>
+                            </p:childTnLst>
+                          </p:cTn>
+                        </p:par>
+                        <p:par>
+                          <p:cTn id="9" fill="hold">
+                            <p:stCondLst>
+                              <p:cond delay="800"/>
+                            </p:stCondLst>
+                            <p:childTnLst>
+                              <p:par>
+                                <p:cTn id="10" presetID="11" presetClass="exit" presetSubtype="0" fill="hold" grpId="0" nodeType="afterEffect">
+                                  <p:stCondLst>
+                                    <p:cond delay="0"/>
+                                  </p:stCondLst>
+                                  <p:childTnLst>
+                                    <p:anim calcmode="discrete" valueType="str">
+                                      <p:cBhvr>
+                                        <p:cTn id="11" dur="800"/>
+                                        <p:tgtEl>
+                                          <p:spTgt spid="4"/>
+                                        </p:tgtEl>
+                                        <p:attrNameLst>
+                                          <p:attrName>style.visibility</p:attrName>
+                                        </p:attrNameLst>
+                                      </p:cBhvr>
+                                      <p:tavLst>
+                                        <p:tav tm="0">
+                                          <p:val>
+                                            <p:strVal val="hidden"/>
+                                          </p:val>
+                                        </p:tav>
+                                        <p:tav tm="50000">
+                                          <p:val>
+                                            <p:strVal val="visible"/>
+                                          </p:val>
+                                        </p:tav>
+                                      </p:tavLst>
+                                    </p:anim>
+                                    <p:set>
+                                      <p:cBhvr>
+                                        <p:cTn id="12" dur="1" fill="hold">
+                                          <p:stCondLst>
+                                            <p:cond delay="799"/>
+                                          </p:stCondLst>
+                                        </p:cTn>
+                                        <p:tgtEl>
+                                          <p:spTgt spid="4"/>
+                                        </p:tgtEl>
+                                        <p:attrNameLst>
+                                          <p:attrName>style.visibility</p:attrName>
+                                        </p:attrNameLst>
+                                      </p:cBhvr>
+                                      <p:to>
+                                        <p:strVal val="hidden"/>
+                                      </p:to>
+                                    </p:set>
+                                  </p:childTnLst>
+                                </p:cTn>
+                              </p:par>
+                            </p:childTnLst>
+                          </p:cTn>
+                        </p:par>
+                        <p:par>
+                          <p:cTn id="13" fill="hold">
+                            <p:stCondLst>
+                              <p:cond delay="1600"/>
+                            </p:stCondLst>
+                            <p:childTnLst>
+                              <p:par>
+                                <p:cTn id="14" presetID="26" presetClass="exit" presetSubtype="0" fill="hold" grpId="0" nodeType="afterEffect">
+                                  <p:stCondLst>
+                                    <p:cond delay="0"/>
+                                  </p:stCondLst>
+                                  <p:childTnLst>
+                                    <p:animEffect transition="out" filter="wipe(down)">
+                                      <p:cBhvr>
+                                        <p:cTn id="15" dur="72" accel="50000">
+                                          <p:stCondLst>
+                                            <p:cond delay="728"/>
+                                          </p:stCondLst>
+                                        </p:cTn>
+                                        <p:tgtEl>
+                                          <p:spTgt spid="5"/>
+                                        </p:tgtEl>
+                                      </p:cBhvr>
+                                    </p:animEffect>
+                                    <p:anim calcmode="lin" valueType="num">
+                                      <p:cBhvr>
+                                        <p:cTn id="16" dur="729" tmFilter="0,0; 0.14,0.31; 0.43,0.73; 0.71,0.91; 1.0,1.0">
+                                          <p:stCondLst>
+                                            <p:cond delay="0"/>
+                                          </p:stCondLst>
+                                        </p:cTn>
+                                        <p:tgtEl>
+                                          <p:spTgt spid="5"/>
+                                        </p:tgtEl>
+                                        <p:attrNameLst>
+                                          <p:attrName>ppt_x</p:attrName>
+                                        </p:attrNameLst>
+                                      </p:cBhvr>
+                                      <p:tavLst>
+                                        <p:tav tm="0">
+                                          <p:val>
+                                            <p:strVal val="ppt_x"/>
+                                          </p:val>
+                                        </p:tav>
+                                        <p:tav tm="100000">
+                                          <p:val>
+                                            <p:strVal val="#ppt_x+0.25"/>
+                                          </p:val>
+                                        </p:tav>
+                                      </p:tavLst>
+                                    </p:anim>
+                                    <p:anim calcmode="lin" valueType="num">
+                                      <p:cBhvr>
+                                        <p:cTn id="17" dur="71">
+                                          <p:stCondLst>
+                                            <p:cond delay="729"/>
+                                          </p:stCondLst>
+                                        </p:cTn>
+                                        <p:tgtEl>
+                                          <p:spTgt spid="5"/>
+                                        </p:tgtEl>
+                                        <p:attrNameLst>
+                                          <p:attrName>ppt_x</p:attrName>
+                                        </p:attrNameLst>
+                                      </p:cBhvr>
+                                      <p:tavLst>
+                                        <p:tav tm="0">
+                                          <p:val>
+                                            <p:strVal val="ppt_x"/>
+                                          </p:val>
+                                        </p:tav>
+                                        <p:tav tm="100000">
+                                          <p:val>
+                                            <p:strVal val="ppt_x"/>
+                                          </p:val>
+                                        </p:tav>
+                                      </p:tavLst>
+                                    </p:anim>
+                                    <p:anim calcmode="lin" valueType="num">
+                                      <p:cBhvr>
+                                        <p:cTn id="18" dur="266" tmFilter="0.0,0.0;0.25,0.07;0.50,0.2;0.75,0.467;1.0,1.0">
+                                          <p:stCondLst>
+                                            <p:cond delay="0"/>
+                                          </p:stCondLst>
+                                        </p:cTn>
+                                        <p:tgtEl>
+                                          <p:spTgt spid="5"/>
+                                        </p:tgtEl>
+                                        <p:attrNameLst>
+                                          <p:attrName>ppt_y</p:attrName>
+                                        </p:attrNameLst>
+                                      </p:cBhvr>
+                                      <p:tavLst>
+                                        <p:tav tm="0">
+                                          <p:val>
+                                            <p:strVal val="ppt_y"/>
+                                          </p:val>
+                                        </p:tav>
+                                        <p:tav tm="5000">
+                                          <p:val>
+                                            <p:strVal val="ppt_y+0.026"/>
+                                          </p:val>
+                                        </p:tav>
+                                        <p:tav tm="10000">
+                                          <p:val>
+                                            <p:strVal val="ppt_y+0.052"/>
+                                          </p:val>
+                                        </p:tav>
+                                        <p:tav tm="15000">
+                                          <p:val>
+                                            <p:strVal val="ppt_y+0.078"/>
+                                          </p:val>
+                                        </p:tav>
+                                        <p:tav tm="20000">
+                                          <p:val>
+                                            <p:strVal val="ppt_y+0.103"/>
+                                          </p:val>
+                                        </p:tav>
+                                        <p:tav tm="30000">
+                                          <p:val>
+                                            <p:strVal val="ppt_y+0.151"/>
+                                          </p:val>
+                                        </p:tav>
+                                        <p:tav tm="40000">
+                                          <p:val>
+                                            <p:strVal val="ppt_y+0.196"/>
+                                          </p:val>
+                                        </p:tav>
+                                        <p:tav tm="50000">
+                                          <p:val>
+                                            <p:strVal val="ppt_y+0.236"/>
+                                          </p:val>
+                                        </p:tav>
+                                        <p:tav tm="60000">
+                                          <p:val>
+                                            <p:strVal val="ppt_y+0.270"/>
+                                          </p:val>
+                                        </p:tav>
+                                        <p:tav tm="70000">
+                                          <p:val>
+                                            <p:strVal val="ppt_y+0.297"/>
+                                          </p:val>
+                                        </p:tav>
+                                        <p:tav tm="80000">
+                                          <p:val>
+                                            <p:strVal val="ppt_y+0.317"/>
+                                          </p:val>
+                                        </p:tav>
+                                        <p:tav tm="90000">
+                                          <p:val>
+                                            <p:strVal val="ppt_y+0.329"/>
+                                          </p:val>
+                                        </p:tav>
+                                        <p:tav tm="100000">
+                                          <p:val>
+                                            <p:strVal val="ppt_y+0.333"/>
+                                          </p:val>
+                                        </p:tav>
+                                      </p:tavLst>
+                                    </p:anim>
+                                    <p:anim calcmode="lin" valueType="num">
+                                      <p:cBhvr>
+                                        <p:cTn id="19" dur="266" tmFilter="0, 0; 0.125,0.2665; 0.25,0.4; 0.375,0.465; 0.5,0.5;  0.625,0.535; 0.75,0.6; 0.875,0.7335; 1,1">
+                                          <p:stCondLst>
+                                            <p:cond delay="266"/>
+                                          </p:stCondLst>
+                                        </p:cTn>
+                                        <p:tgtEl>
+                                          <p:spTgt spid="5"/>
+                                        </p:tgtEl>
+                                        <p:attrNameLst>
+                                          <p:attrName>ppt_y</p:attrName>
+                                        </p:attrNameLst>
+                                      </p:cBhvr>
+                                      <p:tavLst>
+                                        <p:tav tm="0">
+                                          <p:val>
+                                            <p:strVal val="ppt_y"/>
+                                          </p:val>
+                                        </p:tav>
+                                        <p:tav tm="10000">
+                                          <p:val>
+                                            <p:strVal val="ppt_y-0.034"/>
+                                          </p:val>
+                                        </p:tav>
+                                        <p:tav tm="20000">
+                                          <p:val>
+                                            <p:strVal val="ppt_y-0.065"/>
+                                          </p:val>
+                                        </p:tav>
+                                        <p:tav tm="30000">
+                                          <p:val>
+                                            <p:strVal val="ppt_y-0.090"/>
+                                          </p:val>
+                                        </p:tav>
+                                        <p:tav tm="40000">
+                                          <p:val>
+                                            <p:strVal val="ppt_y-0.106"/>
+                                          </p:val>
+                                        </p:tav>
+                                        <p:tav tm="50000">
+                                          <p:val>
+                                            <p:strVal val="ppt_y-0.111"/>
+                                          </p:val>
+                                        </p:tav>
+                                        <p:tav tm="60000">
+                                          <p:val>
+                                            <p:strVal val="ppt_y-0.106"/>
+                                          </p:val>
+                                        </p:tav>
+                                        <p:tav tm="70000">
+                                          <p:val>
+                                            <p:strVal val="ppt_y-0.090"/>
+                                          </p:val>
+                                        </p:tav>
+                                        <p:tav tm="80000">
+                                          <p:val>
+                                            <p:strVal val="ppt_y-0.065"/>
+                                          </p:val>
+                                        </p:tav>
+                                        <p:tav tm="90000">
+                                          <p:val>
+                                            <p:strVal val="ppt_y-0.034"/>
+                                          </p:val>
+                                        </p:tav>
+                                        <p:tav tm="100000">
+                                          <p:val>
+                                            <p:strVal val="ppt_y"/>
+                                          </p:val>
+                                        </p:tav>
+                                      </p:tavLst>
+                                    </p:anim>
+                                    <p:anim calcmode="lin" valueType="num">
+                                      <p:cBhvr>
+                                        <p:cTn id="20" dur="133" tmFilter="0, 0; 0.125,0.2665; 0.25,0.4; 0.375,0.465; 0.5,0.5;  0.625,0.535; 0.75,0.6; 0.875,0.7335; 1,1">
+                                          <p:stCondLst>
+                                            <p:cond delay="530"/>
+                                          </p:stCondLst>
+                                        </p:cTn>
+                                        <p:tgtEl>
+                                          <p:spTgt spid="5"/>
+                                        </p:tgtEl>
+                                        <p:attrNameLst>
+                                          <p:attrName>ppt_y</p:attrName>
+                                        </p:attrNameLst>
+                                      </p:cBhvr>
+                                      <p:tavLst>
+                                        <p:tav tm="0">
+                                          <p:val>
+                                            <p:strVal val="ppt_y"/>
+                                          </p:val>
+                                        </p:tav>
+                                        <p:tav tm="10000">
+                                          <p:val>
+                                            <p:strVal val="ppt_y-0.011"/>
+                                          </p:val>
+                                        </p:tav>
+                                        <p:tav tm="20000">
+                                          <p:val>
+                                            <p:strVal val="ppt_y-0.022"/>
+                                          </p:val>
+                                        </p:tav>
+                                        <p:tav tm="30000">
+                                          <p:val>
+                                            <p:strVal val="ppt_y-0.030"/>
+                                          </p:val>
+                                        </p:tav>
+                                        <p:tav tm="40000">
+                                          <p:val>
+                                            <p:strVal val="ppt_y-0.035"/>
+                                          </p:val>
+                                        </p:tav>
+                                        <p:tav tm="50000">
+                                          <p:val>
+                                            <p:strVal val="ppt_y-0.037"/>
+                                          </p:val>
+                                        </p:tav>
+                                        <p:tav tm="60000">
+                                          <p:val>
+                                            <p:strVal val="ppt_y-0.035"/>
+                                          </p:val>
+                                        </p:tav>
+                                        <p:tav tm="70000">
+                                          <p:val>
+                                            <p:strVal val="ppt_y-0.030"/>
+                                          </p:val>
+                                        </p:tav>
+                                        <p:tav tm="80000">
+                                          <p:val>
+                                            <p:strVal val="ppt_y-0.022"/>
+                                          </p:val>
+                                        </p:tav>
+                                        <p:tav tm="90000">
+                                          <p:val>
+                                            <p:strVal val="ppt_y-0.011"/>
+                                          </p:val>
+                                        </p:tav>
+                                        <p:tav tm="100000">
+                                          <p:val>
+                                            <p:strVal val="ppt_y"/>
+                                          </p:val>
+                                        </p:tav>
+                                      </p:tavLst>
+                                    </p:anim>
+                                    <p:anim calcmode="lin" valueType="num">
+                                      <p:cBhvr>
+                                        <p:cTn id="21" dur="66" tmFilter="0, 0; 0.125,0.2665; 0.25,0.4; 0.375,0.465; 0.5,0.5;  0.625,0.535; 0.75,0.6; 0.875,0.7335; 1,1">
+                                          <p:stCondLst>
+                                            <p:cond delay="662"/>
+                                          </p:stCondLst>
+                                        </p:cTn>
+                                        <p:tgtEl>
+                                          <p:spTgt spid="5"/>
+                                        </p:tgtEl>
+                                        <p:attrNameLst>
+                                          <p:attrName>ppt_y</p:attrName>
+                                        </p:attrNameLst>
+                                      </p:cBhvr>
+                                      <p:tavLst>
+                                        <p:tav tm="0">
+                                          <p:val>
+                                            <p:strVal val="ppt_y"/>
+                                          </p:val>
+                                        </p:tav>
+                                        <p:tav tm="10000">
+                                          <p:val>
+                                            <p:strVal val="ppt_y-0.004"/>
+                                          </p:val>
+                                        </p:tav>
+                                        <p:tav tm="20000">
+                                          <p:val>
+                                            <p:strVal val="ppt_y-0.007"/>
+                                          </p:val>
+                                        </p:tav>
+                                        <p:tav tm="30000">
+                                          <p:val>
+                                            <p:strVal val="ppt_y-0.010"/>
+                                          </p:val>
+                                        </p:tav>
+                                        <p:tav tm="40000">
+                                          <p:val>
+                                            <p:strVal val="ppt_y-0.012"/>
+                                          </p:val>
+                                        </p:tav>
+                                        <p:tav tm="50000">
+                                          <p:val>
+                                            <p:strVal val="ppt_y-0.0123"/>
+                                          </p:val>
+                                        </p:tav>
+                                        <p:tav tm="60000">
+                                          <p:val>
+                                            <p:strVal val="ppt_y-0.012"/>
+                                          </p:val>
+                                        </p:tav>
+                                        <p:tav tm="70000">
+                                          <p:val>
+                                            <p:strVal val="ppt_y-0.010"/>
+                                          </p:val>
+                                        </p:tav>
+                                        <p:tav tm="80000">
+                                          <p:val>
+                                            <p:strVal val="ppt_y-0.007"/>
+                                          </p:val>
+                                        </p:tav>
+                                        <p:tav tm="90000">
+                                          <p:val>
+                                            <p:strVal val="ppt_y-0.004"/>
+                                          </p:val>
+                                        </p:tav>
+                                        <p:tav tm="100000">
+                                          <p:val>
+                                            <p:strVal val="ppt_y"/>
+                                          </p:val>
+                                        </p:tav>
+                                      </p:tavLst>
+                                    </p:anim>
+                                    <p:anim calcmode="lin" valueType="num">
+                                      <p:cBhvr>
+                                        <p:cTn id="22" dur="72" accel="50000">
+                                          <p:stCondLst>
+                                            <p:cond delay="728"/>
+                                          </p:stCondLst>
+                                        </p:cTn>
+                                        <p:tgtEl>
+                                          <p:spTgt spid="5"/>
+                                        </p:tgtEl>
+                                        <p:attrNameLst>
+                                          <p:attrName>ppt_y</p:attrName>
+                                        </p:attrNameLst>
+                                      </p:cBhvr>
+                                      <p:tavLst>
+                                        <p:tav tm="0">
+                                          <p:val>
+                                            <p:strVal val="ppt_y"/>
+                                          </p:val>
+                                        </p:tav>
+                                        <p:tav tm="100000">
+                                          <p:val>
+                                            <p:strVal val="ppt_y+ppt_h"/>
+                                          </p:val>
+                                        </p:tav>
+                                      </p:tavLst>
+                                    </p:anim>
+                                    <p:animScale>
+                                      <p:cBhvr>
+                                        <p:cTn id="23" dur="10">
+                                          <p:stCondLst>
+                                            <p:cond delay="248"/>
+                                          </p:stCondLst>
+                                        </p:cTn>
+                                        <p:tgtEl>
+                                          <p:spTgt spid="5"/>
+                                        </p:tgtEl>
+                                      </p:cBhvr>
+                                      <p:to x="100000" y="60000"/>
+                                    </p:animScale>
+                                    <p:animScale>
+                                      <p:cBhvr>
+                                        <p:cTn id="24" dur="66" decel="50000">
+                                          <p:stCondLst>
+                                            <p:cond delay="258"/>
+                                          </p:stCondLst>
+                                        </p:cTn>
+                                        <p:tgtEl>
+                                          <p:spTgt spid="5"/>
+                                        </p:tgtEl>
+                                      </p:cBhvr>
+                                      <p:to x="100000" y="100000"/>
+                                    </p:animScale>
+                                    <p:animScale>
+                                      <p:cBhvr>
+                                        <p:cTn id="25" dur="10">
+                                          <p:stCondLst>
+                                            <p:cond delay="525"/>
+                                          </p:stCondLst>
+                                        </p:cTn>
+                                        <p:tgtEl>
+                                          <p:spTgt spid="5"/>
+                                        </p:tgtEl>
+                                      </p:cBhvr>
+                                      <p:to x="100000" y="80000"/>
+                                    </p:animScale>
+                                    <p:animScale>
+                                      <p:cBhvr>
+                                        <p:cTn id="26" dur="66" decel="50000">
+                                          <p:stCondLst>
+                                            <p:cond delay="535"/>
+                                          </p:stCondLst>
+                                        </p:cTn>
+                                        <p:tgtEl>
+                                          <p:spTgt spid="5"/>
+                                        </p:tgtEl>
+                                      </p:cBhvr>
+                                      <p:to x="100000" y="100000"/>
+                                    </p:animScale>
+                                    <p:animScale>
+                                      <p:cBhvr>
+                                        <p:cTn id="27" dur="10">
+                                          <p:stCondLst>
+                                            <p:cond delay="657"/>
+                                          </p:stCondLst>
+                                        </p:cTn>
+                                        <p:tgtEl>
+                                          <p:spTgt spid="5"/>
+                                        </p:tgtEl>
+                                      </p:cBhvr>
+                                      <p:to x="100000" y="90000"/>
+                                    </p:animScale>
+                                    <p:animScale>
+                                      <p:cBhvr>
+                                        <p:cTn id="28" dur="66" decel="50000">
+                                          <p:stCondLst>
+                                            <p:cond delay="667"/>
+                                          </p:stCondLst>
+                                        </p:cTn>
+                                        <p:tgtEl>
+                                          <p:spTgt spid="5"/>
+                                        </p:tgtEl>
+                                      </p:cBhvr>
+                                      <p:to x="100000" y="100000"/>
+                                    </p:animScale>
+                                    <p:animScale>
+                                      <p:cBhvr>
+                                        <p:cTn id="29" dur="10">
+                                          <p:stCondLst>
+                                            <p:cond delay="723"/>
+                                          </p:stCondLst>
+                                        </p:cTn>
+                                        <p:tgtEl>
+                                          <p:spTgt spid="5"/>
+                                        </p:tgtEl>
+                                      </p:cBhvr>
+                                      <p:to x="100000" y="95000"/>
+                                    </p:animScale>
+                                    <p:animScale>
+                                      <p:cBhvr>
+                                        <p:cTn id="30" dur="66" decel="50000">
+                                          <p:stCondLst>
+                                            <p:cond delay="734"/>
+                                          </p:stCondLst>
+                                        </p:cTn>
+                                        <p:tgtEl>
+                                          <p:spTgt spid="5"/>
+                                        </p:tgtEl>
+                                      </p:cBhvr>
+                                      <p:to x="100000" y="100000"/>
+                                    </p:animScale>
+                                    <p:set>
+                                      <p:cBhvr>
+                                        <p:cTn id="31" dur="1" fill="hold">
+                                          <p:stCondLst>
+                                            <p:cond delay="799"/>
+                                          </p:stCondLst>
+                                        </p:cTn>
+                                        <p:tgtEl>
+                                          <p:spTgt spid="5"/>
+                                        </p:tgtEl>
+                                        <p:attrNameLst>
+                                          <p:attrName>style.visibility</p:attrName>
+                                        </p:attrNameLst>
+                                      </p:cBhvr>
+                                      <p:to>
+                                        <p:strVal val="hidden"/>
+                                      </p:to>
+                                    </p:set>
+                                  </p:childTnLst>
+                                </p:cTn>
+                              </p:par>
+                            </p:childTnLst>
+                          </p:cTn>
+                        </p:par>
+                        <p:par>
+                          <p:cTn id="32" fill="hold">
+                            <p:stCondLst>
+                              <p:cond delay="2400"/>
+                            </p:stCondLst>
+                            <p:childTnLst>
+                              <p:par>
+                                <p:cTn id="33" presetID="28" presetClass="exit" presetSubtype="0" fill="hold" grpId="0" nodeType="afterEffect">
+                                  <p:stCondLst>
+                                    <p:cond delay="0"/>
+                                  </p:stCondLst>
+                                  <p:childTnLst>
+                                    <p:anim calcmode="lin" valueType="num">
+                                      <p:cBhvr>
+                                        <p:cTn id="34" dur="800"/>
+                                        <p:tgtEl>
+                                          <p:spTgt spid="6"/>
+                                        </p:tgtEl>
+                                        <p:attrNameLst>
+                                          <p:attrName>ppt_x</p:attrName>
+                                        </p:attrNameLst>
+                                      </p:cBhvr>
+                                      <p:tavLst>
+                                        <p:tav tm="0">
+                                          <p:val>
+                                            <p:strVal val="ppt_x"/>
+                                          </p:val>
+                                        </p:tav>
+                                        <p:tav tm="100000">
+                                          <p:val>
+                                            <p:strVal val="ppt_x"/>
+                                          </p:val>
+                                        </p:tav>
+                                      </p:tavLst>
+                                    </p:anim>
+                                    <p:anim calcmode="lin" valueType="num">
+                                      <p:cBhvr>
+                                        <p:cTn id="35" dur="800"/>
+                                        <p:tgtEl>
+                                          <p:spTgt spid="6"/>
+                                        </p:tgtEl>
+                                        <p:attrNameLst>
+                                          <p:attrName>ppt_y</p:attrName>
+                                        </p:attrNameLst>
+                                      </p:cBhvr>
+                                      <p:tavLst>
+                                        <p:tav tm="0">
+                                          <p:val>
+                                            <p:strVal val="ppt_y-1"/>
+                                          </p:val>
+                                        </p:tav>
+                                        <p:tav tm="100000">
+                                          <p:val>
+                                            <p:strVal val="ppt_y+1"/>
+                                          </p:val>
+                                        </p:tav>
+                                      </p:tavLst>
+                                    </p:anim>
+                                    <p:set>
+                                      <p:cBhvr>
+                                        <p:cTn id="36" dur="1" fill="hold">
+                                          <p:stCondLst>
+                                            <p:cond delay="799"/>
+                                          </p:stCondLst>
+                                        </p:cTn>
+                                        <p:tgtEl>
+                                          <p:spTgt spid="6"/>
+                                        </p:tgtEl>
+                                        <p:attrNameLst>
+                                          <p:attrName>style.visibility</p:attrName>
+                                        </p:attrNameLst>
+                                      </p:cBhvr>
+                                      <p:to>
+                                        <p:strVal val="hidden"/>
+                                      </p:to>
+                                    </p:set>
+                                  </p:childTnLst>
+                                </p:cTn>
+                              </p:par>
+                            </p:childTnLst>
+                          </p:cTn>
+                        </p:par>
+                        <p:par>
+                          <p:cTn id="37" fill="hold">
+                            <p:stCondLst>
+                              <p:cond delay="3200"/>
+                            </p:stCondLst>
+                            <p:childTnLst>
+                              <p:par>
+                                <p:cTn id="38" presetID="58" presetClass="exit" presetSubtype="0" decel="100000" fill="hold" grpId="0" nodeType="afterEffect">
+                                  <p:stCondLst>
+                                    <p:cond delay="0"/>
+                                  </p:stCondLst>
+                                  <p:childTnLst>
+                                    <p:anim calcmode="lin" valueType="num">
+                                      <p:cBhvr>
+                                        <p:cTn id="39" dur="800"/>
+                                        <p:tgtEl>
+                                          <p:spTgt spid="7"/>
+                                        </p:tgtEl>
+                                        <p:attrNameLst>
+                                          <p:attrName>ppt_w</p:attrName>
+                                        </p:attrNameLst>
+                                      </p:cBhvr>
+                                      <p:tavLst>
+                                        <p:tav tm="0">
+                                          <p:val>
+                                            <p:strVal val="ppt_w"/>
+                                          </p:val>
+                                        </p:tav>
+                                        <p:tav tm="100000">
+                                          <p:val>
+                                            <p:strVal val="ppt_w*2.5"/>
+                                          </p:val>
+                                        </p:tav>
+                                      </p:tavLst>
+                                    </p:anim>
+                                    <p:anim calcmode="lin" valueType="num">
+                                      <p:cBhvr>
+                                        <p:cTn id="40" dur="800"/>
+                                        <p:tgtEl>
+                                          <p:spTgt spid="7"/>
+                                        </p:tgtEl>
+                                        <p:attrNameLst>
+                                          <p:attrName>ppt_h</p:attrName>
+                                        </p:attrNameLst>
+                                      </p:cBhvr>
+                                      <p:tavLst>
+                                        <p:tav tm="0">
+                                          <p:val>
+                                            <p:strVal val="ppt_h"/>
+                                          </p:val>
+                                        </p:tav>
+                                        <p:tav tm="100000">
+                                          <p:val>
+                                            <p:strVal val="ppt_h*0.01"/>
+                                          </p:val>
+                                        </p:tav>
+                                      </p:tavLst>
+                                    </p:anim>
+                                    <p:anim calcmode="lin" valueType="num">
+                                      <p:cBhvr>
+                                        <p:cTn id="41" dur="800"/>
+                                        <p:tgtEl>
+                                          <p:spTgt spid="7"/>
+                                        </p:tgtEl>
+                                        <p:attrNameLst>
+                                          <p:attrName>ppt_x</p:attrName>
+                                        </p:attrNameLst>
+                                      </p:cBhvr>
+                                      <p:tavLst>
+                                        <p:tav tm="0">
+                                          <p:val>
+                                            <p:strVal val="ppt_x"/>
+                                          </p:val>
+                                        </p:tav>
+                                        <p:tav tm="100000">
+                                          <p:val>
+                                            <p:strVal val="ppt_x"/>
+                                          </p:val>
+                                        </p:tav>
+                                      </p:tavLst>
+                                    </p:anim>
+                                    <p:anim calcmode="lin" valueType="num">
+                                      <p:cBhvr>
+                                        <p:cTn id="42" dur="800"/>
+                                        <p:tgtEl>
+                                          <p:spTgt spid="7"/>
+                                        </p:tgtEl>
+                                        <p:attrNameLst>
+                                          <p:attrName>ppt_y</p:attrName>
+                                        </p:attrNameLst>
+                                      </p:cBhvr>
+                                      <p:tavLst>
+                                        <p:tav tm="0">
+                                          <p:val>
+                                            <p:strVal val="ppt_y"/>
+                                          </p:val>
+                                        </p:tav>
+                                        <p:tav tm="100000">
+                                          <p:val>
+                                            <p:strVal val="ppt_h+1"/>
+                                          </p:val>
+                                        </p:tav>
+                                      </p:tavLst>
+                                    </p:anim>
+                                    <p:animEffect transition="out" filter="fade">
+                                      <p:cBhvr>
+                                        <p:cTn id="43" dur="800"/>
+                                        <p:tgtEl>
+                                          <p:spTgt spid="7"/>
+                                        </p:tgtEl>
+                                      </p:cBhvr>
+                                    </p:animEffect>
+                                    <p:set>
+                                      <p:cBhvr>
+                                        <p:cTn id="44" dur="1" fill="hold">
+                                          <p:stCondLst>
+                                            <p:cond delay="799"/>
+                                          </p:stCondLst>
+                                        </p:cTn>
+                                        <p:tgtEl>
+                                          <p:spTgt spid="7"/>
+                                        </p:tgtEl>
+                                        <p:attrNameLst>
+                                          <p:attrName>style.visibility</p:attrName>
+                                        </p:attrNameLst>
+                                      </p:cBhvr>
+                                      <p:to>
+                                        <p:strVal val="hidden"/>
+                                      </p:to>
+                                    </p:set>
+                                  </p:childTnLst>
+                                </p:cTn>
+                              </p:par>
+                            </p:childTnLst>
+                          </p:cTn>
+                        </p:par>
+                        <p:par>
+                          <p:cTn id="45" fill="hold">
+                            <p:stCondLst>
+                              <p:cond delay="4000"/>
+                            </p:stCondLst>
+                            <p:childTnLst>
+                              <p:par>
+                                <p:cTn id="46" presetID="2" presetClass="exit" presetSubtype="4" fill="hold" grpId="0" nodeType="afterEffect">
+                                  <p:stCondLst>
+                                    <p:cond delay="0"/>
+                                  </p:stCondLst>
+                                  <p:childTnLst>
+                                    <p:anim calcmode="lin" valueType="num">
+                                      <p:cBhvr additive="base">
+                                        <p:cTn id="47" dur="800"/>
+                                        <p:tgtEl>
+                                          <p:spTgt spid="8"/>
+                                        </p:tgtEl>
+                                        <p:attrNameLst>
+                                          <p:attrName>ppt_x</p:attrName>
+                                        </p:attrNameLst>
+                                      </p:cBhvr>
+                                      <p:tavLst>
+                                        <p:tav tm="0">
+                                          <p:val>
+                                            <p:strVal val="ppt_x"/>
+                                          </p:val>
+                                        </p:tav>
+                                        <p:tav tm="100000">
+                                          <p:val>
+                                            <p:strVal val="ppt_x"/>
+                                          </p:val>
+                                        </p:tav>
+                                      </p:tavLst>
+                                    </p:anim>
+                                    <p:anim calcmode="lin" valueType="num">
+                                      <p:cBhvr additive="base">
+                                        <p:cTn id="48" dur="800"/>
+                                        <p:tgtEl>
+                                          <p:spTgt spid="8"/>
+                                        </p:tgtEl>
+                                        <p:attrNameLst>
+                                          <p:attrName>ppt_y</p:attrName>
+                                        </p:attrNameLst>
+                                      </p:cBhvr>
+                                      <p:tavLst>
+                                        <p:tav tm="0">
+                                          <p:val>
+                                            <p:strVal val="ppt_y"/>
+                                          </p:val>
+                                        </p:tav>
+                                        <p:tav tm="100000">
+                                          <p:val>
+                                            <p:strVal val="1+ppt_h/2"/>
+                                          </p:val>
+                                        </p:tav>
+                                      </p:tavLst>
+                                    </p:anim>
+                                    <p:set>
+                                      <p:cBhvr>
+                                        <p:cTn id="49" dur="1" fill="hold">
+                                          <p:stCondLst>
+                                            <p:cond delay="799"/>
+                                          </p:stCondLst>
+                                        </p:cTn>
+                                        <p:tgtEl>
+                                          <p:spTgt spid="8"/>
+                                        </p:tgtEl>
+                                        <p:attrNameLst>
+                                          <p:attrName>style.visibility</p:attrName>
+                                        </p:attrNameLst>
+                                      </p:cBhvr>
+                                      <p:to>
+                                        <p:strVal val="hidden"/>
+                                      </p:to>
+                                    </p:set>
+                                  </p:childTnLst>
+                                </p:cTn>
+                              </p:par>
+                            </p:childTnLst>
+                          </p:cTn>
+                        </p:par>
+                        <p:par>
+                          <p:cTn id="50" fill="hold">
+                            <p:stCondLst>
+                              <p:cond delay="4800"/>
+                            </p:stCondLst>
+                            <p:childTnLst>
+                              <p:par>
+                                <p:cTn id="51" presetID="22" presetClass="exit" presetSubtype="4" fill="hold" grpId="0" nodeType="afterEffect">
+                                  <p:stCondLst>
+                                    <p:cond delay="0"/>
+                                  </p:stCondLst>
+                                  <p:childTnLst>
+                                    <p:animEffect transition="out" filter="wipe(down)">
+                                      <p:cBhvr>
+                                        <p:cTn id="52" dur="800"/>
+                                        <p:tgtEl>
+                                          <p:spTgt spid="9"/>
+                                        </p:tgtEl>
+                                      </p:cBhvr>
+                                    </p:animEffect>
+                                    <p:set>
+                                      <p:cBhvr>
+                                        <p:cTn id="53" dur="1" fill="hold">
+                                          <p:stCondLst>
+                                            <p:cond delay="799"/>
+                                          </p:stCondLst>
+                                        </p:cTn>
+                                        <p:tgtEl>
+                                          <p:spTgt spid="9"/>
+                                        </p:tgtEl>
+                                        <p:attrNameLst>
+                                          <p:attrName>style.visibility</p:attrName>
+                                        </p:attrNameLst>
+                                      </p:cBhvr>
+                                      <p:to>
+                                        <p:strVal val="hidden"/>
+                                      </p:to>
+                                    </p:set>
+                                  </p:childTnLst>
+                                </p:cTn>
+                              </p:par>
+                            </p:childTnLst>
+                          </p:cTn>
+                        </p:par>
+                        <p:par>
+                          <p:cTn id="54" fill="hold">
+                            <p:stCondLst>
+                              <p:cond delay="5600"/>
+                            </p:stCondLst>
+                            <p:childTnLst>
+                              <p:par>
+                                <p:cTn id="55" presetID="21" presetClass="exit" presetSubtype="1" fill="hold" grpId="0" nodeType="afterEffect">
+                                  <p:stCondLst>
+                                    <p:cond delay="0"/>
+                                  </p:stCondLst>
+                                  <p:childTnLst>
+                                    <p:animEffect transition="out" filter="wheel(1)">
+                                      <p:cBhvr>
+                                        <p:cTn id="56" dur="800"/>
+                                        <p:tgtEl>
+                                          <p:spTgt spid="10"/>
+                                        </p:tgtEl>
+                                      </p:cBhvr>
+                                    </p:animEffect>
+                                    <p:set>
+                                      <p:cBhvr>
+                                        <p:cTn id="57" dur="1" fill="hold">
+                                          <p:stCondLst>
+                                            <p:cond delay="799"/>
+                                          </p:stCondLst>
+                                        </p:cTn>
+                                        <p:tgtEl>
+                                          <p:spTgt spid="10"/>
+                                        </p:tgtEl>
+                                        <p:attrNameLst>
+                                          <p:attrName>style.visibility</p:attrName>
+                                        </p:attrNameLst>
+                                      </p:cBhvr>
+                                      <p:to>
+                                        <p:strVal val="hidden"/>
+                                      </p:to>
+                                    </p:set>
+                                  </p:childTnLst>
+                                </p:cTn>
+                              </p:par>
+                            </p:childTnLst>
+                          </p:cTn>
+                        </p:par>
+                      </p:childTnLst>
+                    </p:cTn>
+                  </p:par>
+                </p:childTnLst>
+              </p:cTn>
+              <p:prevCondLst>
+                <p:cond evt="onPrev" delay="0">
+                  <p:tgtEl>
+                    <p:sldTgt/>
+                  </p:tgtEl>
+                </p:cond>
+              </p:prevCondLst>
+              <p:nextCondLst>
+                <p:cond evt="onNext" delay="0">
+                  <p:tgtEl>
+                    <p:sldTgt/>
+                  </p:tgtEl>
+                </p:cond>
+              </p:nextCondLst>
+            </p:seq>
+          </p:childTnLst>
+        </p:cTn>
+      </p:par>
+    </p:tnLst>
+    <p:bldLst>
+      <p:bldP spid="3" grpId="0" animBg="1"/>
+      <p:bldP spid="4" grpId="0" animBg="1"/>
+      <p:bldP spid="5" grpId="0" animBg="1"/>
+      <p:bldP spid="6" grpId="0" animBg="1"/>
+      <p:bldP spid="7" grpId="0" animBg="1"/>
+      <p:bldP spid="8" grpId="0" animBg="1"/>
+      <p:bldP spid="9" grpId="0" animBg="1"/>
+      <p:bldP spid="10" grpId="0" animBg="1"/>
+    </p:bldLst>
+  </p:timing>
+</p:sld>
+</file>
+
+<file path=ppt/slides/slide12.xml><?xml version="1.0" encoding="utf-8"?>
+<p:sld xmlns:a="http://schemas.openxmlformats.org/drawingml/2006/main" xmlns:r="http://schemas.openxmlformats.org/officeDocument/2006/relationships" xmlns:p="http://schemas.openxmlformats.org/presentationml/2006/main">
+  <p:cSld>
+    <p:spTree>
+      <p:nvGrpSpPr>
+        <p:cNvPr id="1" name=""/>
+        <p:cNvGrpSpPr/>
+        <p:nvPr/>
+      </p:nvGrpSpPr>
+      <p:grpSpPr>
+        <a:xfrm>
+          <a:off x="0" y="0"/>
+          <a:ext cx="0" cy="0"/>
+          <a:chOff x="0" y="0"/>
+          <a:chExt cx="0" cy="0"/>
+        </a:xfrm>
+      </p:grpSpPr>
+      <p:sp>
+        <p:nvSpPr>
+          <p:cNvPr id="2" name="Titel 1">
+            <a:extLst>
+              <a:ext uri="{FF2B5EF4-FFF2-40B4-BE49-F238E27FC236}">
+                <a16:creationId xmlns:a16="http://schemas.microsoft.com/office/drawing/2014/main" id="{33A3DC36-211A-366E-B6E8-C577F1EBFDA9}"/>
+              </a:ext>
+            </a:extLst>
+          </p:cNvPr>
+          <p:cNvSpPr>
+            <a:spLocks noGrp="1"/>
+          </p:cNvSpPr>
+          <p:nvPr>
+            <p:ph type="title"/>
+          </p:nvPr>
+        </p:nvSpPr>
+        <p:spPr/>
+        <p:txBody>
+          <a:bodyPr/>
+          <a:lstStyle/>
+          <a:p>
+            <a:r>
+              <a:rPr lang="de-DE"/>
+              <a:t>Emphasis: shape</a:t>
+            </a:r>
+          </a:p>
+        </p:txBody>
+      </p:sp>
+      <p:sp>
+        <p:nvSpPr>
+          <p:cNvPr id="3" name="Rechteck 2">
+            <a:extLst>
+              <a:ext uri="{FF2B5EF4-FFF2-40B4-BE49-F238E27FC236}">
+                <a16:creationId xmlns:a16="http://schemas.microsoft.com/office/drawing/2014/main" id="{12395839-0CEA-7556-4F3B-D45E64D43BAD}"/>
+              </a:ext>
+            </a:extLst>
+          </p:cNvPr>
+          <p:cNvSpPr/>
+          <p:nvPr/>
+        </p:nvSpPr>
+        <p:spPr>
+          <a:xfrm>
+            <a:off x="508000" y="1778000"/>
+            <a:ext cx="2540000" cy="1905000"/>
+          </a:xfrm>
+          <a:prstGeom prst="rect">
+            <a:avLst/>
+          </a:prstGeom>
+          <a:solidFill>
+            <a:srgbClr val="4472C4"/>
+          </a:solidFill>
+          <a:ln w="50800">
+            <a:solidFill>
+              <a:srgbClr val="C00000"/>
+            </a:solidFill>
+          </a:ln>
+        </p:spPr>
+        <p:style>
+          <a:lnRef idx="2">
+            <a:schemeClr val="accent1">
+              <a:shade val="15000"/>
+            </a:schemeClr>
+          </a:lnRef>
+          <a:fillRef idx="1">
+            <a:schemeClr val="accent1"/>
+          </a:fillRef>
+          <a:effectRef idx="0">
+            <a:schemeClr val="accent1"/>
+          </a:effectRef>
+          <a:fontRef idx="minor">
+            <a:schemeClr val="lt1"/>
+          </a:fontRef>
+        </p:style>
+        <p:txBody>
+          <a:bodyPr rtlCol="0" anchor="ctr"/>
+          <a:lstStyle/>
+          <a:p>
+            <a:pPr algn="ctr"/>
+            <a:r>
+              <a:rPr lang="de-DE" sz="2400">
+                <a:solidFill>
+                  <a:srgbClr val="FFFFFF"/>
+                </a:solidFill>
+              </a:rPr>
+              <a:t>Blast</a:t>
+            </a:r>
+          </a:p>
+        </p:txBody>
+      </p:sp>
+      <p:sp>
+        <p:nvSpPr>
+          <p:cNvPr id="4" name="Rechteck 3">
+            <a:extLst>
+              <a:ext uri="{FF2B5EF4-FFF2-40B4-BE49-F238E27FC236}">
+                <a16:creationId xmlns:a16="http://schemas.microsoft.com/office/drawing/2014/main" id="{ED935400-F0A5-0077-985D-D57D1AE3AD56}"/>
+              </a:ext>
+            </a:extLst>
+          </p:cNvPr>
+          <p:cNvSpPr/>
+          <p:nvPr/>
+        </p:nvSpPr>
+        <p:spPr>
+          <a:xfrm>
+            <a:off x="3365500" y="1778000"/>
+            <a:ext cx="2540000" cy="1905000"/>
+          </a:xfrm>
+          <a:prstGeom prst="rect">
+            <a:avLst/>
+          </a:prstGeom>
+          <a:solidFill>
+            <a:srgbClr val="4472C4"/>
+          </a:solidFill>
+          <a:ln w="50800">
+            <a:solidFill>
+              <a:srgbClr val="C00000"/>
+            </a:solidFill>
+          </a:ln>
+        </p:spPr>
+        <p:style>
+          <a:lnRef idx="2">
+            <a:schemeClr val="accent1">
+              <a:shade val="15000"/>
+            </a:schemeClr>
+          </a:lnRef>
+          <a:fillRef idx="1">
+            <a:schemeClr val="accent1"/>
+          </a:fillRef>
+          <a:effectRef idx="0">
+            <a:schemeClr val="accent1"/>
+          </a:effectRef>
+          <a:fontRef idx="minor">
+            <a:schemeClr val="lt1"/>
+          </a:fontRef>
+        </p:style>
+        <p:txBody>
+          <a:bodyPr rtlCol="0" anchor="ctr"/>
+          <a:lstStyle/>
+          <a:p>
+            <a:pPr algn="ctr"/>
+            <a:r>
+              <a:rPr lang="de-DE" sz="2400">
+                <a:solidFill>
+                  <a:srgbClr val="FFFFFF"/>
+                </a:solidFill>
+              </a:rPr>
+              <a:t>Complementary 2</a:t>
+            </a:r>
+          </a:p>
+        </p:txBody>
+      </p:sp>
+      <p:sp>
+        <p:nvSpPr>
+          <p:cNvPr id="5" name="Rechteck 4">
+            <a:extLst>
+              <a:ext uri="{FF2B5EF4-FFF2-40B4-BE49-F238E27FC236}">
+                <a16:creationId xmlns:a16="http://schemas.microsoft.com/office/drawing/2014/main" id="{BE4C8EE1-2215-8209-59E3-DD917B015E19}"/>
+              </a:ext>
+            </a:extLst>
+          </p:cNvPr>
+          <p:cNvSpPr/>
+          <p:nvPr/>
+        </p:nvSpPr>
+        <p:spPr>
+          <a:xfrm>
+            <a:off x="6223000" y="1778000"/>
+            <a:ext cx="2540000" cy="1905000"/>
+          </a:xfrm>
+          <a:prstGeom prst="rect">
+            <a:avLst/>
+          </a:prstGeom>
+          <a:solidFill>
+            <a:srgbClr val="4472C4"/>
+          </a:solidFill>
+          <a:ln w="50800">
+            <a:solidFill>
+              <a:srgbClr val="C00000"/>
+            </a:solidFill>
+          </a:ln>
+        </p:spPr>
+        <p:style>
+          <a:lnRef idx="2">
+            <a:schemeClr val="accent1">
+              <a:shade val="15000"/>
+            </a:schemeClr>
+          </a:lnRef>
+          <a:fillRef idx="1">
+            <a:schemeClr val="accent1"/>
+          </a:fillRef>
+          <a:effectRef idx="0">
+            <a:schemeClr val="accent1"/>
+          </a:effectRef>
+          <a:fontRef idx="minor">
+            <a:schemeClr val="lt1"/>
+          </a:fontRef>
+        </p:style>
+        <p:txBody>
+          <a:bodyPr rtlCol="0" anchor="ctr"/>
+          <a:lstStyle/>
+          <a:p>
+            <a:pPr algn="ctr"/>
+            <a:r>
+              <a:rPr lang="de-DE" sz="2400">
+                <a:solidFill>
+                  <a:srgbClr val="FFFFFF"/>
+                </a:solidFill>
+              </a:rPr>
+              <a:t>Spin</a:t>
+            </a:r>
+          </a:p>
+        </p:txBody>
+      </p:sp>
+      <p:sp>
+        <p:nvSpPr>
+          <p:cNvPr id="6" name="Rechteck 5">
+            <a:extLst>
+              <a:ext uri="{FF2B5EF4-FFF2-40B4-BE49-F238E27FC236}">
+                <a16:creationId xmlns:a16="http://schemas.microsoft.com/office/drawing/2014/main" id="{4BC8C589-D151-2A86-8BA7-92D4E64A7DC6}"/>
+              </a:ext>
+            </a:extLst>
+          </p:cNvPr>
+          <p:cNvSpPr/>
+          <p:nvPr/>
+        </p:nvSpPr>
+        <p:spPr>
+          <a:xfrm>
+            <a:off x="9080500" y="1778000"/>
+            <a:ext cx="2540000" cy="1905000"/>
+          </a:xfrm>
+          <a:prstGeom prst="rect">
+            <a:avLst/>
+          </a:prstGeom>
+          <a:solidFill>
+            <a:srgbClr val="4472C4"/>
+          </a:solidFill>
+          <a:ln w="50800">
+            <a:solidFill>
+              <a:srgbClr val="C00000"/>
+            </a:solidFill>
+          </a:ln>
+        </p:spPr>
+        <p:style>
+          <a:lnRef idx="2">
+            <a:schemeClr val="accent1">
+              <a:shade val="15000"/>
+            </a:schemeClr>
+          </a:lnRef>
+          <a:fillRef idx="1">
+            <a:schemeClr val="accent1"/>
+          </a:fillRef>
+          <a:effectRef idx="0">
+            <a:schemeClr val="accent1"/>
+          </a:effectRef>
+          <a:fontRef idx="minor">
+            <a:schemeClr val="lt1"/>
+          </a:fontRef>
+        </p:style>
+        <p:txBody>
+          <a:bodyPr rtlCol="0" anchor="ctr"/>
+          <a:lstStyle/>
+          <a:p>
+            <a:pPr algn="ctr"/>
+            <a:r>
+              <a:rPr lang="de-DE" sz="2400">
+                <a:solidFill>
+                  <a:srgbClr val="FFFFFF"/>
+                </a:solidFill>
+              </a:rPr>
+              <a:t>Grow shrink</a:t>
+            </a:r>
+          </a:p>
+        </p:txBody>
+      </p:sp>
+      <p:sp>
+        <p:nvSpPr>
+          <p:cNvPr id="7" name="Rechteck 6">
+            <a:extLst>
+              <a:ext uri="{FF2B5EF4-FFF2-40B4-BE49-F238E27FC236}">
+                <a16:creationId xmlns:a16="http://schemas.microsoft.com/office/drawing/2014/main" id="{B68FC873-D65D-80FA-CA65-48992522AC4E}"/>
+              </a:ext>
+            </a:extLst>
+          </p:cNvPr>
+          <p:cNvSpPr/>
+          <p:nvPr/>
+        </p:nvSpPr>
+        <p:spPr>
+          <a:xfrm>
+            <a:off x="508000" y="4191000"/>
+            <a:ext cx="2540000" cy="1905000"/>
+          </a:xfrm>
+          <a:prstGeom prst="rect">
+            <a:avLst/>
+          </a:prstGeom>
+          <a:solidFill>
+            <a:srgbClr val="4472C4"/>
+          </a:solidFill>
+          <a:ln w="50800">
+            <a:solidFill>
+              <a:srgbClr val="C00000"/>
+            </a:solidFill>
+          </a:ln>
+        </p:spPr>
+        <p:style>
+          <a:lnRef idx="2">
+            <a:schemeClr val="accent1">
+              <a:shade val="15000"/>
+            </a:schemeClr>
+          </a:lnRef>
+          <a:fillRef idx="1">
+            <a:schemeClr val="accent1"/>
+          </a:fillRef>
+          <a:effectRef idx="0">
+            <a:schemeClr val="accent1"/>
+          </a:effectRef>
+          <a:fontRef idx="minor">
+            <a:schemeClr val="lt1"/>
+          </a:fontRef>
+        </p:style>
+        <p:txBody>
+          <a:bodyPr rtlCol="0" anchor="ctr"/>
+          <a:lstStyle/>
+          <a:p>
+            <a:pPr algn="ctr"/>
+            <a:r>
+              <a:rPr lang="de-DE" sz="2400">
+                <a:solidFill>
+                  <a:srgbClr val="FFFFFF"/>
+                </a:solidFill>
+              </a:rPr>
+              <a:t>Transparency</a:t>
+            </a:r>
+          </a:p>
+        </p:txBody>
+      </p:sp>
+    </p:spTree>
+    <p:extLst>
+      <p:ext uri="{BB962C8B-B14F-4D97-AF65-F5344CB8AC3E}">
+        <p14:creationId xmlns:p14="http://schemas.microsoft.com/office/powerpoint/2010/main" val="1802887016"/>
+      </p:ext>
+    </p:extLst>
+  </p:cSld>
+  <p:clrMapOvr>
+    <a:masterClrMapping/>
+  </p:clrMapOvr>
+  <p:timing>
+    <p:tnLst>
+      <p:par>
+        <p:cTn id="1" dur="indefinite" restart="never" nodeType="tmRoot">
+          <p:childTnLst>
+            <p:seq concurrent="1" nextAc="seek">
+              <p:cTn id="2" dur="indefinite" nodeType="mainSeq">
+                <p:childTnLst>
+                  <p:par>
+                    <p:cTn id="3" fill="hold">
+                      <p:stCondLst>
+                        <p:cond delay="indefinite"/>
+                      </p:stCondLst>
+                      <p:childTnLst>
+                        <p:par>
+                          <p:cTn id="4" fill="hold">
+                            <p:stCondLst>
+                              <p:cond delay="0"/>
+                            </p:stCondLst>
+                            <p:childTnLst>
+                              <p:par>
+                                <p:cTn id="5" presetID="14" presetClass="emph" presetSubtype="0" fill="hold" grpId="0" nodeType="clickEffect">
+                                  <p:stCondLst>
+                                    <p:cond delay="0"/>
+                                  </p:stCondLst>
+                                  <p:childTnLst>
+                                    <p:animClr clrSpc="rgb" dir="cw">
+                                      <p:cBhvr override="childStyle">
+                                        <p:cTn id="6" dur="760" fill="hold">
+                                          <p:stCondLst>
+                                            <p:cond delay="40"/>
+                                          </p:stCondLst>
+                                        </p:cTn>
+                                        <p:tgtEl>
+                                          <p:spTgt spid="3"/>
+                                        </p:tgtEl>
+                                        <p:attrNameLst>
+                                          <p:attrName>style.color</p:attrName>
+                                        </p:attrNameLst>
+                                      </p:cBhvr>
+                                      <p:to>
+                                        <a:schemeClr val="accent2"/>
+                                      </p:to>
+                                    </p:animClr>
+                                    <p:animClr clrSpc="rgb" dir="cw">
+                                      <p:cBhvr>
+                                        <p:cTn id="7" dur="760" fill="hold">
+                                          <p:stCondLst>
+                                            <p:cond delay="40"/>
+                                          </p:stCondLst>
+                                        </p:cTn>
+                                        <p:tgtEl>
+                                          <p:spTgt spid="3"/>
+                                        </p:tgtEl>
+                                        <p:attrNameLst>
+                                          <p:attrName>fillColor</p:attrName>
+                                        </p:attrNameLst>
+                                      </p:cBhvr>
+                                      <p:to>
+                                        <a:schemeClr val="accent2"/>
+                                      </p:to>
+                                    </p:animClr>
+                                    <p:set>
+                                      <p:cBhvr>
+                                        <p:cTn id="8" dur="760" fill="hold">
+                                          <p:stCondLst>
+                                            <p:cond delay="40"/>
+                                          </p:stCondLst>
+                                        </p:cTn>
+                                        <p:tgtEl>
+                                          <p:spTgt spid="3"/>
+                                        </p:tgtEl>
+                                        <p:attrNameLst>
+                                          <p:attrName>fill.type</p:attrName>
+                                        </p:attrNameLst>
+                                      </p:cBhvr>
+                                      <p:to>
+                                        <p:strVal val="solid"/>
+                                      </p:to>
+                                    </p:set>
+                                    <p:set>
+                                      <p:cBhvr>
+                                        <p:cTn id="9" dur="760" fill="hold">
+                                          <p:stCondLst>
+                                            <p:cond delay="40"/>
+                                          </p:stCondLst>
+                                        </p:cTn>
+                                        <p:tgtEl>
+                                          <p:spTgt spid="3"/>
+                                        </p:tgtEl>
+                                        <p:attrNameLst>
+                                          <p:attrName>fill.on</p:attrName>
+                                        </p:attrNameLst>
+                                      </p:cBhvr>
+                                      <p:to>
+                                        <p:strVal val="true"/>
+                                      </p:to>
+                                    </p:set>
+                                    <p:animScale>
+                                      <p:cBhvr>
+                                        <p:cTn id="10" dur="80" fill="hold">
+                                          <p:stCondLst>
+                                            <p:cond delay="0"/>
+                                          </p:stCondLst>
+                                        </p:cTn>
+                                        <p:tgtEl>
+                                          <p:spTgt spid="3"/>
+                                        </p:tgtEl>
+                                      </p:cBhvr>
+                                      <p:from x="100000" y="100000"/>
+                                      <p:to x="100000" y="5000"/>
+                                    </p:animScale>
+                                    <p:animScale>
+                                      <p:cBhvr>
+                                        <p:cTn id="11" dur="80" fill="hold">
+                                          <p:stCondLst>
+                                            <p:cond delay="80"/>
+                                          </p:stCondLst>
+                                        </p:cTn>
+                                        <p:tgtEl>
+                                          <p:spTgt spid="3"/>
+                                        </p:tgtEl>
+                                      </p:cBhvr>
+                                      <p:from x="100000" y="5000"/>
+                                      <p:to x="120000" y="150000"/>
+                                    </p:animScale>
+                                    <p:animScale>
+                                      <p:cBhvr>
+                                        <p:cTn id="12" dur="240" fill="hold">
+                                          <p:stCondLst>
+                                            <p:cond delay="560"/>
+                                          </p:stCondLst>
+                                        </p:cTn>
+                                        <p:tgtEl>
+                                          <p:spTgt spid="3"/>
+                                        </p:tgtEl>
+                                      </p:cBhvr>
+                                      <p:to x="120000" y="150000"/>
+                                    </p:animScale>
+                                  </p:childTnLst>
+                                </p:cTn>
+                              </p:par>
+                            </p:childTnLst>
+                          </p:cTn>
+                        </p:par>
+                        <p:par>
+                          <p:cTn id="13" fill="hold">
+                            <p:stCondLst>
+                              <p:cond delay="800"/>
+                            </p:stCondLst>
+                            <p:childTnLst>
+                              <p:par>
+                                <p:cTn id="14" presetID="22" presetClass="emph" presetSubtype="0" fill="hold" grpId="0" nodeType="afterEffect">
+                                  <p:stCondLst>
+                                    <p:cond delay="0"/>
+                                  </p:stCondLst>
+                                  <p:childTnLst>
+                                    <p:animClr clrSpc="hsl" dir="cw">
+                                      <p:cBhvr override="childStyle">
+                                        <p:cTn id="15" dur="800" fill="hold"/>
+                                        <p:tgtEl>
+                                          <p:spTgt spid="4"/>
+                                        </p:tgtEl>
+                                        <p:attrNameLst>
+                                          <p:attrName>style.color</p:attrName>
+                                        </p:attrNameLst>
+                                      </p:cBhvr>
+                                      <p:by>
+                                        <p:hsl h="-7200000" s="0" l="0"/>
+                                      </p:by>
+                                    </p:animClr>
+                                    <p:animClr clrSpc="hsl" dir="cw">
+                                      <p:cBhvr>
+                                        <p:cTn id="16" dur="800" fill="hold"/>
+                                        <p:tgtEl>
+                                          <p:spTgt spid="4"/>
+                                        </p:tgtEl>
+                                        <p:attrNameLst>
+                                          <p:attrName>fillcolor</p:attrName>
+                                        </p:attrNameLst>
+                                      </p:cBhvr>
+                                      <p:by>
+                                        <p:hsl h="-7200000" s="0" l="0"/>
+                                      </p:by>
+                                    </p:animClr>
+                                    <p:animClr clrSpc="hsl" dir="cw">
+                                      <p:cBhvr>
+                                        <p:cTn id="17" dur="800" fill="hold"/>
+                                        <p:tgtEl>
+                                          <p:spTgt spid="4"/>
+                                        </p:tgtEl>
+                                        <p:attrNameLst>
+                                          <p:attrName>stroke.color</p:attrName>
+                                        </p:attrNameLst>
+                                      </p:cBhvr>
+                                      <p:by>
+                                        <p:hsl h="-7200000" s="0" l="0"/>
+                                      </p:by>
+                                    </p:animClr>
+                                    <p:set>
+                                      <p:cBhvr>
+                                        <p:cTn id="18" dur="800" fill="hold"/>
+                                        <p:tgtEl>
+                                          <p:spTgt spid="4"/>
+                                        </p:tgtEl>
+                                        <p:attrNameLst>
+                                          <p:attrName>fill.type</p:attrName>
+                                        </p:attrNameLst>
+                                      </p:cBhvr>
+                                      <p:to>
+                                        <p:strVal val="solid"/>
+                                      </p:to>
+                                    </p:set>
+                                  </p:childTnLst>
+                                </p:cTn>
+                              </p:par>
+                            </p:childTnLst>
+                          </p:cTn>
+                        </p:par>
+                        <p:par>
+                          <p:cTn id="19" fill="hold">
+                            <p:stCondLst>
+                              <p:cond delay="1600"/>
+                            </p:stCondLst>
+                            <p:childTnLst>
+                              <p:par>
+                                <p:cTn id="20" presetID="8" presetClass="emph" presetSubtype="0" fill="hold" grpId="0" nodeType="afterEffect">
+                                  <p:stCondLst>
+                                    <p:cond delay="0"/>
+                                  </p:stCondLst>
+                                  <p:childTnLst>
+                                    <p:animRot by="21600000">
+                                      <p:cBhvr>
+                                        <p:cTn id="21" dur="800" fill="hold"/>
+                                        <p:tgtEl>
+                                          <p:spTgt spid="5"/>
+                                        </p:tgtEl>
+                                        <p:attrNameLst>
+                                          <p:attrName>r</p:attrName>
+                                        </p:attrNameLst>
+                                      </p:cBhvr>
+                                    </p:animRot>
+                                  </p:childTnLst>
+                                </p:cTn>
+                              </p:par>
+                            </p:childTnLst>
+                          </p:cTn>
+                        </p:par>
+                        <p:par>
+                          <p:cTn id="22" fill="hold">
+                            <p:stCondLst>
+                              <p:cond delay="2400"/>
+                            </p:stCondLst>
+                            <p:childTnLst>
+                              <p:par>
+                                <p:cTn id="23" presetID="6" presetClass="emph" presetSubtype="0" fill="hold" grpId="0" nodeType="afterEffect">
+                                  <p:stCondLst>
+                                    <p:cond delay="0"/>
+                                  </p:stCondLst>
+                                  <p:childTnLst>
+                                    <p:animScale>
+                                      <p:cBhvr>
+                                        <p:cTn id="24" dur="800" fill="hold"/>
+                                        <p:tgtEl>
+                                          <p:spTgt spid="6"/>
+                                        </p:tgtEl>
+                                      </p:cBhvr>
+                                      <p:by x="150000" y="150000"/>
+                                    </p:animScale>
+                                  </p:childTnLst>
+                                </p:cTn>
+                              </p:par>
+                            </p:childTnLst>
+                          </p:cTn>
+                        </p:par>
+                        <p:par>
+                          <p:cTn id="25" fill="hold">
+                            <p:stCondLst>
+                              <p:cond delay="3200"/>
+                            </p:stCondLst>
+                            <p:childTnLst>
+                              <p:par>
+                                <p:cTn id="26" presetID="9" presetClass="emph" presetSubtype="0" grpId="0" nodeType="afterEffect">
+                                  <p:stCondLst>
+                                    <p:cond delay="0"/>
+                                  </p:stCondLst>
+                                  <p:childTnLst>
+                                    <p:set>
+                                      <p:cBhvr>
+                                        <p:cTn id="27" dur="800"/>
+                                        <p:tgtEl>
+                                          <p:spTgt spid="7"/>
+                                        </p:tgtEl>
+                                        <p:attrNameLst>
+                                          <p:attrName>style.opacity</p:attrName>
+                                        </p:attrNameLst>
+                                      </p:cBhvr>
+                                      <p:to>
+                                        <p:strVal val="0.5"/>
+                                      </p:to>
+                                    </p:set>
+                                    <p:animEffect filter="image" prLst="opacity: 0.5">
+                                      <p:cBhvr rctx="IE">
+                                        <p:cTn id="28" dur="800"/>
+                                        <p:tgtEl>
+                                          <p:spTgt spid="7"/>
+                                        </p:tgtEl>
+                                      </p:cBhvr>
+                                    </p:animEffect>
+                                  </p:childTnLst>
+                                </p:cTn>
+                              </p:par>
+                            </p:childTnLst>
+                          </p:cTn>
+                        </p:par>
+                      </p:childTnLst>
+                    </p:cTn>
+                  </p:par>
+                </p:childTnLst>
+              </p:cTn>
+              <p:prevCondLst>
+                <p:cond evt="onPrev" delay="0">
+                  <p:tgtEl>
+                    <p:sldTgt/>
+                  </p:tgtEl>
+                </p:cond>
+              </p:prevCondLst>
+              <p:nextCondLst>
+                <p:cond evt="onNext" delay="0">
+                  <p:tgtEl>
+                    <p:sldTgt/>
+                  </p:tgtEl>
+                </p:cond>
+              </p:nextCondLst>
+            </p:seq>
+          </p:childTnLst>
+        </p:cTn>
+      </p:par>
+    </p:tnLst>
+    <p:bldLst>
+      <p:bldP spid="3" grpId="0" animBg="1"/>
+      <p:bldP spid="4" grpId="0" animBg="1"/>
+      <p:bldP spid="5" grpId="0" animBg="1"/>
+      <p:bldP spid="6" grpId="0" animBg="1"/>
+      <p:bldP spid="7" grpId="0" animBg="1"/>
+    </p:bldLst>
+  </p:timing>
+</p:sld>
+</file>
+
+<file path=ppt/slides/slide2.xml><?xml version="1.0" encoding="utf-8"?>
+<p:sld xmlns:a="http://schemas.openxmlformats.org/drawingml/2006/main" xmlns:r="http://schemas.openxmlformats.org/officeDocument/2006/relationships" xmlns:p="http://schemas.openxmlformats.org/presentationml/2006/main">
+  <p:cSld>
+    <p:spTree>
+      <p:nvGrpSpPr>
+        <p:cNvPr id="1" name=""/>
+        <p:cNvGrpSpPr/>
+        <p:nvPr/>
+      </p:nvGrpSpPr>
+      <p:grpSpPr>
+        <a:xfrm>
+          <a:off x="0" y="0"/>
+          <a:ext cx="0" cy="0"/>
+          <a:chOff x="0" y="0"/>
+          <a:chExt cx="0" cy="0"/>
+        </a:xfrm>
+      </p:grpSpPr>
+      <p:sp>
+        <p:nvSpPr>
+          <p:cNvPr id="2" name="Titel 1">
+            <a:extLst>
+              <a:ext uri="{FF2B5EF4-FFF2-40B4-BE49-F238E27FC236}">
+                <a16:creationId xmlns:a16="http://schemas.microsoft.com/office/drawing/2014/main" id="{4A4012C9-E081-79EA-CC32-5F91B344EC72}"/>
+              </a:ext>
+            </a:extLst>
+          </p:cNvPr>
+          <p:cNvSpPr>
+            <a:spLocks noGrp="1"/>
+          </p:cNvSpPr>
+          <p:nvPr>
+            <p:ph type="title"/>
+          </p:nvPr>
+        </p:nvSpPr>
+        <p:spPr/>
+        <p:txBody>
+          <a:bodyPr/>
+          <a:lstStyle/>
+          <a:p>
+            <a:r>
+              <a:rPr lang="de-DE"/>
+              <a:t>Entrance: splits and turns</a:t>
+            </a:r>
+          </a:p>
+        </p:txBody>
+      </p:sp>
+      <p:sp>
+        <p:nvSpPr>
+          <p:cNvPr id="3" name="Rechteck 2">
+            <a:extLst>
+              <a:ext uri="{FF2B5EF4-FFF2-40B4-BE49-F238E27FC236}">
+                <a16:creationId xmlns:a16="http://schemas.microsoft.com/office/drawing/2014/main" id="{5F235EBF-126E-D8DE-3360-7FE5613D78C5}"/>
+              </a:ext>
+            </a:extLst>
+          </p:cNvPr>
+          <p:cNvSpPr/>
+          <p:nvPr/>
+        </p:nvSpPr>
+        <p:spPr>
+          <a:xfrm>
+            <a:off x="508000" y="1778000"/>
+            <a:ext cx="2540000" cy="1905000"/>
+          </a:xfrm>
+          <a:prstGeom prst="rect">
+            <a:avLst/>
+          </a:prstGeom>
+          <a:solidFill>
+            <a:srgbClr val="4472C4"/>
+          </a:solidFill>
+          <a:ln w="50800">
+            <a:solidFill>
+              <a:srgbClr val="C00000"/>
+            </a:solidFill>
+          </a:ln>
+        </p:spPr>
+        <p:style>
+          <a:lnRef idx="2">
+            <a:schemeClr val="accent1">
+              <a:shade val="15000"/>
+            </a:schemeClr>
+          </a:lnRef>
+          <a:fillRef idx="1">
+            <a:schemeClr val="accent1"/>
+          </a:fillRef>
+          <a:effectRef idx="0">
+            <a:schemeClr val="accent1"/>
+          </a:effectRef>
+          <a:fontRef idx="minor">
+            <a:schemeClr val="lt1"/>
+          </a:fontRef>
+        </p:style>
+        <p:txBody>
+          <a:bodyPr rtlCol="0" anchor="ctr"/>
+          <a:lstStyle/>
+          <a:p>
+            <a:pPr algn="ctr"/>
+            <a:r>
+              <a:rPr lang="de-DE" sz="2400">
+                <a:solidFill>
+                  <a:srgbClr val="FFFFFF"/>
+                </a:solidFill>
+              </a:rPr>
+              <a:t>Peek</a:t>
+            </a:r>
+          </a:p>
+        </p:txBody>
+      </p:sp>
+      <p:sp>
+        <p:nvSpPr>
+          <p:cNvPr id="4" name="Rechteck 3">
+            <a:extLst>
+              <a:ext uri="{FF2B5EF4-FFF2-40B4-BE49-F238E27FC236}">
+                <a16:creationId xmlns:a16="http://schemas.microsoft.com/office/drawing/2014/main" id="{F57271EB-A9A0-C7B2-32E9-8F0FB5DA794E}"/>
+              </a:ext>
+            </a:extLst>
+          </p:cNvPr>
+          <p:cNvSpPr/>
+          <p:nvPr/>
+        </p:nvSpPr>
+        <p:spPr>
+          <a:xfrm>
+            <a:off x="3365500" y="1778000"/>
+            <a:ext cx="2540000" cy="1905000"/>
+          </a:xfrm>
+          <a:prstGeom prst="rect">
+            <a:avLst/>
+          </a:prstGeom>
+          <a:solidFill>
+            <a:srgbClr val="4472C4"/>
+          </a:solidFill>
+          <a:ln w="50800">
+            <a:solidFill>
+              <a:srgbClr val="C00000"/>
+            </a:solidFill>
+          </a:ln>
+        </p:spPr>
+        <p:style>
+          <a:lnRef idx="2">
+            <a:schemeClr val="accent1">
+              <a:shade val="15000"/>
+            </a:schemeClr>
+          </a:lnRef>
+          <a:fillRef idx="1">
+            <a:schemeClr val="accent1"/>
+          </a:fillRef>
+          <a:effectRef idx="0">
+            <a:schemeClr val="accent1"/>
+          </a:effectRef>
+          <a:fontRef idx="minor">
+            <a:schemeClr val="lt1"/>
+          </a:fontRef>
+        </p:style>
+        <p:txBody>
+          <a:bodyPr rtlCol="0" anchor="ctr"/>
+          <a:lstStyle/>
+          <a:p>
+            <a:pPr algn="ctr"/>
+            <a:r>
+              <a:rPr lang="de-DE" sz="2400">
+                <a:solidFill>
+                  <a:srgbClr val="FFFFFF"/>
+                </a:solidFill>
+              </a:rPr>
+              <a:t>Spiral</a:t>
+            </a:r>
+          </a:p>
+        </p:txBody>
+      </p:sp>
+      <p:sp>
+        <p:nvSpPr>
+          <p:cNvPr id="5" name="Rechteck 4">
+            <a:extLst>
+              <a:ext uri="{FF2B5EF4-FFF2-40B4-BE49-F238E27FC236}">
+                <a16:creationId xmlns:a16="http://schemas.microsoft.com/office/drawing/2014/main" id="{9CB86793-BB3B-8708-2C1A-7740A70B7C5E}"/>
+              </a:ext>
+            </a:extLst>
+          </p:cNvPr>
+          <p:cNvSpPr/>
+          <p:nvPr/>
+        </p:nvSpPr>
+        <p:spPr>
+          <a:xfrm>
+            <a:off x="6223000" y="1778000"/>
+            <a:ext cx="2540000" cy="1905000"/>
+          </a:xfrm>
+          <a:prstGeom prst="rect">
+            <a:avLst/>
+          </a:prstGeom>
+          <a:solidFill>
+            <a:srgbClr val="4472C4"/>
+          </a:solidFill>
+          <a:ln w="50800">
+            <a:solidFill>
+              <a:srgbClr val="C00000"/>
+            </a:solidFill>
+          </a:ln>
+        </p:spPr>
+        <p:style>
+          <a:lnRef idx="2">
+            <a:schemeClr val="accent1">
+              <a:shade val="15000"/>
+            </a:schemeClr>
+          </a:lnRef>
+          <a:fillRef idx="1">
+            <a:schemeClr val="accent1"/>
+          </a:fillRef>
+          <a:effectRef idx="0">
+            <a:schemeClr val="accent1"/>
+          </a:effectRef>
+          <a:fontRef idx="minor">
+            <a:schemeClr val="lt1"/>
+          </a:fontRef>
+        </p:style>
+        <p:txBody>
+          <a:bodyPr rtlCol="0" anchor="ctr"/>
+          <a:lstStyle/>
+          <a:p>
+            <a:pPr algn="ctr"/>
+            <a:r>
+              <a:rPr lang="de-DE" sz="2400">
+                <a:solidFill>
+                  <a:srgbClr val="FFFFFF"/>
+                </a:solidFill>
+              </a:rPr>
+              <a:t>Split</a:t>
+            </a:r>
+          </a:p>
+        </p:txBody>
+      </p:sp>
+      <p:sp>
+        <p:nvSpPr>
+          <p:cNvPr id="6" name="Rechteck 5">
+            <a:extLst>
+              <a:ext uri="{FF2B5EF4-FFF2-40B4-BE49-F238E27FC236}">
+                <a16:creationId xmlns:a16="http://schemas.microsoft.com/office/drawing/2014/main" id="{437B2FD1-7861-9E51-C180-B5F7BBC765E6}"/>
+              </a:ext>
+            </a:extLst>
+          </p:cNvPr>
+          <p:cNvSpPr/>
+          <p:nvPr/>
+        </p:nvSpPr>
+        <p:spPr>
+          <a:xfrm>
+            <a:off x="9080500" y="1778000"/>
+            <a:ext cx="2540000" cy="1905000"/>
+          </a:xfrm>
+          <a:prstGeom prst="rect">
+            <a:avLst/>
+          </a:prstGeom>
+          <a:solidFill>
+            <a:srgbClr val="4472C4"/>
+          </a:solidFill>
+          <a:ln w="50800">
+            <a:solidFill>
+              <a:srgbClr val="C00000"/>
+            </a:solidFill>
+          </a:ln>
+        </p:spPr>
+        <p:style>
+          <a:lnRef idx="2">
+            <a:schemeClr val="accent1">
+              <a:shade val="15000"/>
+            </a:schemeClr>
+          </a:lnRef>
+          <a:fillRef idx="1">
+            <a:schemeClr val="accent1"/>
+          </a:fillRef>
+          <a:effectRef idx="0">
+            <a:schemeClr val="accent1"/>
+          </a:effectRef>
+          <a:fontRef idx="minor">
+            <a:schemeClr val="lt1"/>
+          </a:fontRef>
+        </p:style>
+        <p:txBody>
+          <a:bodyPr rtlCol="0" anchor="ctr"/>
+          <a:lstStyle/>
+          <a:p>
+            <a:pPr algn="ctr"/>
+            <a:r>
+              <a:rPr lang="de-DE" sz="2400">
+                <a:solidFill>
+                  <a:srgbClr val="FFFFFF"/>
+                </a:solidFill>
+              </a:rPr>
+              <a:t>Stretch</a:t>
+            </a:r>
+          </a:p>
+        </p:txBody>
+      </p:sp>
+      <p:sp>
+        <p:nvSpPr>
+          <p:cNvPr id="7" name="Rechteck 6">
+            <a:extLst>
+              <a:ext uri="{FF2B5EF4-FFF2-40B4-BE49-F238E27FC236}">
+                <a16:creationId xmlns:a16="http://schemas.microsoft.com/office/drawing/2014/main" id="{68357759-57AC-6375-9F8C-D98A1C082DCD}"/>
+              </a:ext>
+            </a:extLst>
+          </p:cNvPr>
+          <p:cNvSpPr/>
+          <p:nvPr/>
+        </p:nvSpPr>
+        <p:spPr>
+          <a:xfrm>
+            <a:off x="508000" y="4191000"/>
+            <a:ext cx="2540000" cy="1905000"/>
+          </a:xfrm>
+          <a:prstGeom prst="rect">
+            <a:avLst/>
+          </a:prstGeom>
+          <a:solidFill>
+            <a:srgbClr val="4472C4"/>
+          </a:solidFill>
+          <a:ln w="50800">
+            <a:solidFill>
+              <a:srgbClr val="C00000"/>
+            </a:solidFill>
+          </a:ln>
+        </p:spPr>
+        <p:style>
+          <a:lnRef idx="2">
+            <a:schemeClr val="accent1">
+              <a:shade val="15000"/>
+            </a:schemeClr>
+          </a:lnRef>
+          <a:fillRef idx="1">
+            <a:schemeClr val="accent1"/>
+          </a:fillRef>
+          <a:effectRef idx="0">
+            <a:schemeClr val="accent1"/>
+          </a:effectRef>
+          <a:fontRef idx="minor">
+            <a:schemeClr val="lt1"/>
+          </a:fontRef>
+        </p:style>
+        <p:txBody>
+          <a:bodyPr rtlCol="0" anchor="ctr"/>
+          <a:lstStyle/>
+          <a:p>
+            <a:pPr algn="ctr"/>
+            <a:r>
+              <a:rPr lang="de-DE" sz="2400">
+                <a:solidFill>
+                  <a:srgbClr val="FFFFFF"/>
+                </a:solidFill>
+              </a:rPr>
+              <a:t>Strips</a:t>
+            </a:r>
+          </a:p>
+        </p:txBody>
+      </p:sp>
+      <p:sp>
+        <p:nvSpPr>
+          <p:cNvPr id="8" name="Rechteck 7">
+            <a:extLst>
+              <a:ext uri="{FF2B5EF4-FFF2-40B4-BE49-F238E27FC236}">
+                <a16:creationId xmlns:a16="http://schemas.microsoft.com/office/drawing/2014/main" id="{489F6701-1480-0AE0-95BF-B7C49C152540}"/>
+              </a:ext>
+            </a:extLst>
+          </p:cNvPr>
+          <p:cNvSpPr/>
+          <p:nvPr/>
+        </p:nvSpPr>
+        <p:spPr>
+          <a:xfrm>
+            <a:off x="3365500" y="4191000"/>
+            <a:ext cx="2540000" cy="1905000"/>
+          </a:xfrm>
+          <a:prstGeom prst="rect">
+            <a:avLst/>
+          </a:prstGeom>
+          <a:solidFill>
+            <a:srgbClr val="4472C4"/>
+          </a:solidFill>
+          <a:ln w="50800">
+            <a:solidFill>
+              <a:srgbClr val="C00000"/>
+            </a:solidFill>
+          </a:ln>
+        </p:spPr>
+        <p:style>
+          <a:lnRef idx="2">
+            <a:schemeClr val="accent1">
+              <a:shade val="15000"/>
+            </a:schemeClr>
+          </a:lnRef>
+          <a:fillRef idx="1">
+            <a:schemeClr val="accent1"/>
+          </a:fillRef>
+          <a:effectRef idx="0">
+            <a:schemeClr val="accent1"/>
+          </a:effectRef>
+          <a:fontRef idx="minor">
+            <a:schemeClr val="lt1"/>
+          </a:fontRef>
+        </p:style>
+        <p:txBody>
+          <a:bodyPr rtlCol="0" anchor="ctr"/>
+          <a:lstStyle/>
+          <a:p>
+            <a:pPr algn="ctr"/>
+            <a:r>
+              <a:rPr lang="de-DE" sz="2400">
+                <a:solidFill>
+                  <a:srgbClr val="FFFFFF"/>
+                </a:solidFill>
+              </a:rPr>
+              <a:t>Swivel</a:t>
+            </a:r>
+          </a:p>
+        </p:txBody>
+      </p:sp>
+      <p:sp>
+        <p:nvSpPr>
+          <p:cNvPr id="9" name="Rechteck 8">
+            <a:extLst>
+              <a:ext uri="{FF2B5EF4-FFF2-40B4-BE49-F238E27FC236}">
+                <a16:creationId xmlns:a16="http://schemas.microsoft.com/office/drawing/2014/main" id="{13227967-F025-8756-D69C-6E335E5CF34C}"/>
+              </a:ext>
+            </a:extLst>
+          </p:cNvPr>
+          <p:cNvSpPr/>
+          <p:nvPr/>
+        </p:nvSpPr>
+        <p:spPr>
+          <a:xfrm>
+            <a:off x="6223000" y="4191000"/>
+            <a:ext cx="2540000" cy="1905000"/>
+          </a:xfrm>
+          <a:prstGeom prst="rect">
+            <a:avLst/>
+          </a:prstGeom>
+          <a:solidFill>
+            <a:srgbClr val="4472C4"/>
+          </a:solidFill>
+          <a:ln w="50800">
+            <a:solidFill>
+              <a:srgbClr val="C00000"/>
+            </a:solidFill>
+          </a:ln>
+        </p:spPr>
+        <p:style>
+          <a:lnRef idx="2">
+            <a:schemeClr val="accent1">
+              <a:shade val="15000"/>
+            </a:schemeClr>
+          </a:lnRef>
+          <a:fillRef idx="1">
+            <a:schemeClr val="accent1"/>
+          </a:fillRef>
+          <a:effectRef idx="0">
+            <a:schemeClr val="accent1"/>
+          </a:effectRef>
+          <a:fontRef idx="minor">
+            <a:schemeClr val="lt1"/>
+          </a:fontRef>
+        </p:style>
+        <p:txBody>
+          <a:bodyPr rtlCol="0" anchor="ctr"/>
+          <a:lstStyle/>
+          <a:p>
+            <a:pPr algn="ctr"/>
+            <a:r>
+              <a:rPr lang="de-DE" sz="2400">
+                <a:solidFill>
+                  <a:srgbClr val="FFFFFF"/>
+                </a:solidFill>
+              </a:rPr>
+              <a:t>Wedge</a:t>
+            </a:r>
+          </a:p>
+        </p:txBody>
+      </p:sp>
+      <p:sp>
+        <p:nvSpPr>
+          <p:cNvPr id="10" name="Rechteck 9">
+            <a:extLst>
+              <a:ext uri="{FF2B5EF4-FFF2-40B4-BE49-F238E27FC236}">
+                <a16:creationId xmlns:a16="http://schemas.microsoft.com/office/drawing/2014/main" id="{F6B766E1-AD99-2AFC-EFFC-1BAC9FE02D3A}"/>
+              </a:ext>
+            </a:extLst>
+          </p:cNvPr>
+          <p:cNvSpPr/>
+          <p:nvPr/>
+        </p:nvSpPr>
+        <p:spPr>
+          <a:xfrm>
+            <a:off x="9080500" y="4191000"/>
+            <a:ext cx="2540000" cy="1905000"/>
+          </a:xfrm>
+          <a:prstGeom prst="rect">
+            <a:avLst/>
+          </a:prstGeom>
+          <a:solidFill>
+            <a:srgbClr val="4472C4"/>
+          </a:solidFill>
+          <a:ln w="50800">
+            <a:solidFill>
+              <a:srgbClr val="C00000"/>
+            </a:solidFill>
+          </a:ln>
+        </p:spPr>
+        <p:style>
+          <a:lnRef idx="2">
+            <a:schemeClr val="accent1">
+              <a:shade val="15000"/>
+            </a:schemeClr>
+          </a:lnRef>
+          <a:fillRef idx="1">
+            <a:schemeClr val="accent1"/>
+          </a:fillRef>
+          <a:effectRef idx="0">
+            <a:schemeClr val="accent1"/>
+          </a:effectRef>
+          <a:fontRef idx="minor">
+            <a:schemeClr val="lt1"/>
+          </a:fontRef>
+        </p:style>
+        <p:txBody>
+          <a:bodyPr rtlCol="0" anchor="ctr"/>
+          <a:lstStyle/>
+          <a:p>
+            <a:pPr algn="ctr"/>
+            <a:r>
+              <a:rPr lang="de-DE" sz="2400">
+                <a:solidFill>
+                  <a:srgbClr val="FFFFFF"/>
+                </a:solidFill>
+              </a:rPr>
+              <a:t>Wheel</a:t>
+            </a:r>
+          </a:p>
+        </p:txBody>
+      </p:sp>
+    </p:spTree>
+    <p:extLst>
+      <p:ext uri="{BB962C8B-B14F-4D97-AF65-F5344CB8AC3E}">
+        <p14:creationId xmlns:p14="http://schemas.microsoft.com/office/powerpoint/2010/main" val="212088696"/>
       </p:ext>
     </p:extLst>
   </p:cSld>
@@ -5410,7 +8759,7 @@
           <p:cNvPr id="2" name="Titel 1">
             <a:extLst>
               <a:ext uri="{FF2B5EF4-FFF2-40B4-BE49-F238E27FC236}">
-                <a16:creationId xmlns:a16="http://schemas.microsoft.com/office/drawing/2014/main" id="{22C515A3-1CF5-B752-2C72-9DAC21F4122A}"/>
+                <a16:creationId xmlns:a16="http://schemas.microsoft.com/office/drawing/2014/main" id="{9C9E072A-F208-2761-5E8A-C68E45B1BC2B}"/>
               </a:ext>
             </a:extLst>
           </p:cNvPr>
@@ -5438,7 +8787,7 @@
           <p:cNvPr id="3" name="Rechteck 2">
             <a:extLst>
               <a:ext uri="{FF2B5EF4-FFF2-40B4-BE49-F238E27FC236}">
-                <a16:creationId xmlns:a16="http://schemas.microsoft.com/office/drawing/2014/main" id="{CFDB61AB-1ACF-7FE0-1787-ADA5FD4D1CE4}"/>
+                <a16:creationId xmlns:a16="http://schemas.microsoft.com/office/drawing/2014/main" id="{8BCE85F0-87E2-3D15-B520-F0652F9984ED}"/>
               </a:ext>
             </a:extLst>
           </p:cNvPr>
@@ -5499,7 +8848,7 @@
           <p:cNvPr id="4" name="Rechteck 3">
             <a:extLst>
               <a:ext uri="{FF2B5EF4-FFF2-40B4-BE49-F238E27FC236}">
-                <a16:creationId xmlns:a16="http://schemas.microsoft.com/office/drawing/2014/main" id="{574E360E-47B4-5BA5-D145-5FACCDF6DC2C}"/>
+                <a16:creationId xmlns:a16="http://schemas.microsoft.com/office/drawing/2014/main" id="{9D61FF48-AE31-A767-5BAD-969E54B7E6B6}"/>
               </a:ext>
             </a:extLst>
           </p:cNvPr>
@@ -5560,7 +8909,7 @@
           <p:cNvPr id="5" name="Rechteck 4">
             <a:extLst>
               <a:ext uri="{FF2B5EF4-FFF2-40B4-BE49-F238E27FC236}">
-                <a16:creationId xmlns:a16="http://schemas.microsoft.com/office/drawing/2014/main" id="{B69D30D4-3EC0-265D-DBCB-5F277E22D3F1}"/>
+                <a16:creationId xmlns:a16="http://schemas.microsoft.com/office/drawing/2014/main" id="{607834C7-1635-347E-9224-6FE4D410AD32}"/>
               </a:ext>
             </a:extLst>
           </p:cNvPr>
@@ -5621,7 +8970,7 @@
           <p:cNvPr id="6" name="Rechteck 5">
             <a:extLst>
               <a:ext uri="{FF2B5EF4-FFF2-40B4-BE49-F238E27FC236}">
-                <a16:creationId xmlns:a16="http://schemas.microsoft.com/office/drawing/2014/main" id="{218D0E2E-617A-000C-A27F-CA1748595C54}"/>
+                <a16:creationId xmlns:a16="http://schemas.microsoft.com/office/drawing/2014/main" id="{AF89CA64-C392-3481-7C5C-25788F841775}"/>
               </a:ext>
             </a:extLst>
           </p:cNvPr>
@@ -5682,7 +9031,7 @@
           <p:cNvPr id="7" name="Rechteck 6">
             <a:extLst>
               <a:ext uri="{FF2B5EF4-FFF2-40B4-BE49-F238E27FC236}">
-                <a16:creationId xmlns:a16="http://schemas.microsoft.com/office/drawing/2014/main" id="{9ACA5801-47D8-472E-55CD-8735B02E9DAF}"/>
+                <a16:creationId xmlns:a16="http://schemas.microsoft.com/office/drawing/2014/main" id="{EB9C436C-48F0-35CD-B802-6DBFE1A2F35D}"/>
               </a:ext>
             </a:extLst>
           </p:cNvPr>
@@ -5743,7 +9092,7 @@
           <p:cNvPr id="8" name="Rechteck 7">
             <a:extLst>
               <a:ext uri="{FF2B5EF4-FFF2-40B4-BE49-F238E27FC236}">
-                <a16:creationId xmlns:a16="http://schemas.microsoft.com/office/drawing/2014/main" id="{CF5D9BEB-C519-1A70-2A11-E2EC3B8DAD65}"/>
+                <a16:creationId xmlns:a16="http://schemas.microsoft.com/office/drawing/2014/main" id="{1B480550-E862-EA18-85A5-EC21B0F9DF69}"/>
               </a:ext>
             </a:extLst>
           </p:cNvPr>
@@ -5804,7 +9153,7 @@
           <p:cNvPr id="9" name="Rechteck 8">
             <a:extLst>
               <a:ext uri="{FF2B5EF4-FFF2-40B4-BE49-F238E27FC236}">
-                <a16:creationId xmlns:a16="http://schemas.microsoft.com/office/drawing/2014/main" id="{81E3AB0D-CF76-57E6-04CC-8C8F67008203}"/>
+                <a16:creationId xmlns:a16="http://schemas.microsoft.com/office/drawing/2014/main" id="{EBA5793B-2BD3-C668-F9A7-F269D85A7712}"/>
               </a:ext>
             </a:extLst>
           </p:cNvPr>
@@ -5865,7 +9214,7 @@
           <p:cNvPr id="10" name="Rechteck 9">
             <a:extLst>
               <a:ext uri="{FF2B5EF4-FFF2-40B4-BE49-F238E27FC236}">
-                <a16:creationId xmlns:a16="http://schemas.microsoft.com/office/drawing/2014/main" id="{D61DA021-0281-0BBA-D7AF-9230DA7FE6BB}"/>
+                <a16:creationId xmlns:a16="http://schemas.microsoft.com/office/drawing/2014/main" id="{F41F6FBC-90C1-8702-7067-96AF839631B6}"/>
               </a:ext>
             </a:extLst>
           </p:cNvPr>
@@ -5924,7 +9273,7 @@
     </p:spTree>
     <p:extLst>
       <p:ext uri="{BB962C8B-B14F-4D97-AF65-F5344CB8AC3E}">
-        <p14:creationId xmlns:p14="http://schemas.microsoft.com/office/powerpoint/2010/main" val="3784744018"/>
+        <p14:creationId xmlns:p14="http://schemas.microsoft.com/office/powerpoint/2010/main" val="739420653"/>
       </p:ext>
     </p:extLst>
   </p:cSld>
@@ -7040,7 +10389,7 @@
           <p:cNvPr id="2" name="Titel 1">
             <a:extLst>
               <a:ext uri="{FF2B5EF4-FFF2-40B4-BE49-F238E27FC236}">
-                <a16:creationId xmlns:a16="http://schemas.microsoft.com/office/drawing/2014/main" id="{4B1EDC25-4F67-A652-50A5-2475BA7D4075}"/>
+                <a16:creationId xmlns:a16="http://schemas.microsoft.com/office/drawing/2014/main" id="{48170170-8A00-AA76-3DDD-DEB1F2A2E35B}"/>
               </a:ext>
             </a:extLst>
           </p:cNvPr>
@@ -7068,7 +10417,7 @@
           <p:cNvPr id="3" name="Rechteck 2">
             <a:extLst>
               <a:ext uri="{FF2B5EF4-FFF2-40B4-BE49-F238E27FC236}">
-                <a16:creationId xmlns:a16="http://schemas.microsoft.com/office/drawing/2014/main" id="{49D21743-5C07-5119-9FDE-26D0F39A29EF}"/>
+                <a16:creationId xmlns:a16="http://schemas.microsoft.com/office/drawing/2014/main" id="{FA7C86FA-AC88-1D19-D572-920B43EAD87B}"/>
               </a:ext>
             </a:extLst>
           </p:cNvPr>
@@ -7129,7 +10478,7 @@
           <p:cNvPr id="4" name="Rechteck 3">
             <a:extLst>
               <a:ext uri="{FF2B5EF4-FFF2-40B4-BE49-F238E27FC236}">
-                <a16:creationId xmlns:a16="http://schemas.microsoft.com/office/drawing/2014/main" id="{E366D7D0-C273-9326-032B-1B79411FABFF}"/>
+                <a16:creationId xmlns:a16="http://schemas.microsoft.com/office/drawing/2014/main" id="{CA82A333-EECC-CEF0-D000-B66CBCE79E47}"/>
               </a:ext>
             </a:extLst>
           </p:cNvPr>
@@ -7190,7 +10539,7 @@
           <p:cNvPr id="5" name="Rechteck 4">
             <a:extLst>
               <a:ext uri="{FF2B5EF4-FFF2-40B4-BE49-F238E27FC236}">
-                <a16:creationId xmlns:a16="http://schemas.microsoft.com/office/drawing/2014/main" id="{9475A4A6-A12A-8001-9B6F-9474ECED6E8D}"/>
+                <a16:creationId xmlns:a16="http://schemas.microsoft.com/office/drawing/2014/main" id="{9506C4F1-89BE-6486-1A7A-586191C7004B}"/>
               </a:ext>
             </a:extLst>
           </p:cNvPr>
@@ -7251,7 +10600,7 @@
           <p:cNvPr id="6" name="Rechteck 5">
             <a:extLst>
               <a:ext uri="{FF2B5EF4-FFF2-40B4-BE49-F238E27FC236}">
-                <a16:creationId xmlns:a16="http://schemas.microsoft.com/office/drawing/2014/main" id="{D949B838-9A40-1DC4-FAA3-52570989E21B}"/>
+                <a16:creationId xmlns:a16="http://schemas.microsoft.com/office/drawing/2014/main" id="{5F1F5932-40EA-DE42-9C22-20F330423BF5}"/>
               </a:ext>
             </a:extLst>
           </p:cNvPr>
@@ -7312,7 +10661,7 @@
           <p:cNvPr id="7" name="Rechteck 6">
             <a:extLst>
               <a:ext uri="{FF2B5EF4-FFF2-40B4-BE49-F238E27FC236}">
-                <a16:creationId xmlns:a16="http://schemas.microsoft.com/office/drawing/2014/main" id="{C4D8AA94-2B78-E678-EBFE-440B2CB3EBA4}"/>
+                <a16:creationId xmlns:a16="http://schemas.microsoft.com/office/drawing/2014/main" id="{03F9BA62-27AF-3325-9FB9-B858A2D6AB4B}"/>
               </a:ext>
             </a:extLst>
           </p:cNvPr>
@@ -7373,7 +10722,7 @@
           <p:cNvPr id="8" name="Rechteck 7">
             <a:extLst>
               <a:ext uri="{FF2B5EF4-FFF2-40B4-BE49-F238E27FC236}">
-                <a16:creationId xmlns:a16="http://schemas.microsoft.com/office/drawing/2014/main" id="{F980B11B-2BF7-F9DD-5E52-701C571A1A59}"/>
+                <a16:creationId xmlns:a16="http://schemas.microsoft.com/office/drawing/2014/main" id="{8F498B33-D848-7DDA-17BB-AB377EC787C7}"/>
               </a:ext>
             </a:extLst>
           </p:cNvPr>
@@ -7434,7 +10783,7 @@
           <p:cNvPr id="9" name="Rechteck 8">
             <a:extLst>
               <a:ext uri="{FF2B5EF4-FFF2-40B4-BE49-F238E27FC236}">
-                <a16:creationId xmlns:a16="http://schemas.microsoft.com/office/drawing/2014/main" id="{8BC79D97-22FD-5885-E3AD-75456407E09A}"/>
+                <a16:creationId xmlns:a16="http://schemas.microsoft.com/office/drawing/2014/main" id="{D85C9A3B-50D5-CA3A-0FB2-76F499DFEF6C}"/>
               </a:ext>
             </a:extLst>
           </p:cNvPr>
@@ -7495,7 +10844,7 @@
           <p:cNvPr id="10" name="Rechteck 9">
             <a:extLst>
               <a:ext uri="{FF2B5EF4-FFF2-40B4-BE49-F238E27FC236}">
-                <a16:creationId xmlns:a16="http://schemas.microsoft.com/office/drawing/2014/main" id="{5CFC22F3-7B6F-9BB2-D3BF-33D95631FBD2}"/>
+                <a16:creationId xmlns:a16="http://schemas.microsoft.com/office/drawing/2014/main" id="{C721ED50-BC86-8F77-2B0A-F2196AC082B5}"/>
               </a:ext>
             </a:extLst>
           </p:cNvPr>
@@ -7554,7 +10903,7 @@
     </p:spTree>
     <p:extLst>
       <p:ext uri="{BB962C8B-B14F-4D97-AF65-F5344CB8AC3E}">
-        <p14:creationId xmlns:p14="http://schemas.microsoft.com/office/powerpoint/2010/main" val="3445439383"/>
+        <p14:creationId xmlns:p14="http://schemas.microsoft.com/office/powerpoint/2010/main" val="1925313216"/>
       </p:ext>
     </p:extLst>
   </p:cSld>
@@ -8799,7 +12148,7 @@
           <p:cNvPr id="2" name="Titel 1">
             <a:extLst>
               <a:ext uri="{FF2B5EF4-FFF2-40B4-BE49-F238E27FC236}">
-                <a16:creationId xmlns:a16="http://schemas.microsoft.com/office/drawing/2014/main" id="{3F4E16AA-5939-CEFD-E9C1-88C50C23B242}"/>
+                <a16:creationId xmlns:a16="http://schemas.microsoft.com/office/drawing/2014/main" id="{AC656F3A-5D1F-200E-2E92-AC8C48A25041}"/>
               </a:ext>
             </a:extLst>
           </p:cNvPr>
@@ -8827,7 +12176,7 @@
           <p:cNvPr id="3" name="Rechteck 2">
             <a:extLst>
               <a:ext uri="{FF2B5EF4-FFF2-40B4-BE49-F238E27FC236}">
-                <a16:creationId xmlns:a16="http://schemas.microsoft.com/office/drawing/2014/main" id="{03E6F940-A1F9-1AB9-9AD6-E539D1397643}"/>
+                <a16:creationId xmlns:a16="http://schemas.microsoft.com/office/drawing/2014/main" id="{E03299C0-58DE-3BB2-3D74-586EC05268DA}"/>
               </a:ext>
             </a:extLst>
           </p:cNvPr>
@@ -8888,7 +12237,7 @@
           <p:cNvPr id="4" name="Rechteck 3">
             <a:extLst>
               <a:ext uri="{FF2B5EF4-FFF2-40B4-BE49-F238E27FC236}">
-                <a16:creationId xmlns:a16="http://schemas.microsoft.com/office/drawing/2014/main" id="{01C9E3F3-7F42-DB5D-7242-597E84B76A0F}"/>
+                <a16:creationId xmlns:a16="http://schemas.microsoft.com/office/drawing/2014/main" id="{7430E256-AFA1-361C-CFDE-8BC02FC67164}"/>
               </a:ext>
             </a:extLst>
           </p:cNvPr>
@@ -8949,7 +12298,7 @@
           <p:cNvPr id="5" name="Rechteck 4">
             <a:extLst>
               <a:ext uri="{FF2B5EF4-FFF2-40B4-BE49-F238E27FC236}">
-                <a16:creationId xmlns:a16="http://schemas.microsoft.com/office/drawing/2014/main" id="{C8868C99-FAB6-ECA9-E58D-99FDB45E454F}"/>
+                <a16:creationId xmlns:a16="http://schemas.microsoft.com/office/drawing/2014/main" id="{97C0F9E8-C08D-6FC1-F5C8-C01BB9248500}"/>
               </a:ext>
             </a:extLst>
           </p:cNvPr>
@@ -9010,7 +12359,7 @@
           <p:cNvPr id="6" name="Rechteck 5">
             <a:extLst>
               <a:ext uri="{FF2B5EF4-FFF2-40B4-BE49-F238E27FC236}">
-                <a16:creationId xmlns:a16="http://schemas.microsoft.com/office/drawing/2014/main" id="{2F3AD851-7E9A-F301-C913-7D964F16D926}"/>
+                <a16:creationId xmlns:a16="http://schemas.microsoft.com/office/drawing/2014/main" id="{760A1013-0410-D231-4C37-F4EC39BD797E}"/>
               </a:ext>
             </a:extLst>
           </p:cNvPr>
@@ -9071,7 +12420,7 @@
           <p:cNvPr id="7" name="Rechteck 6">
             <a:extLst>
               <a:ext uri="{FF2B5EF4-FFF2-40B4-BE49-F238E27FC236}">
-                <a16:creationId xmlns:a16="http://schemas.microsoft.com/office/drawing/2014/main" id="{9680FBD4-003D-FA09-C97A-8C145EEEE9C4}"/>
+                <a16:creationId xmlns:a16="http://schemas.microsoft.com/office/drawing/2014/main" id="{617A7621-D681-02D5-C949-C91952BBF910}"/>
               </a:ext>
             </a:extLst>
           </p:cNvPr>
@@ -9132,7 +12481,7 @@
           <p:cNvPr id="8" name="Rechteck 7">
             <a:extLst>
               <a:ext uri="{FF2B5EF4-FFF2-40B4-BE49-F238E27FC236}">
-                <a16:creationId xmlns:a16="http://schemas.microsoft.com/office/drawing/2014/main" id="{6F9D30BB-A85C-7A70-FDAC-6E520DBB2509}"/>
+                <a16:creationId xmlns:a16="http://schemas.microsoft.com/office/drawing/2014/main" id="{361910B1-DF04-6170-2D05-298273F4F346}"/>
               </a:ext>
             </a:extLst>
           </p:cNvPr>
@@ -9193,7 +12542,7 @@
           <p:cNvPr id="9" name="Rechteck 8">
             <a:extLst>
               <a:ext uri="{FF2B5EF4-FFF2-40B4-BE49-F238E27FC236}">
-                <a16:creationId xmlns:a16="http://schemas.microsoft.com/office/drawing/2014/main" id="{A130E45B-CBE1-79BB-CAF0-A26A57ACD925}"/>
+                <a16:creationId xmlns:a16="http://schemas.microsoft.com/office/drawing/2014/main" id="{448518C0-0C13-2FA7-D4BF-574E1440BE4E}"/>
               </a:ext>
             </a:extLst>
           </p:cNvPr>
@@ -9254,7 +12603,7 @@
           <p:cNvPr id="10" name="Rechteck 9">
             <a:extLst>
               <a:ext uri="{FF2B5EF4-FFF2-40B4-BE49-F238E27FC236}">
-                <a16:creationId xmlns:a16="http://schemas.microsoft.com/office/drawing/2014/main" id="{3D47DC3A-243C-1D59-655A-86645738B29F}"/>
+                <a16:creationId xmlns:a16="http://schemas.microsoft.com/office/drawing/2014/main" id="{3FCA58B2-C041-97E9-61BF-76F1FA28D1D1}"/>
               </a:ext>
             </a:extLst>
           </p:cNvPr>
@@ -9313,7 +12662,7 @@
     </p:spTree>
     <p:extLst>
       <p:ext uri="{BB962C8B-B14F-4D97-AF65-F5344CB8AC3E}">
-        <p14:creationId xmlns:p14="http://schemas.microsoft.com/office/powerpoint/2010/main" val="3357427284"/>
+        <p14:creationId xmlns:p14="http://schemas.microsoft.com/office/powerpoint/2010/main" val="2052021916"/>
       </p:ext>
     </p:extLst>
   </p:cSld>
@@ -10241,7 +13590,7 @@
           <p:cNvPr id="2" name="Titel 1">
             <a:extLst>
               <a:ext uri="{FF2B5EF4-FFF2-40B4-BE49-F238E27FC236}">
-                <a16:creationId xmlns:a16="http://schemas.microsoft.com/office/drawing/2014/main" id="{12A993AA-F902-B08B-B28E-70660AB7B8C6}"/>
+                <a16:creationId xmlns:a16="http://schemas.microsoft.com/office/drawing/2014/main" id="{567EA05B-96DF-0963-B841-FE53F99ED096}"/>
               </a:ext>
             </a:extLst>
           </p:cNvPr>
@@ -10269,7 +13618,7 @@
           <p:cNvPr id="3" name="Rechteck 2">
             <a:extLst>
               <a:ext uri="{FF2B5EF4-FFF2-40B4-BE49-F238E27FC236}">
-                <a16:creationId xmlns:a16="http://schemas.microsoft.com/office/drawing/2014/main" id="{2146B5A1-47C7-7BA5-6001-75A8D416AF96}"/>
+                <a16:creationId xmlns:a16="http://schemas.microsoft.com/office/drawing/2014/main" id="{8D121359-ABD9-4707-1640-335DD40FD66C}"/>
               </a:ext>
             </a:extLst>
           </p:cNvPr>
@@ -10330,7 +13679,7 @@
           <p:cNvPr id="4" name="Rechteck 3">
             <a:extLst>
               <a:ext uri="{FF2B5EF4-FFF2-40B4-BE49-F238E27FC236}">
-                <a16:creationId xmlns:a16="http://schemas.microsoft.com/office/drawing/2014/main" id="{F8C60FB2-10F8-752A-1385-08F3A9E55AE9}"/>
+                <a16:creationId xmlns:a16="http://schemas.microsoft.com/office/drawing/2014/main" id="{4574017D-9436-088B-31A7-B0B48BF24A8C}"/>
               </a:ext>
             </a:extLst>
           </p:cNvPr>
@@ -10391,7 +13740,7 @@
           <p:cNvPr id="5" name="Rechteck 4">
             <a:extLst>
               <a:ext uri="{FF2B5EF4-FFF2-40B4-BE49-F238E27FC236}">
-                <a16:creationId xmlns:a16="http://schemas.microsoft.com/office/drawing/2014/main" id="{A8BA0B1C-0C80-23BB-D86A-626115FAB835}"/>
+                <a16:creationId xmlns:a16="http://schemas.microsoft.com/office/drawing/2014/main" id="{C50056DA-FB48-19A6-9352-C2F9B4C7C571}"/>
               </a:ext>
             </a:extLst>
           </p:cNvPr>
@@ -10452,7 +13801,7 @@
           <p:cNvPr id="6" name="Rechteck 5">
             <a:extLst>
               <a:ext uri="{FF2B5EF4-FFF2-40B4-BE49-F238E27FC236}">
-                <a16:creationId xmlns:a16="http://schemas.microsoft.com/office/drawing/2014/main" id="{0A6B022A-4B0B-CFDE-E8E3-1464FC76219C}"/>
+                <a16:creationId xmlns:a16="http://schemas.microsoft.com/office/drawing/2014/main" id="{8A9F9EDB-440F-B2BF-62AA-6B7AA6BF6307}"/>
               </a:ext>
             </a:extLst>
           </p:cNvPr>
@@ -10513,7 +13862,7 @@
           <p:cNvPr id="7" name="Rechteck 6">
             <a:extLst>
               <a:ext uri="{FF2B5EF4-FFF2-40B4-BE49-F238E27FC236}">
-                <a16:creationId xmlns:a16="http://schemas.microsoft.com/office/drawing/2014/main" id="{7E38BD66-08D7-BF4E-21E0-1C0B9559344E}"/>
+                <a16:creationId xmlns:a16="http://schemas.microsoft.com/office/drawing/2014/main" id="{A30DD05F-AA52-42EE-2EAF-A421E69E8ACA}"/>
               </a:ext>
             </a:extLst>
           </p:cNvPr>
@@ -10574,7 +13923,7 @@
           <p:cNvPr id="8" name="Rechteck 7">
             <a:extLst>
               <a:ext uri="{FF2B5EF4-FFF2-40B4-BE49-F238E27FC236}">
-                <a16:creationId xmlns:a16="http://schemas.microsoft.com/office/drawing/2014/main" id="{083DD1BC-9A77-25EF-D964-D4B10E5C2625}"/>
+                <a16:creationId xmlns:a16="http://schemas.microsoft.com/office/drawing/2014/main" id="{6F2EA1D7-36EF-04D7-5644-130ADBD91646}"/>
               </a:ext>
             </a:extLst>
           </p:cNvPr>
@@ -10635,7 +13984,7 @@
           <p:cNvPr id="9" name="Rechteck 8">
             <a:extLst>
               <a:ext uri="{FF2B5EF4-FFF2-40B4-BE49-F238E27FC236}">
-                <a16:creationId xmlns:a16="http://schemas.microsoft.com/office/drawing/2014/main" id="{85F59ED9-FEED-774E-D165-3A338730EBB0}"/>
+                <a16:creationId xmlns:a16="http://schemas.microsoft.com/office/drawing/2014/main" id="{8D4D72BE-EC37-282A-1565-B9BE6BB6A16A}"/>
               </a:ext>
             </a:extLst>
           </p:cNvPr>
@@ -10696,7 +14045,7 @@
           <p:cNvPr id="10" name="Rechteck 9">
             <a:extLst>
               <a:ext uri="{FF2B5EF4-FFF2-40B4-BE49-F238E27FC236}">
-                <a16:creationId xmlns:a16="http://schemas.microsoft.com/office/drawing/2014/main" id="{A19CEABF-4964-A947-0D08-E4BBD06F64B0}"/>
+                <a16:creationId xmlns:a16="http://schemas.microsoft.com/office/drawing/2014/main" id="{01EAA37F-5187-0857-458B-83F6F46C5DB5}"/>
               </a:ext>
             </a:extLst>
           </p:cNvPr>
@@ -10755,7 +14104,7 @@
     </p:spTree>
     <p:extLst>
       <p:ext uri="{BB962C8B-B14F-4D97-AF65-F5344CB8AC3E}">
-        <p14:creationId xmlns:p14="http://schemas.microsoft.com/office/powerpoint/2010/main" val="4118962556"/>
+        <p14:creationId xmlns:p14="http://schemas.microsoft.com/office/powerpoint/2010/main" val="3835287798"/>
       </p:ext>
     </p:extLst>
   </p:cSld>
@@ -11335,7 +14684,7 @@
           <p:cNvPr id="2" name="Titel 1">
             <a:extLst>
               <a:ext uri="{FF2B5EF4-FFF2-40B4-BE49-F238E27FC236}">
-                <a16:creationId xmlns:a16="http://schemas.microsoft.com/office/drawing/2014/main" id="{EC9B7C06-91AF-5C48-E190-D889386F0A0D}"/>
+                <a16:creationId xmlns:a16="http://schemas.microsoft.com/office/drawing/2014/main" id="{1277FB5A-9A47-FA93-9925-148339583F42}"/>
               </a:ext>
             </a:extLst>
           </p:cNvPr>
@@ -11363,7 +14712,7 @@
           <p:cNvPr id="3" name="Rechteck 2">
             <a:extLst>
               <a:ext uri="{FF2B5EF4-FFF2-40B4-BE49-F238E27FC236}">
-                <a16:creationId xmlns:a16="http://schemas.microsoft.com/office/drawing/2014/main" id="{FD159543-1786-0249-6496-D43AE221768D}"/>
+                <a16:creationId xmlns:a16="http://schemas.microsoft.com/office/drawing/2014/main" id="{019C2487-21E7-41C1-0FCF-0C1A865A6774}"/>
               </a:ext>
             </a:extLst>
           </p:cNvPr>
@@ -11424,7 +14773,7 @@
           <p:cNvPr id="4" name="Rechteck 3">
             <a:extLst>
               <a:ext uri="{FF2B5EF4-FFF2-40B4-BE49-F238E27FC236}">
-                <a16:creationId xmlns:a16="http://schemas.microsoft.com/office/drawing/2014/main" id="{50798CC4-3A8C-EA36-B3E8-EB77D63DF978}"/>
+                <a16:creationId xmlns:a16="http://schemas.microsoft.com/office/drawing/2014/main" id="{C203AA31-76BA-079F-7BA6-68A042876AD5}"/>
               </a:ext>
             </a:extLst>
           </p:cNvPr>
@@ -11485,7 +14834,7 @@
           <p:cNvPr id="5" name="Rechteck 4">
             <a:extLst>
               <a:ext uri="{FF2B5EF4-FFF2-40B4-BE49-F238E27FC236}">
-                <a16:creationId xmlns:a16="http://schemas.microsoft.com/office/drawing/2014/main" id="{FCA4D83A-4558-4B3E-FD2D-E843A751A781}"/>
+                <a16:creationId xmlns:a16="http://schemas.microsoft.com/office/drawing/2014/main" id="{4D48EF84-A2BE-1528-3209-E6A1DF349CA2}"/>
               </a:ext>
             </a:extLst>
           </p:cNvPr>
@@ -11546,7 +14895,7 @@
           <p:cNvPr id="6" name="Rechteck 5">
             <a:extLst>
               <a:ext uri="{FF2B5EF4-FFF2-40B4-BE49-F238E27FC236}">
-                <a16:creationId xmlns:a16="http://schemas.microsoft.com/office/drawing/2014/main" id="{E5608DE3-FA85-6F0B-69A7-857C9FB393A3}"/>
+                <a16:creationId xmlns:a16="http://schemas.microsoft.com/office/drawing/2014/main" id="{6CCDFD97-4A93-F8E9-208A-C10950DD4967}"/>
               </a:ext>
             </a:extLst>
           </p:cNvPr>
@@ -11607,7 +14956,7 @@
           <p:cNvPr id="7" name="Rechteck 6">
             <a:extLst>
               <a:ext uri="{FF2B5EF4-FFF2-40B4-BE49-F238E27FC236}">
-                <a16:creationId xmlns:a16="http://schemas.microsoft.com/office/drawing/2014/main" id="{5A52B420-ACAB-9F46-A460-3BB53309BCE7}"/>
+                <a16:creationId xmlns:a16="http://schemas.microsoft.com/office/drawing/2014/main" id="{934758B8-01F3-EAFA-D965-23A3D61836D2}"/>
               </a:ext>
             </a:extLst>
           </p:cNvPr>
@@ -11668,7 +15017,7 @@
           <p:cNvPr id="8" name="Rechteck 7">
             <a:extLst>
               <a:ext uri="{FF2B5EF4-FFF2-40B4-BE49-F238E27FC236}">
-                <a16:creationId xmlns:a16="http://schemas.microsoft.com/office/drawing/2014/main" id="{9C09C744-9309-45BD-F986-9990EDC30CA9}"/>
+                <a16:creationId xmlns:a16="http://schemas.microsoft.com/office/drawing/2014/main" id="{3C44AEF6-B524-2116-91BF-9331992F9573}"/>
               </a:ext>
             </a:extLst>
           </p:cNvPr>
@@ -11729,7 +15078,7 @@
           <p:cNvPr id="9" name="Rechteck 8">
             <a:extLst>
               <a:ext uri="{FF2B5EF4-FFF2-40B4-BE49-F238E27FC236}">
-                <a16:creationId xmlns:a16="http://schemas.microsoft.com/office/drawing/2014/main" id="{2192D7E2-DE76-80CF-3515-5A07F9261C99}"/>
+                <a16:creationId xmlns:a16="http://schemas.microsoft.com/office/drawing/2014/main" id="{D5ACAA06-6EAC-15D4-61E6-3D22093B8F4A}"/>
               </a:ext>
             </a:extLst>
           </p:cNvPr>
@@ -11790,7 +15139,7 @@
           <p:cNvPr id="10" name="Rechteck 9">
             <a:extLst>
               <a:ext uri="{FF2B5EF4-FFF2-40B4-BE49-F238E27FC236}">
-                <a16:creationId xmlns:a16="http://schemas.microsoft.com/office/drawing/2014/main" id="{47112380-1B6C-4E9F-3203-3B2A617B7BF1}"/>
+                <a16:creationId xmlns:a16="http://schemas.microsoft.com/office/drawing/2014/main" id="{C3D54874-F76F-06D9-4D5C-D0A4E6745841}"/>
               </a:ext>
             </a:extLst>
           </p:cNvPr>
@@ -11849,7 +15198,7 @@
     </p:spTree>
     <p:extLst>
       <p:ext uri="{BB962C8B-B14F-4D97-AF65-F5344CB8AC3E}">
-        <p14:creationId xmlns:p14="http://schemas.microsoft.com/office/powerpoint/2010/main" val="1191454126"/>
+        <p14:creationId xmlns:p14="http://schemas.microsoft.com/office/powerpoint/2010/main" val="1666493642"/>
       </p:ext>
     </p:extLst>
   </p:cSld>
@@ -12547,7 +15896,7 @@
           <p:cNvPr id="2" name="Titel 1">
             <a:extLst>
               <a:ext uri="{FF2B5EF4-FFF2-40B4-BE49-F238E27FC236}">
-                <a16:creationId xmlns:a16="http://schemas.microsoft.com/office/drawing/2014/main" id="{388BB735-E8E0-8A38-8954-75C63920E164}"/>
+                <a16:creationId xmlns:a16="http://schemas.microsoft.com/office/drawing/2014/main" id="{68426C7D-FDAD-1E71-EE40-2114700585BF}"/>
               </a:ext>
             </a:extLst>
           </p:cNvPr>
@@ -12575,7 +15924,7 @@
           <p:cNvPr id="3" name="Rechteck 2">
             <a:extLst>
               <a:ext uri="{FF2B5EF4-FFF2-40B4-BE49-F238E27FC236}">
-                <a16:creationId xmlns:a16="http://schemas.microsoft.com/office/drawing/2014/main" id="{1B44FE1B-6D49-10BE-48A2-48B7DE30E951}"/>
+                <a16:creationId xmlns:a16="http://schemas.microsoft.com/office/drawing/2014/main" id="{9C9EE410-DCA8-1D7C-B02B-933DBF65C02F}"/>
               </a:ext>
             </a:extLst>
           </p:cNvPr>
@@ -12636,7 +15985,7 @@
           <p:cNvPr id="4" name="Rechteck 3">
             <a:extLst>
               <a:ext uri="{FF2B5EF4-FFF2-40B4-BE49-F238E27FC236}">
-                <a16:creationId xmlns:a16="http://schemas.microsoft.com/office/drawing/2014/main" id="{8565635C-5DA4-9EB4-0E3B-E32BBC34B57D}"/>
+                <a16:creationId xmlns:a16="http://schemas.microsoft.com/office/drawing/2014/main" id="{A60580DA-7601-2EC4-CA4F-977666CC4484}"/>
               </a:ext>
             </a:extLst>
           </p:cNvPr>
@@ -12697,7 +16046,7 @@
           <p:cNvPr id="5" name="Rechteck 4">
             <a:extLst>
               <a:ext uri="{FF2B5EF4-FFF2-40B4-BE49-F238E27FC236}">
-                <a16:creationId xmlns:a16="http://schemas.microsoft.com/office/drawing/2014/main" id="{DB5C21B2-03A2-F713-8D84-0B18564E692C}"/>
+                <a16:creationId xmlns:a16="http://schemas.microsoft.com/office/drawing/2014/main" id="{97FE8CBE-EFF8-A26D-9FD9-7DD46B5E1CCD}"/>
               </a:ext>
             </a:extLst>
           </p:cNvPr>
@@ -12758,7 +16107,7 @@
           <p:cNvPr id="6" name="Rechteck 5">
             <a:extLst>
               <a:ext uri="{FF2B5EF4-FFF2-40B4-BE49-F238E27FC236}">
-                <a16:creationId xmlns:a16="http://schemas.microsoft.com/office/drawing/2014/main" id="{1F2CCD42-3BD4-88B9-73BC-565C0594536E}"/>
+                <a16:creationId xmlns:a16="http://schemas.microsoft.com/office/drawing/2014/main" id="{B9DC67B5-EF3D-2A8E-9AA7-372528B34FD1}"/>
               </a:ext>
             </a:extLst>
           </p:cNvPr>
@@ -12819,7 +16168,7 @@
           <p:cNvPr id="7" name="Rechteck 6">
             <a:extLst>
               <a:ext uri="{FF2B5EF4-FFF2-40B4-BE49-F238E27FC236}">
-                <a16:creationId xmlns:a16="http://schemas.microsoft.com/office/drawing/2014/main" id="{DB152EAA-A5BB-0F3B-20A6-70CB7651964B}"/>
+                <a16:creationId xmlns:a16="http://schemas.microsoft.com/office/drawing/2014/main" id="{65B64E28-108C-32E3-5F4C-9F076B2A0A8C}"/>
               </a:ext>
             </a:extLst>
           </p:cNvPr>
@@ -12880,7 +16229,7 @@
           <p:cNvPr id="8" name="Rechteck 7">
             <a:extLst>
               <a:ext uri="{FF2B5EF4-FFF2-40B4-BE49-F238E27FC236}">
-                <a16:creationId xmlns:a16="http://schemas.microsoft.com/office/drawing/2014/main" id="{468812ED-3D65-1E68-5736-DBC148364941}"/>
+                <a16:creationId xmlns:a16="http://schemas.microsoft.com/office/drawing/2014/main" id="{F6EE85C4-FC24-F35E-B62E-1D660A382C25}"/>
               </a:ext>
             </a:extLst>
           </p:cNvPr>
@@ -12941,7 +16290,7 @@
           <p:cNvPr id="9" name="Rechteck 8">
             <a:extLst>
               <a:ext uri="{FF2B5EF4-FFF2-40B4-BE49-F238E27FC236}">
-                <a16:creationId xmlns:a16="http://schemas.microsoft.com/office/drawing/2014/main" id="{7E5E137A-892F-B9FA-4F86-AA3E10AC3E27}"/>
+                <a16:creationId xmlns:a16="http://schemas.microsoft.com/office/drawing/2014/main" id="{E2343A0D-C846-5F75-7EDE-44CDEF91EDD5}"/>
               </a:ext>
             </a:extLst>
           </p:cNvPr>
@@ -13002,7 +16351,7 @@
           <p:cNvPr id="10" name="Rechteck 9">
             <a:extLst>
               <a:ext uri="{FF2B5EF4-FFF2-40B4-BE49-F238E27FC236}">
-                <a16:creationId xmlns:a16="http://schemas.microsoft.com/office/drawing/2014/main" id="{B1E7C2B1-2F85-5B1D-3707-A1322B67C4AC}"/>
+                <a16:creationId xmlns:a16="http://schemas.microsoft.com/office/drawing/2014/main" id="{90E2A9C8-C62C-4B5F-8C00-25CA93CE4F9A}"/>
               </a:ext>
             </a:extLst>
           </p:cNvPr>
@@ -13061,7 +16410,7 @@
     </p:spTree>
     <p:extLst>
       <p:ext uri="{BB962C8B-B14F-4D97-AF65-F5344CB8AC3E}">
-        <p14:creationId xmlns:p14="http://schemas.microsoft.com/office/powerpoint/2010/main" val="986965355"/>
+        <p14:creationId xmlns:p14="http://schemas.microsoft.com/office/powerpoint/2010/main" val="1529493745"/>
       </p:ext>
     </p:extLst>
   </p:cSld>
@@ -13622,6 +16971,1484 @@
                                         <p:strVal val="hidden"/>
                                       </p:to>
                                     </p:set>
+                                  </p:childTnLst>
+                                </p:cTn>
+                              </p:par>
+                            </p:childTnLst>
+                          </p:cTn>
+                        </p:par>
+                      </p:childTnLst>
+                    </p:cTn>
+                  </p:par>
+                </p:childTnLst>
+              </p:cTn>
+              <p:prevCondLst>
+                <p:cond evt="onPrev" delay="0">
+                  <p:tgtEl>
+                    <p:sldTgt/>
+                  </p:tgtEl>
+                </p:cond>
+              </p:prevCondLst>
+              <p:nextCondLst>
+                <p:cond evt="onNext" delay="0">
+                  <p:tgtEl>
+                    <p:sldTgt/>
+                  </p:tgtEl>
+                </p:cond>
+              </p:nextCondLst>
+            </p:seq>
+          </p:childTnLst>
+        </p:cTn>
+      </p:par>
+    </p:tnLst>
+    <p:bldLst>
+      <p:bldP spid="3" grpId="0" animBg="1"/>
+      <p:bldP spid="4" grpId="0" animBg="1"/>
+      <p:bldP spid="5" grpId="0" animBg="1"/>
+      <p:bldP spid="6" grpId="0" animBg="1"/>
+      <p:bldP spid="7" grpId="0" animBg="1"/>
+      <p:bldP spid="8" grpId="0" animBg="1"/>
+      <p:bldP spid="9" grpId="0" animBg="1"/>
+      <p:bldP spid="10" grpId="0" animBg="1"/>
+    </p:bldLst>
+  </p:timing>
+</p:sld>
+</file>
+
+<file path=ppt/slides/slide9.xml><?xml version="1.0" encoding="utf-8"?>
+<p:sld xmlns:a="http://schemas.openxmlformats.org/drawingml/2006/main" xmlns:r="http://schemas.openxmlformats.org/officeDocument/2006/relationships" xmlns:p="http://schemas.openxmlformats.org/presentationml/2006/main">
+  <p:cSld>
+    <p:spTree>
+      <p:nvGrpSpPr>
+        <p:cNvPr id="1" name=""/>
+        <p:cNvGrpSpPr/>
+        <p:nvPr/>
+      </p:nvGrpSpPr>
+      <p:grpSpPr>
+        <a:xfrm>
+          <a:off x="0" y="0"/>
+          <a:ext cx="0" cy="0"/>
+          <a:chOff x="0" y="0"/>
+          <a:chExt cx="0" cy="0"/>
+        </a:xfrm>
+      </p:grpSpPr>
+      <p:sp>
+        <p:nvSpPr>
+          <p:cNvPr id="2" name="Titel 1">
+            <a:extLst>
+              <a:ext uri="{FF2B5EF4-FFF2-40B4-BE49-F238E27FC236}">
+                <a16:creationId xmlns:a16="http://schemas.microsoft.com/office/drawing/2014/main" id="{3AB1F7D1-6BCE-CFCF-7722-5B5343D975CB}"/>
+              </a:ext>
+            </a:extLst>
+          </p:cNvPr>
+          <p:cNvSpPr>
+            <a:spLocks noGrp="1"/>
+          </p:cNvSpPr>
+          <p:nvPr>
+            <p:ph type="title"/>
+          </p:nvPr>
+        </p:nvSpPr>
+        <p:spPr/>
+        <p:txBody>
+          <a:bodyPr/>
+          <a:lstStyle/>
+          <a:p>
+            <a:r>
+              <a:rPr lang="de-DE"/>
+              <a:t>Entrance: basic and more</a:t>
+            </a:r>
+          </a:p>
+        </p:txBody>
+      </p:sp>
+      <p:sp>
+        <p:nvSpPr>
+          <p:cNvPr id="3" name="Rechteck 2">
+            <a:extLst>
+              <a:ext uri="{FF2B5EF4-FFF2-40B4-BE49-F238E27FC236}">
+                <a16:creationId xmlns:a16="http://schemas.microsoft.com/office/drawing/2014/main" id="{5CCD6D8C-864E-64B5-6E6B-04300DD8ADD1}"/>
+              </a:ext>
+            </a:extLst>
+          </p:cNvPr>
+          <p:cNvSpPr/>
+          <p:nvPr/>
+        </p:nvSpPr>
+        <p:spPr>
+          <a:xfrm>
+            <a:off x="508000" y="1778000"/>
+            <a:ext cx="2540000" cy="1905000"/>
+          </a:xfrm>
+          <a:prstGeom prst="rect">
+            <a:avLst/>
+          </a:prstGeom>
+          <a:solidFill>
+            <a:srgbClr val="4472C4"/>
+          </a:solidFill>
+          <a:ln w="50800">
+            <a:solidFill>
+              <a:srgbClr val="C00000"/>
+            </a:solidFill>
+          </a:ln>
+        </p:spPr>
+        <p:style>
+          <a:lnRef idx="2">
+            <a:schemeClr val="accent1">
+              <a:shade val="15000"/>
+            </a:schemeClr>
+          </a:lnRef>
+          <a:fillRef idx="1">
+            <a:schemeClr val="accent1"/>
+          </a:fillRef>
+          <a:effectRef idx="0">
+            <a:schemeClr val="accent1"/>
+          </a:effectRef>
+          <a:fontRef idx="minor">
+            <a:schemeClr val="lt1"/>
+          </a:fontRef>
+        </p:style>
+        <p:txBody>
+          <a:bodyPr rtlCol="0" anchor="ctr"/>
+          <a:lstStyle/>
+          <a:p>
+            <a:pPr algn="ctr"/>
+            <a:r>
+              <a:rPr lang="de-DE" sz="2400">
+                <a:solidFill>
+                  <a:srgbClr val="FFFFFF"/>
+                </a:solidFill>
+              </a:rPr>
+              <a:t>Crawl</a:t>
+            </a:r>
+          </a:p>
+        </p:txBody>
+      </p:sp>
+      <p:sp>
+        <p:nvSpPr>
+          <p:cNvPr id="4" name="Rechteck 3">
+            <a:extLst>
+              <a:ext uri="{FF2B5EF4-FFF2-40B4-BE49-F238E27FC236}">
+                <a16:creationId xmlns:a16="http://schemas.microsoft.com/office/drawing/2014/main" id="{F87ED080-9B81-083D-1A9E-BF76E8E53467}"/>
+              </a:ext>
+            </a:extLst>
+          </p:cNvPr>
+          <p:cNvSpPr/>
+          <p:nvPr/>
+        </p:nvSpPr>
+        <p:spPr>
+          <a:xfrm>
+            <a:off x="3365500" y="1778000"/>
+            <a:ext cx="2540000" cy="1905000"/>
+          </a:xfrm>
+          <a:prstGeom prst="rect">
+            <a:avLst/>
+          </a:prstGeom>
+          <a:solidFill>
+            <a:srgbClr val="4472C4"/>
+          </a:solidFill>
+          <a:ln w="50800">
+            <a:solidFill>
+              <a:srgbClr val="C00000"/>
+            </a:solidFill>
+          </a:ln>
+        </p:spPr>
+        <p:style>
+          <a:lnRef idx="2">
+            <a:schemeClr val="accent1">
+              <a:shade val="15000"/>
+            </a:schemeClr>
+          </a:lnRef>
+          <a:fillRef idx="1">
+            <a:schemeClr val="accent1"/>
+          </a:fillRef>
+          <a:effectRef idx="0">
+            <a:schemeClr val="accent1"/>
+          </a:effectRef>
+          <a:fontRef idx="minor">
+            <a:schemeClr val="lt1"/>
+          </a:fontRef>
+        </p:style>
+        <p:txBody>
+          <a:bodyPr rtlCol="0" anchor="ctr"/>
+          <a:lstStyle/>
+          <a:p>
+            <a:pPr algn="ctr"/>
+            <a:r>
+              <a:rPr lang="de-DE" sz="2400">
+                <a:solidFill>
+                  <a:srgbClr val="FFFFFF"/>
+                </a:solidFill>
+              </a:rPr>
+              <a:t>Flash once</a:t>
+            </a:r>
+          </a:p>
+        </p:txBody>
+      </p:sp>
+      <p:sp>
+        <p:nvSpPr>
+          <p:cNvPr id="5" name="Rechteck 4">
+            <a:extLst>
+              <a:ext uri="{FF2B5EF4-FFF2-40B4-BE49-F238E27FC236}">
+                <a16:creationId xmlns:a16="http://schemas.microsoft.com/office/drawing/2014/main" id="{35ABABC1-A76A-5CAF-3F42-E40D4A91E278}"/>
+              </a:ext>
+            </a:extLst>
+          </p:cNvPr>
+          <p:cNvSpPr/>
+          <p:nvPr/>
+        </p:nvSpPr>
+        <p:spPr>
+          <a:xfrm>
+            <a:off x="6223000" y="1778000"/>
+            <a:ext cx="2540000" cy="1905000"/>
+          </a:xfrm>
+          <a:prstGeom prst="rect">
+            <a:avLst/>
+          </a:prstGeom>
+          <a:solidFill>
+            <a:srgbClr val="4472C4"/>
+          </a:solidFill>
+          <a:ln w="50800">
+            <a:solidFill>
+              <a:srgbClr val="C00000"/>
+            </a:solidFill>
+          </a:ln>
+        </p:spPr>
+        <p:style>
+          <a:lnRef idx="2">
+            <a:schemeClr val="accent1">
+              <a:shade val="15000"/>
+            </a:schemeClr>
+          </a:lnRef>
+          <a:fillRef idx="1">
+            <a:schemeClr val="accent1"/>
+          </a:fillRef>
+          <a:effectRef idx="0">
+            <a:schemeClr val="accent1"/>
+          </a:effectRef>
+          <a:fontRef idx="minor">
+            <a:schemeClr val="lt1"/>
+          </a:fontRef>
+        </p:style>
+        <p:txBody>
+          <a:bodyPr rtlCol="0" anchor="ctr"/>
+          <a:lstStyle/>
+          <a:p>
+            <a:pPr algn="ctr"/>
+            <a:r>
+              <a:rPr lang="de-DE" sz="2400">
+                <a:solidFill>
+                  <a:srgbClr val="FFFFFF"/>
+                </a:solidFill>
+              </a:rPr>
+              <a:t>Bounce</a:t>
+            </a:r>
+          </a:p>
+        </p:txBody>
+      </p:sp>
+      <p:sp>
+        <p:nvSpPr>
+          <p:cNvPr id="6" name="Rechteck 5">
+            <a:extLst>
+              <a:ext uri="{FF2B5EF4-FFF2-40B4-BE49-F238E27FC236}">
+                <a16:creationId xmlns:a16="http://schemas.microsoft.com/office/drawing/2014/main" id="{4FEAB588-61DF-80A8-A823-56DC192A0D26}"/>
+              </a:ext>
+            </a:extLst>
+          </p:cNvPr>
+          <p:cNvSpPr/>
+          <p:nvPr/>
+        </p:nvSpPr>
+        <p:spPr>
+          <a:xfrm>
+            <a:off x="9080500" y="1778000"/>
+            <a:ext cx="2540000" cy="1905000"/>
+          </a:xfrm>
+          <a:prstGeom prst="rect">
+            <a:avLst/>
+          </a:prstGeom>
+          <a:solidFill>
+            <a:srgbClr val="4472C4"/>
+          </a:solidFill>
+          <a:ln w="50800">
+            <a:solidFill>
+              <a:srgbClr val="C00000"/>
+            </a:solidFill>
+          </a:ln>
+        </p:spPr>
+        <p:style>
+          <a:lnRef idx="2">
+            <a:schemeClr val="accent1">
+              <a:shade val="15000"/>
+            </a:schemeClr>
+          </a:lnRef>
+          <a:fillRef idx="1">
+            <a:schemeClr val="accent1"/>
+          </a:fillRef>
+          <a:effectRef idx="0">
+            <a:schemeClr val="accent1"/>
+          </a:effectRef>
+          <a:fontRef idx="minor">
+            <a:schemeClr val="lt1"/>
+          </a:fontRef>
+        </p:style>
+        <p:txBody>
+          <a:bodyPr rtlCol="0" anchor="ctr"/>
+          <a:lstStyle/>
+          <a:p>
+            <a:pPr algn="ctr"/>
+            <a:r>
+              <a:rPr lang="de-DE" sz="2400">
+                <a:solidFill>
+                  <a:srgbClr val="FFFFFF"/>
+                </a:solidFill>
+              </a:rPr>
+              <a:t>Credits</a:t>
+            </a:r>
+          </a:p>
+        </p:txBody>
+      </p:sp>
+      <p:sp>
+        <p:nvSpPr>
+          <p:cNvPr id="7" name="Rechteck 6">
+            <a:extLst>
+              <a:ext uri="{FF2B5EF4-FFF2-40B4-BE49-F238E27FC236}">
+                <a16:creationId xmlns:a16="http://schemas.microsoft.com/office/drawing/2014/main" id="{8E9EDAB6-E5C6-AA94-7311-1AA36E6C5D5A}"/>
+              </a:ext>
+            </a:extLst>
+          </p:cNvPr>
+          <p:cNvSpPr/>
+          <p:nvPr/>
+        </p:nvSpPr>
+        <p:spPr>
+          <a:xfrm>
+            <a:off x="508000" y="4191000"/>
+            <a:ext cx="2540000" cy="1905000"/>
+          </a:xfrm>
+          <a:prstGeom prst="rect">
+            <a:avLst/>
+          </a:prstGeom>
+          <a:solidFill>
+            <a:srgbClr val="4472C4"/>
+          </a:solidFill>
+          <a:ln w="50800">
+            <a:solidFill>
+              <a:srgbClr val="C00000"/>
+            </a:solidFill>
+          </a:ln>
+        </p:spPr>
+        <p:style>
+          <a:lnRef idx="2">
+            <a:schemeClr val="accent1">
+              <a:shade val="15000"/>
+            </a:schemeClr>
+          </a:lnRef>
+          <a:fillRef idx="1">
+            <a:schemeClr val="accent1"/>
+          </a:fillRef>
+          <a:effectRef idx="0">
+            <a:schemeClr val="accent1"/>
+          </a:effectRef>
+          <a:fontRef idx="minor">
+            <a:schemeClr val="lt1"/>
+          </a:fontRef>
+        </p:style>
+        <p:txBody>
+          <a:bodyPr rtlCol="0" anchor="ctr"/>
+          <a:lstStyle/>
+          <a:p>
+            <a:pPr algn="ctr"/>
+            <a:r>
+              <a:rPr lang="de-DE" sz="2400">
+                <a:solidFill>
+                  <a:srgbClr val="FFFFFF"/>
+                </a:solidFill>
+              </a:rPr>
+              <a:t>Flip</a:t>
+            </a:r>
+          </a:p>
+        </p:txBody>
+      </p:sp>
+      <p:sp>
+        <p:nvSpPr>
+          <p:cNvPr id="8" name="Rechteck 7">
+            <a:extLst>
+              <a:ext uri="{FF2B5EF4-FFF2-40B4-BE49-F238E27FC236}">
+                <a16:creationId xmlns:a16="http://schemas.microsoft.com/office/drawing/2014/main" id="{CE3A9723-F48A-18B3-6EA3-9901B696F312}"/>
+              </a:ext>
+            </a:extLst>
+          </p:cNvPr>
+          <p:cNvSpPr/>
+          <p:nvPr/>
+        </p:nvSpPr>
+        <p:spPr>
+          <a:xfrm>
+            <a:off x="3365500" y="4191000"/>
+            <a:ext cx="2540000" cy="1905000"/>
+          </a:xfrm>
+          <a:prstGeom prst="rect">
+            <a:avLst/>
+          </a:prstGeom>
+          <a:solidFill>
+            <a:srgbClr val="4472C4"/>
+          </a:solidFill>
+          <a:ln w="50800">
+            <a:solidFill>
+              <a:srgbClr val="C00000"/>
+            </a:solidFill>
+          </a:ln>
+        </p:spPr>
+        <p:style>
+          <a:lnRef idx="2">
+            <a:schemeClr val="accent1">
+              <a:shade val="15000"/>
+            </a:schemeClr>
+          </a:lnRef>
+          <a:fillRef idx="1">
+            <a:schemeClr val="accent1"/>
+          </a:fillRef>
+          <a:effectRef idx="0">
+            <a:schemeClr val="accent1"/>
+          </a:effectRef>
+          <a:fontRef idx="minor">
+            <a:schemeClr val="lt1"/>
+          </a:fontRef>
+        </p:style>
+        <p:txBody>
+          <a:bodyPr rtlCol="0" anchor="ctr"/>
+          <a:lstStyle/>
+          <a:p>
+            <a:pPr algn="ctr"/>
+            <a:r>
+              <a:rPr lang="de-DE" sz="2400">
+                <a:solidFill>
+                  <a:srgbClr val="FFFFFF"/>
+                </a:solidFill>
+              </a:rPr>
+              <a:t>Shimmer</a:t>
+            </a:r>
+          </a:p>
+        </p:txBody>
+      </p:sp>
+      <p:sp>
+        <p:nvSpPr>
+          <p:cNvPr id="9" name="Rechteck 8">
+            <a:extLst>
+              <a:ext uri="{FF2B5EF4-FFF2-40B4-BE49-F238E27FC236}">
+                <a16:creationId xmlns:a16="http://schemas.microsoft.com/office/drawing/2014/main" id="{29246971-6E95-1507-DF0A-EA5C8FF02A11}"/>
+              </a:ext>
+            </a:extLst>
+          </p:cNvPr>
+          <p:cNvSpPr/>
+          <p:nvPr/>
+        </p:nvSpPr>
+        <p:spPr>
+          <a:xfrm>
+            <a:off x="6223000" y="4191000"/>
+            <a:ext cx="2540000" cy="1905000"/>
+          </a:xfrm>
+          <a:prstGeom prst="rect">
+            <a:avLst/>
+          </a:prstGeom>
+          <a:solidFill>
+            <a:srgbClr val="4472C4"/>
+          </a:solidFill>
+          <a:ln w="50800">
+            <a:solidFill>
+              <a:srgbClr val="C00000"/>
+            </a:solidFill>
+          </a:ln>
+        </p:spPr>
+        <p:style>
+          <a:lnRef idx="2">
+            <a:schemeClr val="accent1">
+              <a:shade val="15000"/>
+            </a:schemeClr>
+          </a:lnRef>
+          <a:fillRef idx="1">
+            <a:schemeClr val="accent1"/>
+          </a:fillRef>
+          <a:effectRef idx="0">
+            <a:schemeClr val="accent1"/>
+          </a:effectRef>
+          <a:fontRef idx="minor">
+            <a:schemeClr val="lt1"/>
+          </a:fontRef>
+        </p:style>
+        <p:txBody>
+          <a:bodyPr rtlCol="0" anchor="ctr"/>
+          <a:lstStyle/>
+          <a:p>
+            <a:pPr algn="ctr"/>
+            <a:r>
+              <a:rPr lang="de-DE" sz="2400">
+                <a:solidFill>
+                  <a:srgbClr val="FFFFFF"/>
+                </a:solidFill>
+              </a:rPr>
+              <a:t>Fold</a:t>
+            </a:r>
+          </a:p>
+        </p:txBody>
+      </p:sp>
+      <p:sp>
+        <p:nvSpPr>
+          <p:cNvPr id="10" name="Rechteck 9">
+            <a:extLst>
+              <a:ext uri="{FF2B5EF4-FFF2-40B4-BE49-F238E27FC236}">
+                <a16:creationId xmlns:a16="http://schemas.microsoft.com/office/drawing/2014/main" id="{0B8C30DA-9376-0DF9-EB09-D279FE637676}"/>
+              </a:ext>
+            </a:extLst>
+          </p:cNvPr>
+          <p:cNvSpPr/>
+          <p:nvPr/>
+        </p:nvSpPr>
+        <p:spPr>
+          <a:xfrm>
+            <a:off x="9080500" y="4191000"/>
+            <a:ext cx="2540000" cy="1905000"/>
+          </a:xfrm>
+          <a:prstGeom prst="rect">
+            <a:avLst/>
+          </a:prstGeom>
+          <a:solidFill>
+            <a:srgbClr val="4472C4"/>
+          </a:solidFill>
+          <a:ln w="50800">
+            <a:solidFill>
+              <a:srgbClr val="C00000"/>
+            </a:solidFill>
+          </a:ln>
+        </p:spPr>
+        <p:style>
+          <a:lnRef idx="2">
+            <a:schemeClr val="accent1">
+              <a:shade val="15000"/>
+            </a:schemeClr>
+          </a:lnRef>
+          <a:fillRef idx="1">
+            <a:schemeClr val="accent1"/>
+          </a:fillRef>
+          <a:effectRef idx="0">
+            <a:schemeClr val="accent1"/>
+          </a:effectRef>
+          <a:fontRef idx="minor">
+            <a:schemeClr val="lt1"/>
+          </a:fontRef>
+        </p:style>
+        <p:txBody>
+          <a:bodyPr rtlCol="0" anchor="ctr"/>
+          <a:lstStyle/>
+          <a:p>
+            <a:pPr algn="ctr"/>
+            <a:r>
+              <a:rPr lang="de-DE" sz="2400">
+                <a:solidFill>
+                  <a:srgbClr val="FFFFFF"/>
+                </a:solidFill>
+              </a:rPr>
+              <a:t>Zoom</a:t>
+            </a:r>
+          </a:p>
+        </p:txBody>
+      </p:sp>
+    </p:spTree>
+    <p:extLst>
+      <p:ext uri="{BB962C8B-B14F-4D97-AF65-F5344CB8AC3E}">
+        <p14:creationId xmlns:p14="http://schemas.microsoft.com/office/powerpoint/2010/main" val="2194717448"/>
+      </p:ext>
+    </p:extLst>
+  </p:cSld>
+  <p:clrMapOvr>
+    <a:masterClrMapping/>
+  </p:clrMapOvr>
+  <p:timing>
+    <p:tnLst>
+      <p:par>
+        <p:cTn id="1" dur="indefinite" restart="never" nodeType="tmRoot">
+          <p:childTnLst>
+            <p:seq concurrent="1" nextAc="seek">
+              <p:cTn id="2" dur="indefinite" nodeType="mainSeq">
+                <p:childTnLst>
+                  <p:par>
+                    <p:cTn id="3" fill="hold">
+                      <p:stCondLst>
+                        <p:cond delay="indefinite"/>
+                      </p:stCondLst>
+                      <p:childTnLst>
+                        <p:par>
+                          <p:cTn id="4" fill="hold">
+                            <p:stCondLst>
+                              <p:cond delay="0"/>
+                            </p:stCondLst>
+                            <p:childTnLst>
+                              <p:par>
+                                <p:cTn id="5" presetID="7" presetClass="entr" presetSubtype="4" fill="hold" grpId="0" nodeType="clickEffect">
+                                  <p:stCondLst>
+                                    <p:cond delay="0"/>
+                                  </p:stCondLst>
+                                  <p:childTnLst>
+                                    <p:set>
+                                      <p:cBhvr>
+                                        <p:cTn id="6" dur="1" fill="hold">
+                                          <p:stCondLst>
+                                            <p:cond delay="0"/>
+                                          </p:stCondLst>
+                                        </p:cTn>
+                                        <p:tgtEl>
+                                          <p:spTgt spid="3"/>
+                                        </p:tgtEl>
+                                        <p:attrNameLst>
+                                          <p:attrName>style.visibility</p:attrName>
+                                        </p:attrNameLst>
+                                      </p:cBhvr>
+                                      <p:to>
+                                        <p:strVal val="visible"/>
+                                      </p:to>
+                                    </p:set>
+                                    <p:anim calcmode="lin" valueType="num">
+                                      <p:cBhvr additive="base">
+                                        <p:cTn id="7" dur="800" fill="hold"/>
+                                        <p:tgtEl>
+                                          <p:spTgt spid="3"/>
+                                        </p:tgtEl>
+                                        <p:attrNameLst>
+                                          <p:attrName>ppt_x</p:attrName>
+                                        </p:attrNameLst>
+                                      </p:cBhvr>
+                                      <p:tavLst>
+                                        <p:tav tm="0">
+                                          <p:val>
+                                            <p:strVal val="#ppt_x"/>
+                                          </p:val>
+                                        </p:tav>
+                                        <p:tav tm="100000">
+                                          <p:val>
+                                            <p:strVal val="#ppt_x"/>
+                                          </p:val>
+                                        </p:tav>
+                                      </p:tavLst>
+                                    </p:anim>
+                                    <p:anim calcmode="lin" valueType="num">
+                                      <p:cBhvr additive="base">
+                                        <p:cTn id="8" dur="800" fill="hold"/>
+                                        <p:tgtEl>
+                                          <p:spTgt spid="3"/>
+                                        </p:tgtEl>
+                                        <p:attrNameLst>
+                                          <p:attrName>ppt_y</p:attrName>
+                                        </p:attrNameLst>
+                                      </p:cBhvr>
+                                      <p:tavLst>
+                                        <p:tav tm="0">
+                                          <p:val>
+                                            <p:strVal val="1+#ppt_h/2"/>
+                                          </p:val>
+                                        </p:tav>
+                                        <p:tav tm="100000">
+                                          <p:val>
+                                            <p:strVal val="#ppt_y"/>
+                                          </p:val>
+                                        </p:tav>
+                                      </p:tavLst>
+                                    </p:anim>
+                                  </p:childTnLst>
+                                </p:cTn>
+                              </p:par>
+                            </p:childTnLst>
+                          </p:cTn>
+                        </p:par>
+                        <p:par>
+                          <p:cTn id="9" fill="hold">
+                            <p:stCondLst>
+                              <p:cond delay="800"/>
+                            </p:stCondLst>
+                            <p:childTnLst>
+                              <p:par>
+                                <p:cTn id="10" presetID="11" presetClass="entr" presetSubtype="0" fill="hold" grpId="0" nodeType="afterEffect">
+                                  <p:stCondLst>
+                                    <p:cond delay="0"/>
+                                  </p:stCondLst>
+                                  <p:childTnLst>
+                                    <p:set>
+                                      <p:cBhvr>
+                                        <p:cTn id="11" dur="800">
+                                          <p:stCondLst>
+                                            <p:cond delay="0"/>
+                                          </p:stCondLst>
+                                        </p:cTn>
+                                        <p:tgtEl>
+                                          <p:spTgt spid="4"/>
+                                        </p:tgtEl>
+                                        <p:attrNameLst>
+                                          <p:attrName>style.visibility</p:attrName>
+                                        </p:attrNameLst>
+                                      </p:cBhvr>
+                                      <p:to>
+                                        <p:strVal val="visible"/>
+                                      </p:to>
+                                    </p:set>
+                                  </p:childTnLst>
+                                </p:cTn>
+                              </p:par>
+                            </p:childTnLst>
+                          </p:cTn>
+                        </p:par>
+                        <p:par>
+                          <p:cTn id="12" fill="hold">
+                            <p:stCondLst>
+                              <p:cond delay="1600"/>
+                            </p:stCondLst>
+                            <p:childTnLst>
+                              <p:par>
+                                <p:cTn id="13" presetID="26" presetClass="entr" presetSubtype="0" fill="hold" grpId="0" nodeType="afterEffect">
+                                  <p:stCondLst>
+                                    <p:cond delay="0"/>
+                                  </p:stCondLst>
+                                  <p:childTnLst>
+                                    <p:set>
+                                      <p:cBhvr>
+                                        <p:cTn id="14" dur="1" fill="hold">
+                                          <p:stCondLst>
+                                            <p:cond delay="0"/>
+                                          </p:stCondLst>
+                                        </p:cTn>
+                                        <p:tgtEl>
+                                          <p:spTgt spid="5"/>
+                                        </p:tgtEl>
+                                        <p:attrNameLst>
+                                          <p:attrName>style.visibility</p:attrName>
+                                        </p:attrNameLst>
+                                      </p:cBhvr>
+                                      <p:to>
+                                        <p:strVal val="visible"/>
+                                      </p:to>
+                                    </p:set>
+                                    <p:animEffect transition="in" filter="wipe(down)">
+                                      <p:cBhvr>
+                                        <p:cTn id="15" dur="232">
+                                          <p:stCondLst>
+                                            <p:cond delay="0"/>
+                                          </p:stCondLst>
+                                        </p:cTn>
+                                        <p:tgtEl>
+                                          <p:spTgt spid="5"/>
+                                        </p:tgtEl>
+                                      </p:cBhvr>
+                                    </p:animEffect>
+                                    <p:anim calcmode="lin" valueType="num">
+                                      <p:cBhvr>
+                                        <p:cTn id="16" dur="729" tmFilter="0,0; 0.14,0.36; 0.43,0.73; 0.71,0.91; 1.0,1.0">
+                                          <p:stCondLst>
+                                            <p:cond delay="0"/>
+                                          </p:stCondLst>
+                                        </p:cTn>
+                                        <p:tgtEl>
+                                          <p:spTgt spid="5"/>
+                                        </p:tgtEl>
+                                        <p:attrNameLst>
+                                          <p:attrName>ppt_x</p:attrName>
+                                        </p:attrNameLst>
+                                      </p:cBhvr>
+                                      <p:tavLst>
+                                        <p:tav tm="0">
+                                          <p:val>
+                                            <p:strVal val="#ppt_x-0.25"/>
+                                          </p:val>
+                                        </p:tav>
+                                        <p:tav tm="100000">
+                                          <p:val>
+                                            <p:strVal val="#ppt_x"/>
+                                          </p:val>
+                                        </p:tav>
+                                      </p:tavLst>
+                                    </p:anim>
+                                    <p:anim calcmode="lin" valueType="num">
+                                      <p:cBhvr>
+                                        <p:cTn id="17" dur="266" tmFilter="0.0,0.0; 0.25,0.07; 0.50,0.2; 0.75,0.467; 1.0,1.0">
+                                          <p:stCondLst>
+                                            <p:cond delay="0"/>
+                                          </p:stCondLst>
+                                        </p:cTn>
+                                        <p:tgtEl>
+                                          <p:spTgt spid="5"/>
+                                        </p:tgtEl>
+                                        <p:attrNameLst>
+                                          <p:attrName>ppt_y</p:attrName>
+                                        </p:attrNameLst>
+                                      </p:cBhvr>
+                                      <p:tavLst>
+                                        <p:tav tm="0" fmla="#ppt_y-sin(pi*$)/3">
+                                          <p:val>
+                                            <p:fltVal val="0.5"/>
+                                          </p:val>
+                                        </p:tav>
+                                        <p:tav tm="100000">
+                                          <p:val>
+                                            <p:fltVal val="1"/>
+                                          </p:val>
+                                        </p:tav>
+                                      </p:tavLst>
+                                    </p:anim>
+                                    <p:anim calcmode="lin" valueType="num">
+                                      <p:cBhvr>
+                                        <p:cTn id="18" dur="266" tmFilter="0, 0; 0.125,0.2665; 0.25,0.4; 0.375,0.465; 0.5,0.5;  0.625,0.535; 0.75,0.6; 0.875,0.7335; 1,1">
+                                          <p:stCondLst>
+                                            <p:cond delay="266"/>
+                                          </p:stCondLst>
+                                        </p:cTn>
+                                        <p:tgtEl>
+                                          <p:spTgt spid="5"/>
+                                        </p:tgtEl>
+                                        <p:attrNameLst>
+                                          <p:attrName>ppt_y</p:attrName>
+                                        </p:attrNameLst>
+                                      </p:cBhvr>
+                                      <p:tavLst>
+                                        <p:tav tm="0" fmla="#ppt_y-sin(pi*$)/9">
+                                          <p:val>
+                                            <p:fltVal val="0"/>
+                                          </p:val>
+                                        </p:tav>
+                                        <p:tav tm="100000">
+                                          <p:val>
+                                            <p:fltVal val="1"/>
+                                          </p:val>
+                                        </p:tav>
+                                      </p:tavLst>
+                                    </p:anim>
+                                    <p:anim calcmode="lin" valueType="num">
+                                      <p:cBhvr>
+                                        <p:cTn id="19" dur="133" tmFilter="0, 0; 0.125,0.2665; 0.25,0.4; 0.375,0.465; 0.5,0.5;  0.625,0.535; 0.75,0.6; 0.875,0.7335; 1,1">
+                                          <p:stCondLst>
+                                            <p:cond delay="530"/>
+                                          </p:stCondLst>
+                                        </p:cTn>
+                                        <p:tgtEl>
+                                          <p:spTgt spid="5"/>
+                                        </p:tgtEl>
+                                        <p:attrNameLst>
+                                          <p:attrName>ppt_y</p:attrName>
+                                        </p:attrNameLst>
+                                      </p:cBhvr>
+                                      <p:tavLst>
+                                        <p:tav tm="0" fmla="#ppt_y-sin(pi*$)/27">
+                                          <p:val>
+                                            <p:fltVal val="0"/>
+                                          </p:val>
+                                        </p:tav>
+                                        <p:tav tm="100000">
+                                          <p:val>
+                                            <p:fltVal val="1"/>
+                                          </p:val>
+                                        </p:tav>
+                                      </p:tavLst>
+                                    </p:anim>
+                                    <p:anim calcmode="lin" valueType="num">
+                                      <p:cBhvr>
+                                        <p:cTn id="20" dur="66" tmFilter="0, 0; 0.125,0.2665; 0.25,0.4; 0.375,0.465; 0.5,0.5;  0.625,0.535; 0.75,0.6; 0.875,0.7335; 1,1">
+                                          <p:stCondLst>
+                                            <p:cond delay="662"/>
+                                          </p:stCondLst>
+                                        </p:cTn>
+                                        <p:tgtEl>
+                                          <p:spTgt spid="5"/>
+                                        </p:tgtEl>
+                                        <p:attrNameLst>
+                                          <p:attrName>ppt_y</p:attrName>
+                                        </p:attrNameLst>
+                                      </p:cBhvr>
+                                      <p:tavLst>
+                                        <p:tav tm="0" fmla="#ppt_y-sin(pi*$)/81">
+                                          <p:val>
+                                            <p:fltVal val="0"/>
+                                          </p:val>
+                                        </p:tav>
+                                        <p:tav tm="100000">
+                                          <p:val>
+                                            <p:fltVal val="1"/>
+                                          </p:val>
+                                        </p:tav>
+                                      </p:tavLst>
+                                    </p:anim>
+                                    <p:animScale>
+                                      <p:cBhvr>
+                                        <p:cTn id="21" dur="10">
+                                          <p:stCondLst>
+                                            <p:cond delay="260"/>
+                                          </p:stCondLst>
+                                        </p:cTn>
+                                        <p:tgtEl>
+                                          <p:spTgt spid="5"/>
+                                        </p:tgtEl>
+                                      </p:cBhvr>
+                                      <p:to x="100000" y="60000"/>
+                                    </p:animScale>
+                                    <p:animScale>
+                                      <p:cBhvr>
+                                        <p:cTn id="22" dur="66" decel="50000">
+                                          <p:stCondLst>
+                                            <p:cond delay="270"/>
+                                          </p:stCondLst>
+                                        </p:cTn>
+                                        <p:tgtEl>
+                                          <p:spTgt spid="5"/>
+                                        </p:tgtEl>
+                                      </p:cBhvr>
+                                      <p:to x="100000" y="100000"/>
+                                    </p:animScale>
+                                    <p:animScale>
+                                      <p:cBhvr>
+                                        <p:cTn id="23" dur="10">
+                                          <p:stCondLst>
+                                            <p:cond delay="525"/>
+                                          </p:stCondLst>
+                                        </p:cTn>
+                                        <p:tgtEl>
+                                          <p:spTgt spid="5"/>
+                                        </p:tgtEl>
+                                      </p:cBhvr>
+                                      <p:to x="100000" y="80000"/>
+                                    </p:animScale>
+                                    <p:animScale>
+                                      <p:cBhvr>
+                                        <p:cTn id="24" dur="66" decel="50000">
+                                          <p:stCondLst>
+                                            <p:cond delay="535"/>
+                                          </p:stCondLst>
+                                        </p:cTn>
+                                        <p:tgtEl>
+                                          <p:spTgt spid="5"/>
+                                        </p:tgtEl>
+                                      </p:cBhvr>
+                                      <p:to x="100000" y="100000"/>
+                                    </p:animScale>
+                                    <p:animScale>
+                                      <p:cBhvr>
+                                        <p:cTn id="25" dur="10">
+                                          <p:stCondLst>
+                                            <p:cond delay="657"/>
+                                          </p:stCondLst>
+                                        </p:cTn>
+                                        <p:tgtEl>
+                                          <p:spTgt spid="5"/>
+                                        </p:tgtEl>
+                                      </p:cBhvr>
+                                      <p:to x="100000" y="90000"/>
+                                    </p:animScale>
+                                    <p:animScale>
+                                      <p:cBhvr>
+                                        <p:cTn id="26" dur="66" decel="50000">
+                                          <p:stCondLst>
+                                            <p:cond delay="667"/>
+                                          </p:stCondLst>
+                                        </p:cTn>
+                                        <p:tgtEl>
+                                          <p:spTgt spid="5"/>
+                                        </p:tgtEl>
+                                      </p:cBhvr>
+                                      <p:to x="100000" y="100000"/>
+                                    </p:animScale>
+                                    <p:animScale>
+                                      <p:cBhvr>
+                                        <p:cTn id="27" dur="10">
+                                          <p:stCondLst>
+                                            <p:cond delay="723"/>
+                                          </p:stCondLst>
+                                        </p:cTn>
+                                        <p:tgtEl>
+                                          <p:spTgt spid="5"/>
+                                        </p:tgtEl>
+                                      </p:cBhvr>
+                                      <p:to x="100000" y="95000"/>
+                                    </p:animScale>
+                                    <p:animScale>
+                                      <p:cBhvr>
+                                        <p:cTn id="28" dur="66" decel="50000">
+                                          <p:stCondLst>
+                                            <p:cond delay="734"/>
+                                          </p:stCondLst>
+                                        </p:cTn>
+                                        <p:tgtEl>
+                                          <p:spTgt spid="5"/>
+                                        </p:tgtEl>
+                                      </p:cBhvr>
+                                      <p:to x="100000" y="100000"/>
+                                    </p:animScale>
+                                  </p:childTnLst>
+                                </p:cTn>
+                              </p:par>
+                            </p:childTnLst>
+                          </p:cTn>
+                        </p:par>
+                        <p:par>
+                          <p:cTn id="29" fill="hold">
+                            <p:stCondLst>
+                              <p:cond delay="2400"/>
+                            </p:stCondLst>
+                            <p:childTnLst>
+                              <p:par>
+                                <p:cTn id="30" presetID="28" presetClass="entr" presetSubtype="0" fill="hold" grpId="0" nodeType="afterEffect">
+                                  <p:stCondLst>
+                                    <p:cond delay="0"/>
+                                  </p:stCondLst>
+                                  <p:childTnLst>
+                                    <p:set>
+                                      <p:cBhvr>
+                                        <p:cTn id="31" dur="1" fill="hold">
+                                          <p:stCondLst>
+                                            <p:cond delay="0"/>
+                                          </p:stCondLst>
+                                        </p:cTn>
+                                        <p:tgtEl>
+                                          <p:spTgt spid="6"/>
+                                        </p:tgtEl>
+                                        <p:attrNameLst>
+                                          <p:attrName>style.visibility</p:attrName>
+                                        </p:attrNameLst>
+                                      </p:cBhvr>
+                                      <p:to>
+                                        <p:strVal val="visible"/>
+                                      </p:to>
+                                    </p:set>
+                                    <p:anim calcmode="lin" valueType="num">
+                                      <p:cBhvr>
+                                        <p:cTn id="32" dur="800" fill="hold"/>
+                                        <p:tgtEl>
+                                          <p:spTgt spid="6"/>
+                                        </p:tgtEl>
+                                        <p:attrNameLst>
+                                          <p:attrName>ppt_x</p:attrName>
+                                        </p:attrNameLst>
+                                      </p:cBhvr>
+                                      <p:tavLst>
+                                        <p:tav tm="0">
+                                          <p:val>
+                                            <p:strVal val="#ppt_x"/>
+                                          </p:val>
+                                        </p:tav>
+                                        <p:tav tm="100000">
+                                          <p:val>
+                                            <p:strVal val="#ppt_x"/>
+                                          </p:val>
+                                        </p:tav>
+                                      </p:tavLst>
+                                    </p:anim>
+                                    <p:anim calcmode="lin" valueType="num">
+                                      <p:cBhvr>
+                                        <p:cTn id="33" dur="800" fill="hold"/>
+                                        <p:tgtEl>
+                                          <p:spTgt spid="6"/>
+                                        </p:tgtEl>
+                                        <p:attrNameLst>
+                                          <p:attrName>ppt_y</p:attrName>
+                                        </p:attrNameLst>
+                                      </p:cBhvr>
+                                      <p:tavLst>
+                                        <p:tav tm="0">
+                                          <p:val>
+                                            <p:strVal val="#ppt_y+1"/>
+                                          </p:val>
+                                        </p:tav>
+                                        <p:tav tm="100000">
+                                          <p:val>
+                                            <p:strVal val="#ppt_y-1"/>
+                                          </p:val>
+                                        </p:tav>
+                                      </p:tavLst>
+                                    </p:anim>
+                                  </p:childTnLst>
+                                </p:cTn>
+                              </p:par>
+                            </p:childTnLst>
+                          </p:cTn>
+                        </p:par>
+                        <p:par>
+                          <p:cTn id="34" fill="hold">
+                            <p:stCondLst>
+                              <p:cond delay="3200"/>
+                            </p:stCondLst>
+                            <p:childTnLst>
+                              <p:par>
+                                <p:cTn id="35" presetID="56" presetClass="entr" presetSubtype="0" fill="hold" grpId="0" nodeType="afterEffect">
+                                  <p:stCondLst>
+                                    <p:cond delay="0"/>
+                                  </p:stCondLst>
+                                  <p:iterate type="lt">
+                                    <p:tmPct val="10000"/>
+                                  </p:iterate>
+                                  <p:childTnLst>
+                                    <p:set>
+                                      <p:cBhvr>
+                                        <p:cTn id="36" dur="1" fill="hold">
+                                          <p:stCondLst>
+                                            <p:cond delay="0"/>
+                                          </p:stCondLst>
+                                        </p:cTn>
+                                        <p:tgtEl>
+                                          <p:spTgt spid="7"/>
+                                        </p:tgtEl>
+                                        <p:attrNameLst>
+                                          <p:attrName>style.visibility</p:attrName>
+                                        </p:attrNameLst>
+                                      </p:cBhvr>
+                                      <p:to>
+                                        <p:strVal val="visible"/>
+                                      </p:to>
+                                    </p:set>
+                                    <p:anim by="(-#ppt_w*2)" calcmode="lin" valueType="num">
+                                      <p:cBhvr rctx="PPT">
+                                        <p:cTn id="37" dur="400" autoRev="1" fill="hold">
+                                          <p:stCondLst>
+                                            <p:cond delay="0"/>
+                                          </p:stCondLst>
+                                        </p:cTn>
+                                        <p:tgtEl>
+                                          <p:spTgt spid="7"/>
+                                        </p:tgtEl>
+                                        <p:attrNameLst>
+                                          <p:attrName>ppt_w</p:attrName>
+                                        </p:attrNameLst>
+                                      </p:cBhvr>
+                                    </p:anim>
+                                    <p:anim by="(#ppt_w*0.50)" calcmode="lin" valueType="num">
+                                      <p:cBhvr>
+                                        <p:cTn id="38" dur="400" decel="50000" autoRev="1" fill="hold">
+                                          <p:stCondLst>
+                                            <p:cond delay="0"/>
+                                          </p:stCondLst>
+                                        </p:cTn>
+                                        <p:tgtEl>
+                                          <p:spTgt spid="7"/>
+                                        </p:tgtEl>
+                                        <p:attrNameLst>
+                                          <p:attrName>ppt_x</p:attrName>
+                                        </p:attrNameLst>
+                                      </p:cBhvr>
+                                    </p:anim>
+                                    <p:anim from="(-#ppt_h/2)" to="(#ppt_y)" calcmode="lin" valueType="num">
+                                      <p:cBhvr>
+                                        <p:cTn id="39" dur="800" fill="hold">
+                                          <p:stCondLst>
+                                            <p:cond delay="0"/>
+                                          </p:stCondLst>
+                                        </p:cTn>
+                                        <p:tgtEl>
+                                          <p:spTgt spid="7"/>
+                                        </p:tgtEl>
+                                        <p:attrNameLst>
+                                          <p:attrName>ppt_y</p:attrName>
+                                        </p:attrNameLst>
+                                      </p:cBhvr>
+                                    </p:anim>
+                                    <p:animRot by="21600000">
+                                      <p:cBhvr>
+                                        <p:cTn id="40" dur="800" fill="hold">
+                                          <p:stCondLst>
+                                            <p:cond delay="0"/>
+                                          </p:stCondLst>
+                                        </p:cTn>
+                                        <p:tgtEl>
+                                          <p:spTgt spid="7"/>
+                                        </p:tgtEl>
+                                        <p:attrNameLst>
+                                          <p:attrName>r</p:attrName>
+                                        </p:attrNameLst>
+                                      </p:cBhvr>
+                                    </p:animRot>
+                                  </p:childTnLst>
+                                </p:cTn>
+                              </p:par>
+                            </p:childTnLst>
+                          </p:cTn>
+                        </p:par>
+                        <p:par>
+                          <p:cTn id="41" fill="hold">
+                            <p:stCondLst>
+                              <p:cond delay="4240"/>
+                            </p:stCondLst>
+                            <p:childTnLst>
+                              <p:par>
+                                <p:cTn id="42" presetID="36" presetClass="emph" presetSubtype="0" fill="hold" grpId="0" nodeType="afterEffect">
+                                  <p:stCondLst>
+                                    <p:cond delay="0"/>
+                                  </p:stCondLst>
+                                  <p:iterate type="lt">
+                                    <p:tmPct val="10000"/>
+                                  </p:iterate>
+                                  <p:childTnLst>
+                                    <p:animScale>
+                                      <p:cBhvr>
+                                        <p:cTn id="43" dur="400" autoRev="1" fill="hold">
+                                          <p:stCondLst>
+                                            <p:cond delay="0"/>
+                                          </p:stCondLst>
+                                        </p:cTn>
+                                        <p:tgtEl>
+                                          <p:spTgt spid="8"/>
+                                        </p:tgtEl>
+                                      </p:cBhvr>
+                                      <p:to x="80000" y="100000"/>
+                                    </p:animScale>
+                                    <p:anim by="(#ppt_w*0.10)" calcmode="lin" valueType="num">
+                                      <p:cBhvr>
+                                        <p:cTn id="44" dur="400" autoRev="1" fill="hold">
+                                          <p:stCondLst>
+                                            <p:cond delay="0"/>
+                                          </p:stCondLst>
+                                        </p:cTn>
+                                        <p:tgtEl>
+                                          <p:spTgt spid="8"/>
+                                        </p:tgtEl>
+                                        <p:attrNameLst>
+                                          <p:attrName>ppt_x</p:attrName>
+                                        </p:attrNameLst>
+                                      </p:cBhvr>
+                                    </p:anim>
+                                    <p:anim by="(-#ppt_w*0.10)" calcmode="lin" valueType="num">
+                                      <p:cBhvr>
+                                        <p:cTn id="45" dur="400" autoRev="1" fill="hold">
+                                          <p:stCondLst>
+                                            <p:cond delay="0"/>
+                                          </p:stCondLst>
+                                        </p:cTn>
+                                        <p:tgtEl>
+                                          <p:spTgt spid="8"/>
+                                        </p:tgtEl>
+                                        <p:attrNameLst>
+                                          <p:attrName>ppt_y</p:attrName>
+                                        </p:attrNameLst>
+                                      </p:cBhvr>
+                                    </p:anim>
+                                    <p:animRot by="-480000">
+                                      <p:cBhvr>
+                                        <p:cTn id="46" dur="400" autoRev="1" fill="hold">
+                                          <p:stCondLst>
+                                            <p:cond delay="0"/>
+                                          </p:stCondLst>
+                                        </p:cTn>
+                                        <p:tgtEl>
+                                          <p:spTgt spid="8"/>
+                                        </p:tgtEl>
+                                        <p:attrNameLst>
+                                          <p:attrName>r</p:attrName>
+                                        </p:attrNameLst>
+                                      </p:cBhvr>
+                                    </p:animRot>
+                                  </p:childTnLst>
+                                </p:cTn>
+                              </p:par>
+                            </p:childTnLst>
+                          </p:cTn>
+                        </p:par>
+                        <p:par>
+                          <p:cTn id="47" fill="hold">
+                            <p:stCondLst>
+                              <p:cond delay="5520"/>
+                            </p:stCondLst>
+                            <p:childTnLst>
+                              <p:par>
+                                <p:cTn id="48" presetID="58" presetClass="entr" presetSubtype="0" accel="100000" fill="hold" grpId="0" nodeType="afterEffect">
+                                  <p:stCondLst>
+                                    <p:cond delay="0"/>
+                                  </p:stCondLst>
+                                  <p:childTnLst>
+                                    <p:set>
+                                      <p:cBhvr>
+                                        <p:cTn id="49" dur="1" fill="hold">
+                                          <p:stCondLst>
+                                            <p:cond delay="0"/>
+                                          </p:stCondLst>
+                                        </p:cTn>
+                                        <p:tgtEl>
+                                          <p:spTgt spid="9"/>
+                                        </p:tgtEl>
+                                        <p:attrNameLst>
+                                          <p:attrName>style.visibility</p:attrName>
+                                        </p:attrNameLst>
+                                      </p:cBhvr>
+                                      <p:to>
+                                        <p:strVal val="visible"/>
+                                      </p:to>
+                                    </p:set>
+                                    <p:anim calcmode="lin" valueType="num">
+                                      <p:cBhvr>
+                                        <p:cTn id="50" dur="800" fill="hold"/>
+                                        <p:tgtEl>
+                                          <p:spTgt spid="9"/>
+                                        </p:tgtEl>
+                                        <p:attrNameLst>
+                                          <p:attrName>ppt_w</p:attrName>
+                                        </p:attrNameLst>
+                                      </p:cBhvr>
+                                      <p:tavLst>
+                                        <p:tav tm="0">
+                                          <p:val>
+                                            <p:strVal val="#ppt_w*2.5"/>
+                                          </p:val>
+                                        </p:tav>
+                                        <p:tav tm="100000">
+                                          <p:val>
+                                            <p:strVal val="#ppt_w"/>
+                                          </p:val>
+                                        </p:tav>
+                                      </p:tavLst>
+                                    </p:anim>
+                                    <p:anim calcmode="lin" valueType="num">
+                                      <p:cBhvr>
+                                        <p:cTn id="51" dur="800" fill="hold"/>
+                                        <p:tgtEl>
+                                          <p:spTgt spid="9"/>
+                                        </p:tgtEl>
+                                        <p:attrNameLst>
+                                          <p:attrName>ppt_h</p:attrName>
+                                        </p:attrNameLst>
+                                      </p:cBhvr>
+                                      <p:tavLst>
+                                        <p:tav tm="0">
+                                          <p:val>
+                                            <p:strVal val="#ppt_h*0.01"/>
+                                          </p:val>
+                                        </p:tav>
+                                        <p:tav tm="100000">
+                                          <p:val>
+                                            <p:strVal val="#ppt_h"/>
+                                          </p:val>
+                                        </p:tav>
+                                      </p:tavLst>
+                                    </p:anim>
+                                    <p:anim calcmode="lin" valueType="num">
+                                      <p:cBhvr>
+                                        <p:cTn id="52" dur="800" fill="hold"/>
+                                        <p:tgtEl>
+                                          <p:spTgt spid="9"/>
+                                        </p:tgtEl>
+                                        <p:attrNameLst>
+                                          <p:attrName>ppt_x</p:attrName>
+                                        </p:attrNameLst>
+                                      </p:cBhvr>
+                                      <p:tavLst>
+                                        <p:tav tm="0">
+                                          <p:val>
+                                            <p:strVal val="#ppt_x"/>
+                                          </p:val>
+                                        </p:tav>
+                                        <p:tav tm="100000">
+                                          <p:val>
+                                            <p:strVal val="#ppt_x"/>
+                                          </p:val>
+                                        </p:tav>
+                                      </p:tavLst>
+                                    </p:anim>
+                                    <p:anim calcmode="lin" valueType="num">
+                                      <p:cBhvr>
+                                        <p:cTn id="53" dur="800" fill="hold"/>
+                                        <p:tgtEl>
+                                          <p:spTgt spid="9"/>
+                                        </p:tgtEl>
+                                        <p:attrNameLst>
+                                          <p:attrName>ppt_y</p:attrName>
+                                        </p:attrNameLst>
+                                      </p:cBhvr>
+                                      <p:tavLst>
+                                        <p:tav tm="0">
+                                          <p:val>
+                                            <p:strVal val="#ppt_h+1"/>
+                                          </p:val>
+                                        </p:tav>
+                                        <p:tav tm="100000">
+                                          <p:val>
+                                            <p:strVal val="#ppt_y"/>
+                                          </p:val>
+                                        </p:tav>
+                                      </p:tavLst>
+                                    </p:anim>
+                                    <p:animEffect transition="in" filter="fade">
+                                      <p:cBhvr>
+                                        <p:cTn id="54" dur="800"/>
+                                        <p:tgtEl>
+                                          <p:spTgt spid="9"/>
+                                        </p:tgtEl>
+                                      </p:cBhvr>
+                                    </p:animEffect>
+                                  </p:childTnLst>
+                                </p:cTn>
+                              </p:par>
+                            </p:childTnLst>
+                          </p:cTn>
+                        </p:par>
+                        <p:par>
+                          <p:cTn id="55" fill="hold">
+                            <p:stCondLst>
+                              <p:cond delay="6320"/>
+                            </p:stCondLst>
+                            <p:childTnLst>
+                              <p:par>
+                                <p:cTn id="56" presetID="23" presetClass="entr" presetSubtype="16" fill="hold" grpId="0" nodeType="afterEffect">
+                                  <p:stCondLst>
+                                    <p:cond delay="0"/>
+                                  </p:stCondLst>
+                                  <p:childTnLst>
+                                    <p:set>
+                                      <p:cBhvr>
+                                        <p:cTn id="57" dur="1" fill="hold">
+                                          <p:stCondLst>
+                                            <p:cond delay="0"/>
+                                          </p:stCondLst>
+                                        </p:cTn>
+                                        <p:tgtEl>
+                                          <p:spTgt spid="10"/>
+                                        </p:tgtEl>
+                                        <p:attrNameLst>
+                                          <p:attrName>style.visibility</p:attrName>
+                                        </p:attrNameLst>
+                                      </p:cBhvr>
+                                      <p:to>
+                                        <p:strVal val="visible"/>
+                                      </p:to>
+                                    </p:set>
+                                    <p:anim calcmode="lin" valueType="num">
+                                      <p:cBhvr>
+                                        <p:cTn id="58" dur="800" fill="hold"/>
+                                        <p:tgtEl>
+                                          <p:spTgt spid="10"/>
+                                        </p:tgtEl>
+                                        <p:attrNameLst>
+                                          <p:attrName>ppt_w</p:attrName>
+                                        </p:attrNameLst>
+                                      </p:cBhvr>
+                                      <p:tavLst>
+                                        <p:tav tm="0">
+                                          <p:val>
+                                            <p:fltVal val="0"/>
+                                          </p:val>
+                                        </p:tav>
+                                        <p:tav tm="100000">
+                                          <p:val>
+                                            <p:strVal val="#ppt_w"/>
+                                          </p:val>
+                                        </p:tav>
+                                      </p:tavLst>
+                                    </p:anim>
+                                    <p:anim calcmode="lin" valueType="num">
+                                      <p:cBhvr>
+                                        <p:cTn id="59" dur="800" fill="hold"/>
+                                        <p:tgtEl>
+                                          <p:spTgt spid="10"/>
+                                        </p:tgtEl>
+                                        <p:attrNameLst>
+                                          <p:attrName>ppt_h</p:attrName>
+                                        </p:attrNameLst>
+                                      </p:cBhvr>
+                                      <p:tavLst>
+                                        <p:tav tm="0">
+                                          <p:val>
+                                            <p:fltVal val="0"/>
+                                          </p:val>
+                                        </p:tav>
+                                        <p:tav tm="100000">
+                                          <p:val>
+                                            <p:strVal val="#ppt_h"/>
+                                          </p:val>
+                                        </p:tav>
+                                      </p:tavLst>
+                                    </p:anim>
                                   </p:childTnLst>
                                 </p:cTn>
                               </p:par>
